--- a/mon/ngu_van/slide/lop11/Slide_NGUVAN11_Bai1_CauChuyenVaDiemNhin_T1-11.pptx
+++ b/mon/ngu_van/slide/lop11/Slide_NGUVAN11_Bai1_CauChuyenVaDiemNhin_T1-11.pptx
@@ -46,6 +46,9 @@
     <p:sldId id="294" r:id="rId46"/>
     <p:sldId id="295" r:id="rId47"/>
     <p:sldId id="296" r:id="rId48"/>
+    <p:sldId id="297" r:id="rId49"/>
+    <p:sldId id="298" r:id="rId50"/>
+    <p:sldId id="299" r:id="rId51"/>
   </p:sldIdLst>
   <p:sldSz cx="12191695" cy="6858000" type="screen4x3"/>
   <p:notesSz cx="6858000" cy="9144000"/>
@@ -962,7 +965,7 @@
           <a:lstStyle/>
           <a:p>
             <a:r>
-              <a:t>Câu hỏi Trước khi đọc SGK tr.23; HS trao đổi cặp đôi.</a:t>
+              <a:t>Slide ĐỀ BÀI – cho HS suy nghĩ, thảo luận (không chiếu lời giải). </a:t>
             </a:r>
           </a:p>
         </p:txBody>
@@ -1032,7 +1035,7 @@
           <a:lstStyle/>
           <a:p>
             <a:r>
-              <a:t>Slide ĐỀ BÀI – cho HS suy nghĩ, thảo luận (không chiếu lời giải). </a:t>
+              <a:t>Slide LỜI GIẢI – GV chốt sau khi HS trình bày. </a:t>
             </a:r>
           </a:p>
         </p:txBody>
@@ -1102,7 +1105,7 @@
           <a:lstStyle/>
           <a:p>
             <a:r>
-              <a:t>Slide LỜI GIẢI – GV chốt sau khi HS trình bày. </a:t>
+              <a:t>Câu hỏi Trước khi đọc SGK tr.23; HS trao đổi cặp đôi.</a:t>
             </a:r>
           </a:p>
         </p:txBody>
@@ -1172,7 +1175,7 @@
           <a:lstStyle/>
           <a:p>
             <a:r>
-              <a:t>Slide ĐỀ BÀI – cho HS suy nghĩ, thảo luận (không chiếu lời giải). </a:t>
+              <a:t>Bấm vào đường link hoặc quét mã QR để mở video (cần Internet). Phim truyện dài; GV chọn trích đoạn bát cháo hành, không chiếu toàn bộ.</a:t>
             </a:r>
           </a:p>
         </p:txBody>
@@ -1242,7 +1245,7 @@
           <a:lstStyle/>
           <a:p>
             <a:r>
-              <a:t>Slide LỜI GIẢI – GV chốt sau khi HS trình bày. </a:t>
+              <a:t>Slide ĐỀ BÀI – cho HS suy nghĩ, thảo luận (không chiếu lời giải). </a:t>
             </a:r>
           </a:p>
         </p:txBody>
@@ -1382,7 +1385,7 @@
           <a:lstStyle/>
           <a:p>
             <a:r>
-              <a:t>Slide ĐỀ BÀI – cho HS suy nghĩ, thảo luận (không chiếu lời giải). </a:t>
+              <a:t>Slide LỜI GIẢI – GV chốt sau khi HS trình bày. </a:t>
             </a:r>
           </a:p>
         </p:txBody>
@@ -1452,7 +1455,7 @@
           <a:lstStyle/>
           <a:p>
             <a:r>
-              <a:t>Slide LỜI GIẢI – GV chốt sau khi HS trình bày. </a:t>
+              <a:t>Slide ĐỀ BÀI – cho HS suy nghĩ, thảo luận (không chiếu lời giải). </a:t>
             </a:r>
           </a:p>
         </p:txBody>
@@ -1522,7 +1525,7 @@
           <a:lstStyle/>
           <a:p>
             <a:r>
-              <a:t>Slide ĐỀ BÀI – cho HS suy nghĩ, thảo luận (không chiếu lời giải). </a:t>
+              <a:t>Slide LỜI GIẢI – GV chốt sau khi HS trình bày. </a:t>
             </a:r>
           </a:p>
         </p:txBody>
@@ -1592,7 +1595,7 @@
           <a:lstStyle/>
           <a:p>
             <a:r>
-              <a:t>Slide LỜI GIẢI – GV chốt sau khi HS trình bày. </a:t>
+              <a:t>Slide ĐỀ BÀI – cho HS suy nghĩ, thảo luận (không chiếu lời giải). </a:t>
             </a:r>
           </a:p>
         </p:txBody>
@@ -1662,7 +1665,7 @@
           <a:lstStyle/>
           <a:p>
             <a:r>
-              <a:t>Slide ĐỀ BÀI – cho HS suy nghĩ, thảo luận (không chiếu lời giải). </a:t>
+              <a:t>Slide LỜI GIẢI – GV chốt sau khi HS trình bày. </a:t>
             </a:r>
           </a:p>
         </p:txBody>
@@ -1732,7 +1735,7 @@
           <a:lstStyle/>
           <a:p>
             <a:r>
-              <a:t>Slide LỜI GIẢI – GV chốt sau khi HS trình bày. </a:t>
+              <a:t>Slide ĐỀ BÀI – cho HS suy nghĩ, thảo luận (không chiếu lời giải). </a:t>
             </a:r>
           </a:p>
         </p:txBody>
@@ -1802,7 +1805,7 @@
           <a:lstStyle/>
           <a:p>
             <a:r>
-              <a:t>Slide ĐỀ BÀI – cho HS suy nghĩ, thảo luận (không chiếu lời giải). </a:t>
+              <a:t>Slide LỜI GIẢI – GV chốt sau khi HS trình bày. </a:t>
             </a:r>
           </a:p>
         </p:txBody>
@@ -1872,7 +1875,7 @@
           <a:lstStyle/>
           <a:p>
             <a:r>
-              <a:t>Slide LỜI GIẢI – GV chốt sau khi HS trình bày. </a:t>
+              <a:t>Slide ĐỀ BÀI – cho HS suy nghĩ, thảo luận (không chiếu lời giải). </a:t>
             </a:r>
           </a:p>
         </p:txBody>
@@ -1942,7 +1945,7 @@
           <a:lstStyle/>
           <a:p>
             <a:r>
-              <a:t>Slide ĐỀ BÀI – cho HS suy nghĩ, thảo luận (không chiếu lời giải). </a:t>
+              <a:t>Slide LỜI GIẢI – GV chốt sau khi HS trình bày. </a:t>
             </a:r>
           </a:p>
         </p:txBody>
@@ -2012,7 +2015,7 @@
           <a:lstStyle/>
           <a:p>
             <a:r>
-              <a:t>Slide LỜI GIẢI – GV chốt sau khi HS trình bày. </a:t>
+              <a:t>Slide ĐỀ BÀI – cho HS suy nghĩ, thảo luận (không chiếu lời giải). </a:t>
             </a:r>
           </a:p>
         </p:txBody>
@@ -2082,7 +2085,7 @@
           <a:lstStyle/>
           <a:p>
             <a:r>
-              <a:t>Slide ĐỀ BÀI – cho HS suy nghĩ, thảo luận (không chiếu lời giải). </a:t>
+              <a:t>Bấm vào đường link hoặc quét mã QR để mở video (cần Internet). Phim tư liệu có hình ảnh nặng nề – chỉ chiếu trích đoạn ngắn.</a:t>
             </a:r>
           </a:p>
         </p:txBody>
@@ -2152,7 +2155,7 @@
           <a:lstStyle/>
           <a:p>
             <a:r>
-              <a:t>Slide ĐỀ BÀI – cho HS suy nghĩ, thảo luận (không chiếu lời giải). </a:t>
+              <a:t>Slide LỜI GIẢI – GV chốt sau khi HS trình bày. </a:t>
             </a:r>
           </a:p>
         </p:txBody>
@@ -2222,6 +2225,216 @@
           <a:lstStyle/>
           <a:p>
             <a:r>
+              <a:t>Slide ĐỀ BÀI – cho HS suy nghĩ, thảo luận (không chiếu lời giải). </a:t>
+            </a:r>
+          </a:p>
+        </p:txBody>
+      </p:sp>
+      <p:sp>
+        <p:nvSpPr>
+          <p:cNvPr id="4" name="Slide Number Placeholder 3"/>
+          <p:cNvSpPr>
+            <a:spLocks noGrp="1"/>
+          </p:cNvSpPr>
+          <p:nvPr>
+            <p:ph type="sldNum" idx="5" sz="quarter"/>
+          </p:nvPr>
+        </p:nvSpPr>
+        <p:spPr/>
+      </p:sp>
+    </p:spTree>
+  </p:cSld>
+  <p:clrMapOvr>
+    <a:masterClrMapping/>
+  </p:clrMapOvr>
+</p:notes>
+</file>
+
+<file path=ppt/notesSlides/notesSlide32.xml><?xml version="1.0" encoding="utf-8"?>
+<p:notes xmlns:a="http://schemas.openxmlformats.org/drawingml/2006/main" xmlns:p="http://schemas.openxmlformats.org/presentationml/2006/main" xmlns:r="http://schemas.openxmlformats.org/officeDocument/2006/relationships">
+  <p:cSld>
+    <p:spTree>
+      <p:nvGrpSpPr>
+        <p:cNvPr id="1" name=""/>
+        <p:cNvGrpSpPr/>
+        <p:nvPr/>
+      </p:nvGrpSpPr>
+      <p:grpSpPr>
+        <a:xfrm>
+          <a:off x="0" y="0"/>
+          <a:ext cx="0" cy="0"/>
+          <a:chOff x="0" y="0"/>
+          <a:chExt cx="0" cy="0"/>
+        </a:xfrm>
+      </p:grpSpPr>
+      <p:sp>
+        <p:nvSpPr>
+          <p:cNvPr id="2" name="Slide Image Placeholder 1"/>
+          <p:cNvSpPr>
+            <a:spLocks noGrp="1"/>
+          </p:cNvSpPr>
+          <p:nvPr>
+            <p:ph type="sldImg" idx="2"/>
+          </p:nvPr>
+        </p:nvSpPr>
+        <p:spPr/>
+      </p:sp>
+      <p:sp>
+        <p:nvSpPr>
+          <p:cNvPr id="3" name="Notes Placeholder 2"/>
+          <p:cNvSpPr>
+            <a:spLocks noGrp="1"/>
+          </p:cNvSpPr>
+          <p:nvPr>
+            <p:ph type="body" idx="3" sz="quarter"/>
+          </p:nvPr>
+        </p:nvSpPr>
+        <p:spPr/>
+        <p:txBody>
+          <a:bodyPr/>
+          <a:lstStyle/>
+          <a:p>
+            <a:r>
+              <a:t>Slide LỜI GIẢI – GV chốt sau khi HS trình bày. </a:t>
+            </a:r>
+          </a:p>
+        </p:txBody>
+      </p:sp>
+      <p:sp>
+        <p:nvSpPr>
+          <p:cNvPr id="4" name="Slide Number Placeholder 3"/>
+          <p:cNvSpPr>
+            <a:spLocks noGrp="1"/>
+          </p:cNvSpPr>
+          <p:nvPr>
+            <p:ph type="sldNum" idx="5" sz="quarter"/>
+          </p:nvPr>
+        </p:nvSpPr>
+        <p:spPr/>
+      </p:sp>
+    </p:spTree>
+  </p:cSld>
+  <p:clrMapOvr>
+    <a:masterClrMapping/>
+  </p:clrMapOvr>
+</p:notes>
+</file>
+
+<file path=ppt/notesSlides/notesSlide33.xml><?xml version="1.0" encoding="utf-8"?>
+<p:notes xmlns:a="http://schemas.openxmlformats.org/drawingml/2006/main" xmlns:p="http://schemas.openxmlformats.org/presentationml/2006/main" xmlns:r="http://schemas.openxmlformats.org/officeDocument/2006/relationships">
+  <p:cSld>
+    <p:spTree>
+      <p:nvGrpSpPr>
+        <p:cNvPr id="1" name=""/>
+        <p:cNvGrpSpPr/>
+        <p:nvPr/>
+      </p:nvGrpSpPr>
+      <p:grpSpPr>
+        <a:xfrm>
+          <a:off x="0" y="0"/>
+          <a:ext cx="0" cy="0"/>
+          <a:chOff x="0" y="0"/>
+          <a:chExt cx="0" cy="0"/>
+        </a:xfrm>
+      </p:grpSpPr>
+      <p:sp>
+        <p:nvSpPr>
+          <p:cNvPr id="2" name="Slide Image Placeholder 1"/>
+          <p:cNvSpPr>
+            <a:spLocks noGrp="1"/>
+          </p:cNvSpPr>
+          <p:nvPr>
+            <p:ph type="sldImg" idx="2"/>
+          </p:nvPr>
+        </p:nvSpPr>
+        <p:spPr/>
+      </p:sp>
+      <p:sp>
+        <p:nvSpPr>
+          <p:cNvPr id="3" name="Notes Placeholder 2"/>
+          <p:cNvSpPr>
+            <a:spLocks noGrp="1"/>
+          </p:cNvSpPr>
+          <p:nvPr>
+            <p:ph type="body" idx="3" sz="quarter"/>
+          </p:nvPr>
+        </p:nvSpPr>
+        <p:spPr/>
+        <p:txBody>
+          <a:bodyPr/>
+          <a:lstStyle/>
+          <a:p>
+            <a:r>
+              <a:t>Slide ĐỀ BÀI – cho HS suy nghĩ, thảo luận (không chiếu lời giải). </a:t>
+            </a:r>
+          </a:p>
+        </p:txBody>
+      </p:sp>
+      <p:sp>
+        <p:nvSpPr>
+          <p:cNvPr id="4" name="Slide Number Placeholder 3"/>
+          <p:cNvSpPr>
+            <a:spLocks noGrp="1"/>
+          </p:cNvSpPr>
+          <p:nvPr>
+            <p:ph type="sldNum" idx="5" sz="quarter"/>
+          </p:nvPr>
+        </p:nvSpPr>
+        <p:spPr/>
+      </p:sp>
+    </p:spTree>
+  </p:cSld>
+  <p:clrMapOvr>
+    <a:masterClrMapping/>
+  </p:clrMapOvr>
+</p:notes>
+</file>
+
+<file path=ppt/notesSlides/notesSlide34.xml><?xml version="1.0" encoding="utf-8"?>
+<p:notes xmlns:a="http://schemas.openxmlformats.org/drawingml/2006/main" xmlns:p="http://schemas.openxmlformats.org/presentationml/2006/main" xmlns:r="http://schemas.openxmlformats.org/officeDocument/2006/relationships">
+  <p:cSld>
+    <p:spTree>
+      <p:nvGrpSpPr>
+        <p:cNvPr id="1" name=""/>
+        <p:cNvGrpSpPr/>
+        <p:nvPr/>
+      </p:nvGrpSpPr>
+      <p:grpSpPr>
+        <a:xfrm>
+          <a:off x="0" y="0"/>
+          <a:ext cx="0" cy="0"/>
+          <a:chOff x="0" y="0"/>
+          <a:chExt cx="0" cy="0"/>
+        </a:xfrm>
+      </p:grpSpPr>
+      <p:sp>
+        <p:nvSpPr>
+          <p:cNvPr id="2" name="Slide Image Placeholder 1"/>
+          <p:cNvSpPr>
+            <a:spLocks noGrp="1"/>
+          </p:cNvSpPr>
+          <p:nvPr>
+            <p:ph type="sldImg" idx="2"/>
+          </p:nvPr>
+        </p:nvSpPr>
+        <p:spPr/>
+      </p:sp>
+      <p:sp>
+        <p:nvSpPr>
+          <p:cNvPr id="3" name="Notes Placeholder 2"/>
+          <p:cNvSpPr>
+            <a:spLocks noGrp="1"/>
+          </p:cNvSpPr>
+          <p:nvPr>
+            <p:ph type="body" idx="3" sz="quarter"/>
+          </p:nvPr>
+        </p:nvSpPr>
+        <p:spPr/>
+        <p:txBody>
+          <a:bodyPr/>
+          <a:lstStyle/>
+          <a:p>
+            <a:r>
               <a:t>Slide LỜI GIẢI – GV chốt sau khi HS trình bày. </a:t>
             </a:r>
           </a:p>
@@ -2292,7 +2505,7 @@
           <a:lstStyle/>
           <a:p>
             <a:r>
-              <a:t>Slide LỜI GIẢI – GV chốt sau khi HS trình bày. </a:t>
+              <a:t>Bấm vào đường link hoặc quét mã QR để mở video (cần Internet). </a:t>
             </a:r>
           </a:p>
         </p:txBody>
@@ -5946,7 +6159,7 @@
                 </a:solidFill>
                 <a:latin typeface="Arial"/>
               </a:rPr>
-              <a:t>TRÌNH TỰ KỂ</a:t>
+              <a:t>TÌNH HUỐNG TRUYỆN</a:t>
             </a:r>
           </a:p>
         </p:txBody>
@@ -6064,7 +6277,7 @@
                 </a:solidFill>
                 <a:latin typeface="Calibri"/>
               </a:rPr>
-              <a:t>Câu chuyện trong Vợ nhặt được kể theo trình tự nào và có thể chia làm mấy phần?</a:t>
+              <a:t>Xác định tình huống truyện và nêu ý nghĩa của nó.</a:t>
             </a:r>
           </a:p>
         </p:txBody>
@@ -6151,7 +6364,7 @@
                 </a:solidFill>
                 <a:latin typeface="Calibri"/>
               </a:rPr>
-              <a:t>💡 Đâu là hiện tại, đâu là hồi tưởng?</a:t>
+              <a:t>💡 Chú ý phản ứng của dân xóm, bà cụ Tứ và chính Tràng.</a:t>
             </a:r>
           </a:p>
         </p:txBody>
@@ -6308,7 +6521,7 @@
                 </a:solidFill>
                 <a:latin typeface="Arial"/>
               </a:rPr>
-              <a:t>TRÌNH TỰ KỂ</a:t>
+              <a:t>TÌNH HUỐNG TRUYỆN</a:t>
             </a:r>
           </a:p>
         </p:txBody>
@@ -6431,7 +6644,7 @@
                 </a:solidFill>
                 <a:latin typeface="Calibri"/>
               </a:rPr>
-              <a:t>Phần 1: Tràng đưa vợ về, xóm ngụ cư bàn tán (hiện tại) + hồi tưởng hai lần gặp.</a:t>
+              <a:t>Tràng – nghèo, xấu, dân ngụ cư – “nhặt” được vợ giữa nạn đói.</a:t>
             </a:r>
           </a:p>
           <a:p>
@@ -6452,7 +6665,7 @@
                 </a:solidFill>
                 <a:latin typeface="Calibri"/>
               </a:rPr>
-              <a:t>Phần 2: bà cụ Tứ về, đón nhận nàng dâu.</a:t>
+              <a:t>Cả xóm ngạc nhiên; bà cụ Tứ ngạc nhiên, ai oán; Tràng “ngờ ngợ”.</a:t>
             </a:r>
           </a:p>
           <a:p>
@@ -6473,7 +6686,7 @@
                 </a:solidFill>
                 <a:latin typeface="Calibri"/>
               </a:rPr>
-              <a:t>Phần 3: buổi sáng đầu tiên – bữa cơm, tiếng trống thuế, lá cờ đỏ.</a:t>
+              <a:t>Tình huống vừa lạ, vừa éo le: hạnh phúc nảy sinh bên bờ cái chết.</a:t>
             </a:r>
           </a:p>
         </p:txBody>
@@ -6487,7 +6700,7 @@
         <p:spPr>
           <a:xfrm>
             <a:off x="731520" y="5074920"/>
-            <a:ext cx="10789920" cy="731520"/>
+            <a:ext cx="10789920" cy="1188720"/>
           </a:xfrm>
           <a:prstGeom prst="roundRect">
             <a:avLst>
@@ -6535,7 +6748,7 @@
         <p:spPr>
           <a:xfrm>
             <a:off x="914400" y="5074920"/>
-            <a:ext cx="10424160" cy="731520"/>
+            <a:ext cx="10424160" cy="1188720"/>
           </a:xfrm>
           <a:prstGeom prst="rect">
             <a:avLst/>
@@ -6560,7 +6773,7 @@
                 </a:solidFill>
                 <a:latin typeface="Calibri"/>
               </a:rPr>
-              <a:t>Không theo trật tự thời gian tuyến tính → tạo tò mò, hấp dẫn.</a:t>
+              <a:t>Bộc lộ thảm cảnh nạn đói và khát vọng sống, tình thương của con người.</a:t>
             </a:r>
           </a:p>
         </p:txBody>
@@ -6717,7 +6930,7 @@
                 </a:solidFill>
                 <a:latin typeface="Arial"/>
               </a:rPr>
-              <a:t>SỰ THAY ĐỔI CỦA NHÂN VẬT</a:t>
+              <a:t>TRÌNH TỰ KỂ</a:t>
             </a:r>
           </a:p>
         </p:txBody>
@@ -6835,7 +7048,7 @@
                 </a:solidFill>
                 <a:latin typeface="Calibri"/>
               </a:rPr>
-              <a:t>Theo trình tự câu chuyện, Tràng, người vợ nhặt, bà cụ Tứ thay đổi thế nào từ diện mạo, tâm trạng đến cách ứng xử?</a:t>
+              <a:t>Câu chuyện trong Vợ nhặt được kể theo trình tự nào và có thể chia làm mấy phần?</a:t>
             </a:r>
           </a:p>
         </p:txBody>
@@ -6922,7 +7135,7 @@
                 </a:solidFill>
                 <a:latin typeface="Calibri"/>
               </a:rPr>
-              <a:t>💡 Lập bảng: lúc đầu – về sau.</a:t>
+              <a:t>💡 Đâu là hiện tại, đâu là hồi tưởng?</a:t>
             </a:r>
           </a:p>
         </p:txBody>
@@ -7079,7 +7292,7 @@
                 </a:solidFill>
                 <a:latin typeface="Arial"/>
               </a:rPr>
-              <a:t>SỰ THAY ĐỔI CỦA NHÂN VẬT</a:t>
+              <a:t>TRÌNH TỰ KỂ</a:t>
             </a:r>
           </a:p>
         </p:txBody>
@@ -7202,7 +7415,7 @@
                 </a:solidFill>
                 <a:latin typeface="Calibri"/>
               </a:rPr>
-              <a:t>Tràng: “phớn phở”, ngượng nghịu → thấy mình nên người, gắn bó với gia đình.</a:t>
+              <a:t>Phần 1: Tràng đưa vợ về, xóm ngụ cư bàn tán (hiện tại) + hồi tưởng hai lần gặp.</a:t>
             </a:r>
           </a:p>
           <a:p>
@@ -7223,7 +7436,7 @@
                 </a:solidFill>
                 <a:latin typeface="Calibri"/>
               </a:rPr>
-              <a:t>Người vợ: chao chát, chỏng lỏn → hiền hậu, đúng mực.</a:t>
+              <a:t>Phần 2: bà cụ Tứ về, đón nhận nàng dâu.</a:t>
             </a:r>
           </a:p>
           <a:p>
@@ -7244,7 +7457,7 @@
                 </a:solidFill>
                 <a:latin typeface="Calibri"/>
               </a:rPr>
-              <a:t>Bà cụ Tứ: ngạc nhiên, ai oán → cảm thông, vun vén, nói chuyện vui, tin tương lai.</a:t>
+              <a:t>Phần 3: buổi sáng đầu tiên – bữa cơm, tiếng trống thuế, lá cờ đỏ.</a:t>
             </a:r>
           </a:p>
         </p:txBody>
@@ -7331,7 +7544,7 @@
                 </a:solidFill>
                 <a:latin typeface="Calibri"/>
               </a:rPr>
-              <a:t>Tình thương làm con người đẹp lên ngay giữa cái đói.</a:t>
+              <a:t>Không theo trật tự thời gian tuyến tính → tạo tò mò, hấp dẫn.</a:t>
             </a:r>
           </a:p>
         </p:txBody>
@@ -7488,7 +7701,7 @@
                 </a:solidFill>
                 <a:latin typeface="Arial"/>
               </a:rPr>
-              <a:t>ĐIỂM NHÌN VÀ GIỌNG ĐIỆU</a:t>
+              <a:t>SỰ THAY ĐỔI CỦA NHÂN VẬT</a:t>
             </a:r>
           </a:p>
         </p:txBody>
@@ -7606,7 +7819,7 @@
                 </a:solidFill>
                 <a:latin typeface="Calibri"/>
               </a:rPr>
-              <a:t>Phân tích nét đáng chú ý trong cách người kể chuyện quan sát, miêu tả sự thay đổi của nhân vật (điểm nhìn, lời kể, giọng điệu).</a:t>
+              <a:t>Theo trình tự câu chuyện, Tràng, người vợ nhặt, bà cụ Tứ thay đổi thế nào từ diện mạo, tâm trạng đến cách ứng xử?</a:t>
             </a:r>
           </a:p>
         </p:txBody>
@@ -7620,7 +7833,7 @@
         <p:spPr>
           <a:xfrm>
             <a:off x="731520" y="5120640"/>
-            <a:ext cx="10789920" cy="1112520"/>
+            <a:ext cx="10789920" cy="693420"/>
           </a:xfrm>
           <a:prstGeom prst="roundRect">
             <a:avLst>
@@ -7668,7 +7881,7 @@
         <p:spPr>
           <a:xfrm>
             <a:off x="914400" y="5120640"/>
-            <a:ext cx="10424160" cy="1112520"/>
+            <a:ext cx="10424160" cy="693420"/>
           </a:xfrm>
           <a:prstGeom prst="rect">
             <a:avLst/>
@@ -7693,7 +7906,7 @@
                 </a:solidFill>
                 <a:latin typeface="Calibri"/>
               </a:rPr>
-              <a:t>💡 So sánh đoạn “người trong xóm bỗng thấy…” với đoạn bà cụ Tứ nghĩ về con.</a:t>
+              <a:t>💡 Lập bảng: lúc đầu – về sau.</a:t>
             </a:r>
           </a:p>
         </p:txBody>
@@ -7850,7 +8063,7 @@
                 </a:solidFill>
                 <a:latin typeface="Arial"/>
               </a:rPr>
-              <a:t>ĐIỂM NHÌN VÀ GIỌNG ĐIỆU</a:t>
+              <a:t>SỰ THAY ĐỔI CỦA NHÂN VẬT</a:t>
             </a:r>
           </a:p>
         </p:txBody>
@@ -7973,7 +8186,7 @@
                 </a:solidFill>
                 <a:latin typeface="Calibri"/>
               </a:rPr>
-              <a:t>Ngôi thứ ba, điểm nhìn linh hoạt: bên ngoài (dân xóm) ↔ bên trong (Tràng, bà cụ Tứ).</a:t>
+              <a:t>Tràng: “phớn phở”, ngượng nghịu → thấy mình nên người, gắn bó với gia đình.</a:t>
             </a:r>
           </a:p>
           <a:p>
@@ -7994,7 +8207,7 @@
                 </a:solidFill>
                 <a:latin typeface="Calibri"/>
               </a:rPr>
-              <a:t>Lời kể hòa vào lời nửa trực tiếp của nhân vật.</a:t>
+              <a:t>Người vợ: chao chát, chỏng lỏn → hiền hậu, đúng mực.</a:t>
             </a:r>
           </a:p>
           <a:p>
@@ -8015,7 +8228,7 @@
                 </a:solidFill>
                 <a:latin typeface="Calibri"/>
               </a:rPr>
-              <a:t>Giọng điệu xót xa mà ấm áp, hóm hỉnh.</a:t>
+              <a:t>Bà cụ Tứ: ngạc nhiên, ai oán → cảm thông, vun vén, nói chuyện vui, tin tương lai.</a:t>
             </a:r>
           </a:p>
         </p:txBody>
@@ -8102,7 +8315,7 @@
                 </a:solidFill>
                 <a:latin typeface="Calibri"/>
               </a:rPr>
-              <a:t>Điểm nhìn linh hoạt giúp soi thấu tâm lí, tạo sự đồng cảm.</a:t>
+              <a:t>Tình thương làm con người đẹp lên ngay giữa cái đói.</a:t>
             </a:r>
           </a:p>
         </p:txBody>
@@ -8259,7 +8472,7 @@
                 </a:solidFill>
                 <a:latin typeface="Arial"/>
               </a:rPr>
-              <a:t>CHỦ ĐỀ – “CỔ TÍCH TRONG NẠN ĐÓI”?</a:t>
+              <a:t>ĐIỂM NHÌN VÀ GIỌNG ĐIỆU</a:t>
             </a:r>
           </a:p>
         </p:txBody>
@@ -8377,7 +8590,7 @@
                 </a:solidFill>
                 <a:latin typeface="Calibri"/>
               </a:rPr>
-              <a:t>Nêu chủ đề, đánh giá giá trị tư tưởng. Có thể xem Vợ nhặt là “câu chuyện cổ tích trong nạn đói” không?</a:t>
+              <a:t>Phân tích nét đáng chú ý trong cách người kể chuyện quan sát, miêu tả sự thay đổi của nhân vật (điểm nhìn, lời kể, giọng điệu).</a:t>
             </a:r>
           </a:p>
         </p:txBody>
@@ -8391,7 +8604,7 @@
         <p:spPr>
           <a:xfrm>
             <a:off x="731520" y="5120640"/>
-            <a:ext cx="10789920" cy="693420"/>
+            <a:ext cx="10789920" cy="1112520"/>
           </a:xfrm>
           <a:prstGeom prst="roundRect">
             <a:avLst>
@@ -8439,7 +8652,7 @@
         <p:spPr>
           <a:xfrm>
             <a:off x="914400" y="5120640"/>
-            <a:ext cx="10424160" cy="693420"/>
+            <a:ext cx="10424160" cy="1112520"/>
           </a:xfrm>
           <a:prstGeom prst="rect">
             <a:avLst/>
@@ -8464,7 +8677,7 @@
                 </a:solidFill>
                 <a:latin typeface="Calibri"/>
               </a:rPr>
-              <a:t>💡 Có phép màu nào không? Niềm tin đến từ đâu?</a:t>
+              <a:t>💡 So sánh đoạn “người trong xóm bỗng thấy…” với đoạn bà cụ Tứ nghĩ về con.</a:t>
             </a:r>
           </a:p>
         </p:txBody>
@@ -8621,7 +8834,7 @@
                 </a:solidFill>
                 <a:latin typeface="Arial"/>
               </a:rPr>
-              <a:t>CHỦ ĐỀ – “CỔ TÍCH TRONG NẠN ĐÓI”?</a:t>
+              <a:t>ĐIỂM NHÌN VÀ GIỌNG ĐIỆU</a:t>
             </a:r>
           </a:p>
         </p:txBody>
@@ -8744,7 +8957,7 @@
                 </a:solidFill>
                 <a:latin typeface="Calibri"/>
               </a:rPr>
-              <a:t>Chủ đề: khát vọng sống, tình thương của người lao động bên bờ cái chết.</a:t>
+              <a:t>Ngôi thứ ba, điểm nhìn linh hoạt: bên ngoài (dân xóm) ↔ bên trong (Tràng, bà cụ Tứ).</a:t>
             </a:r>
           </a:p>
           <a:p>
@@ -8765,7 +8978,7 @@
                 </a:solidFill>
                 <a:latin typeface="Calibri"/>
               </a:rPr>
-              <a:t>Giống cổ tích: người nghèo “đổi đời”, có hạnh phúc.</a:t>
+              <a:t>Lời kể hòa vào lời nửa trực tiếp của nhân vật.</a:t>
             </a:r>
           </a:p>
           <a:p>
@@ -8786,7 +8999,7 @@
                 </a:solidFill>
                 <a:latin typeface="Calibri"/>
               </a:rPr>
-              <a:t>Khác: không có phép màu; niềm tin đến từ tình người và lá cờ đỏ cách mạng.</a:t>
+              <a:t>Giọng điệu xót xa mà ấm áp, hóm hỉnh.</a:t>
             </a:r>
           </a:p>
         </p:txBody>
@@ -8873,7 +9086,7 @@
                 </a:solidFill>
                 <a:latin typeface="Calibri"/>
               </a:rPr>
-              <a:t>Giá trị hiện thực và giá trị nhân đạo sâu sắc.</a:t>
+              <a:t>Điểm nhìn linh hoạt giúp soi thấu tâm lí, tạo sự đồng cảm.</a:t>
             </a:r>
           </a:p>
         </p:txBody>
@@ -8892,7 +9105,7 @@
     <p:bg>
       <p:bgPr>
         <a:solidFill>
-          <a:srgbClr val="F8F9FA"/>
+          <a:srgbClr val="FFFFFF"/>
         </a:solidFill>
         <a:effectLst/>
       </p:bgPr>
@@ -8912,14 +9125,14 @@
         </p:nvSpPr>
         <p:spPr>
           <a:xfrm>
-            <a:off x="548640" y="2926080"/>
-            <a:ext cx="164592" cy="1005840"/>
+            <a:off x="457200" y="384048"/>
+            <a:ext cx="109728" cy="658368"/>
           </a:xfrm>
           <a:prstGeom prst="rect">
             <a:avLst/>
           </a:prstGeom>
           <a:solidFill>
-            <a:srgbClr val="991B1B"/>
+            <a:srgbClr val="1E40AF"/>
           </a:solidFill>
           <a:ln>
             <a:noFill/>
@@ -8950,14 +9163,67 @@
       </p:sp>
       <p:sp>
         <p:nvSpPr>
-          <p:cNvPr id="3" name="TextBox 2"/>
+          <p:cNvPr id="3" name="Rounded Rectangle 2"/>
+          <p:cNvSpPr/>
+          <p:nvPr/>
+        </p:nvSpPr>
+        <p:spPr>
+          <a:xfrm>
+            <a:off x="10253167" y="457200"/>
+            <a:ext cx="1389888" cy="457200"/>
+          </a:xfrm>
+          <a:prstGeom prst="roundRect">
+            <a:avLst/>
+          </a:prstGeom>
+          <a:solidFill>
+            <a:srgbClr val="1E40AF"/>
+          </a:solidFill>
+          <a:ln>
+            <a:noFill/>
+          </a:ln>
+          <a:effectLst/>
+        </p:spPr>
+        <p:style>
+          <a:lnRef idx="1">
+            <a:schemeClr val="accent1"/>
+          </a:lnRef>
+          <a:fillRef idx="3">
+            <a:schemeClr val="accent1"/>
+          </a:fillRef>
+          <a:effectRef idx="2">
+            <a:schemeClr val="accent1"/>
+          </a:effectRef>
+          <a:fontRef idx="minor">
+            <a:schemeClr val="lt1"/>
+          </a:fontRef>
+        </p:style>
+        <p:txBody>
+          <a:bodyPr rtlCol="0" anchor="ctr" wrap="none" tIns="0" bIns="0"/>
+          <a:lstStyle/>
+          <a:p>
+            <a:pPr algn="ctr"/>
+            <a:r>
+              <a:rPr sz="1400" b="1">
+                <a:solidFill>
+                  <a:srgbClr val="FFFFFF"/>
+                </a:solidFill>
+                <a:latin typeface="Arial"/>
+              </a:rPr>
+              <a:t>ĐỀ BÀI</a:t>
+            </a:r>
+          </a:p>
+        </p:txBody>
+      </p:sp>
+      <p:sp>
+        <p:nvSpPr>
+          <p:cNvPr id="4" name="TextBox 3"/>
           <p:cNvSpPr txBox="1"/>
           <p:nvPr/>
         </p:nvSpPr>
         <p:spPr>
           <a:xfrm>
-            <a:off x="914400" y="2743200"/>
-            <a:ext cx="10515600" cy="1371600"/>
+            <a:off x="731520" y="274320"/>
+            <a:ext cx="9582912" cy="868680"/>
           </a:xfrm>
           <a:prstGeom prst="rect">
             <a:avLst/>
@@ -8965,7 +9231,120 @@
           <a:noFill/>
         </p:spPr>
         <p:txBody>
-          <a:bodyPr wrap="square" anchor="ctr" lIns="45720" rIns="45720">
+          <a:bodyPr wrap="square" anchor="ctr">
+            <a:spAutoFit/>
+          </a:bodyPr>
+          <a:lstStyle/>
+          <a:p>
+            <a:r>
+              <a:rPr sz="3600" b="1">
+                <a:solidFill>
+                  <a:srgbClr val="1E40AF"/>
+                </a:solidFill>
+                <a:latin typeface="Arial"/>
+              </a:rPr>
+              <a:t>CHỦ ĐỀ – “CỔ TÍCH TRONG NẠN ĐÓI”?</a:t>
+            </a:r>
+          </a:p>
+        </p:txBody>
+      </p:sp>
+      <p:sp>
+        <p:nvSpPr>
+          <p:cNvPr id="5" name="Rectangle 4"/>
+          <p:cNvSpPr/>
+          <p:nvPr/>
+        </p:nvSpPr>
+        <p:spPr>
+          <a:xfrm>
+            <a:off x="457200" y="1207008"/>
+            <a:ext cx="11274552" cy="22000"/>
+          </a:xfrm>
+          <a:prstGeom prst="rect">
+            <a:avLst/>
+          </a:prstGeom>
+          <a:solidFill>
+            <a:srgbClr val="E2E8F0"/>
+          </a:solidFill>
+          <a:ln>
+            <a:noFill/>
+          </a:ln>
+          <a:effectLst/>
+        </p:spPr>
+        <p:style>
+          <a:lnRef idx="1">
+            <a:schemeClr val="accent1"/>
+          </a:lnRef>
+          <a:fillRef idx="3">
+            <a:schemeClr val="accent1"/>
+          </a:fillRef>
+          <a:effectRef idx="2">
+            <a:schemeClr val="accent1"/>
+          </a:effectRef>
+          <a:fontRef idx="minor">
+            <a:schemeClr val="lt1"/>
+          </a:fontRef>
+        </p:style>
+        <p:txBody>
+          <a:bodyPr rtlCol="0" anchor="ctr"/>
+          <a:lstStyle/>
+          <a:p>
+            <a:pPr algn="ctr"/>
+          </a:p>
+        </p:txBody>
+      </p:sp>
+      <p:sp>
+        <p:nvSpPr>
+          <p:cNvPr id="6" name="TextBox 5"/>
+          <p:cNvSpPr txBox="1"/>
+          <p:nvPr/>
+        </p:nvSpPr>
+        <p:spPr>
+          <a:xfrm>
+            <a:off x="457200" y="6355080"/>
+            <a:ext cx="11274552" cy="365760"/>
+          </a:xfrm>
+          <a:prstGeom prst="rect">
+            <a:avLst/>
+          </a:prstGeom>
+          <a:noFill/>
+        </p:spPr>
+        <p:txBody>
+          <a:bodyPr wrap="none">
+            <a:spAutoFit/>
+          </a:bodyPr>
+          <a:lstStyle/>
+          <a:p>
+            <a:pPr algn="r"/>
+            <a:r>
+              <a:rPr sz="1200">
+                <a:solidFill>
+                  <a:srgbClr val="64748B"/>
+                </a:solidFill>
+                <a:latin typeface="Calibri"/>
+              </a:rPr>
+              <a:t>Ngữ văn 11 · Bài 1: Câu Chuyện Và Điểm Nhìn Trong Truyện Kể          18</a:t>
+            </a:r>
+          </a:p>
+        </p:txBody>
+      </p:sp>
+      <p:sp>
+        <p:nvSpPr>
+          <p:cNvPr id="7" name="TextBox 6"/>
+          <p:cNvSpPr txBox="1"/>
+          <p:nvPr/>
+        </p:nvSpPr>
+        <p:spPr>
+          <a:xfrm>
+            <a:off x="731520" y="1463040"/>
+            <a:ext cx="10789920" cy="3566160"/>
+          </a:xfrm>
+          <a:prstGeom prst="rect">
+            <a:avLst/>
+          </a:prstGeom>
+          <a:noFill/>
+        </p:spPr>
+        <p:txBody>
+          <a:bodyPr wrap="square" anchor="t" lIns="45720" rIns="45720">
             <a:spAutoFit/>
           </a:bodyPr>
           <a:lstStyle/>
@@ -8976,13 +9355,100 @@
               </a:spcAft>
             </a:pPr>
             <a:r>
-              <a:rPr sz="3600" b="1">
+              <a:rPr sz="2600" b="1">
+                <a:solidFill>
+                  <a:srgbClr val="1E293B"/>
+                </a:solidFill>
+                <a:latin typeface="Calibri"/>
+              </a:rPr>
+              <a:t>Nêu chủ đề, đánh giá giá trị tư tưởng. Có thể xem Vợ nhặt là “câu chuyện cổ tích trong nạn đói” không?</a:t>
+            </a:r>
+          </a:p>
+        </p:txBody>
+      </p:sp>
+      <p:sp>
+        <p:nvSpPr>
+          <p:cNvPr id="8" name="Rounded Rectangle 7"/>
+          <p:cNvSpPr/>
+          <p:nvPr/>
+        </p:nvSpPr>
+        <p:spPr>
+          <a:xfrm>
+            <a:off x="731520" y="5120640"/>
+            <a:ext cx="10789920" cy="693420"/>
+          </a:xfrm>
+          <a:prstGeom prst="roundRect">
+            <a:avLst>
+              <a:gd name="adj" fmla="val 8000"/>
+            </a:avLst>
+          </a:prstGeom>
+          <a:solidFill>
+            <a:srgbClr val="EFF4FF"/>
+          </a:solidFill>
+          <a:ln w="19050">
+            <a:solidFill>
+              <a:srgbClr val="1E40AF"/>
+            </a:solidFill>
+          </a:ln>
+          <a:effectLst/>
+        </p:spPr>
+        <p:style>
+          <a:lnRef idx="1">
+            <a:schemeClr val="accent1"/>
+          </a:lnRef>
+          <a:fillRef idx="3">
+            <a:schemeClr val="accent1"/>
+          </a:fillRef>
+          <a:effectRef idx="2">
+            <a:schemeClr val="accent1"/>
+          </a:effectRef>
+          <a:fontRef idx="minor">
+            <a:schemeClr val="lt1"/>
+          </a:fontRef>
+        </p:style>
+        <p:txBody>
+          <a:bodyPr rtlCol="0" anchor="ctr"/>
+          <a:lstStyle/>
+          <a:p>
+            <a:pPr algn="ctr"/>
+          </a:p>
+        </p:txBody>
+      </p:sp>
+      <p:sp>
+        <p:nvSpPr>
+          <p:cNvPr id="9" name="TextBox 8"/>
+          <p:cNvSpPr txBox="1"/>
+          <p:nvPr/>
+        </p:nvSpPr>
+        <p:spPr>
+          <a:xfrm>
+            <a:off x="914400" y="5120640"/>
+            <a:ext cx="10424160" cy="693420"/>
+          </a:xfrm>
+          <a:prstGeom prst="rect">
+            <a:avLst/>
+          </a:prstGeom>
+          <a:noFill/>
+        </p:spPr>
+        <p:txBody>
+          <a:bodyPr wrap="square" anchor="ctr" lIns="45720" rIns="45720">
+            <a:spAutoFit/>
+          </a:bodyPr>
+          <a:lstStyle/>
+          <a:p>
+            <a:pPr algn="l">
+              <a:spcAft>
+                <a:spcPts val="400"/>
+              </a:spcAft>
+            </a:pPr>
+            <a:r>
+              <a:rPr sz="2200" b="1">
                 <a:solidFill>
                   <a:srgbClr val="1E40AF"/>
                 </a:solidFill>
                 <a:latin typeface="Calibri"/>
               </a:rPr>
-              <a:t>TIẾT 4 – 6: CHÍ PHÈO (Nam Cao)</a:t>
+              <a:t>💡 Có phép màu nào không? Niềm tin đến từ đâu?</a:t>
             </a:r>
           </a:p>
         </p:txBody>
@@ -9065,14 +9531,14 @@
         </p:nvSpPr>
         <p:spPr>
           <a:xfrm>
-            <a:off x="9786823" y="457200"/>
-            <a:ext cx="1856232" cy="457200"/>
+            <a:off x="9942271" y="457200"/>
+            <a:ext cx="1700784" cy="457200"/>
           </a:xfrm>
           <a:prstGeom prst="roundRect">
             <a:avLst/>
           </a:prstGeom>
           <a:solidFill>
-            <a:srgbClr val="1E40AF"/>
+            <a:srgbClr val="991B1B"/>
           </a:solidFill>
           <a:ln>
             <a:noFill/>
@@ -9105,7 +9571,7 @@
                 </a:solidFill>
                 <a:latin typeface="Arial"/>
               </a:rPr>
-              <a:t>KHỞI ĐỘNG</a:t>
+              <a:t>LỜI GIẢI</a:t>
             </a:r>
           </a:p>
         </p:txBody>
@@ -9119,7 +9585,7 @@
         <p:spPr>
           <a:xfrm>
             <a:off x="731520" y="274320"/>
-            <a:ext cx="9116568" cy="868680"/>
+            <a:ext cx="9272016" cy="868680"/>
           </a:xfrm>
           <a:prstGeom prst="rect">
             <a:avLst/>
@@ -9139,7 +9605,7 @@
                 </a:solidFill>
                 <a:latin typeface="Arial"/>
               </a:rPr>
-              <a:t>TRƯỚC KHI ĐỌC CHÍ PHÈO</a:t>
+              <a:t>CHỦ ĐỀ – “CỔ TÍCH TRONG NẠN ĐÓI”?</a:t>
             </a:r>
           </a:p>
         </p:txBody>
@@ -9232,7 +9698,7 @@
         <p:spPr>
           <a:xfrm>
             <a:off x="731520" y="1463040"/>
-            <a:ext cx="10789920" cy="4572000"/>
+            <a:ext cx="10789920" cy="3474720"/>
           </a:xfrm>
           <a:prstGeom prst="rect">
             <a:avLst/>
@@ -9245,35 +9711,153 @@
           </a:bodyPr>
           <a:lstStyle/>
           <a:p>
-            <a:pPr algn="l">
+            <a:pPr algn="l" marL="365760" indent="-365760">
               <a:spcAft>
                 <a:spcPts val="800"/>
               </a:spcAft>
+              <a:buClr>
+                <a:srgbClr val="1E40AF"/>
+              </a:buClr>
+              <a:buFont typeface="Arial"/>
+              <a:buChar char="•"/>
             </a:pPr>
             <a:r>
-              <a:rPr sz="2600" b="1">
+              <a:rPr sz="2300">
                 <a:solidFill>
                   <a:srgbClr val="1E293B"/>
                 </a:solidFill>
                 <a:latin typeface="Calibri"/>
               </a:rPr>
-              <a:t>Thế nào là định kiến xã hội? Định kiến có thể ảnh hưởng đến cá nhân và cộng đồng như thế nào?</a:t>
-            </a:r>
-          </a:p>
-          <a:p>
-            <a:pPr algn="l">
+              <a:t>Chủ đề: khát vọng sống, tình thương của người lao động bên bờ cái chết.</a:t>
+            </a:r>
+          </a:p>
+          <a:p>
+            <a:pPr algn="l" marL="365760" indent="-365760">
               <a:spcAft>
                 <a:spcPts val="800"/>
               </a:spcAft>
+              <a:buClr>
+                <a:srgbClr val="1E40AF"/>
+              </a:buClr>
+              <a:buFont typeface="Arial"/>
+              <a:buChar char="•"/>
             </a:pPr>
             <a:r>
-              <a:rPr sz="2600" b="1">
+              <a:rPr sz="2300">
                 <a:solidFill>
                   <a:srgbClr val="1E293B"/>
                 </a:solidFill>
                 <a:latin typeface="Calibri"/>
               </a:rPr>
-              <a:t>Khi nghe gọi ai đó là “Chí Phèo”, cách gọi ấy hàm ẩn đánh giá gì?</a:t>
+              <a:t>Giống cổ tích: người nghèo “đổi đời”, có hạnh phúc.</a:t>
+            </a:r>
+          </a:p>
+          <a:p>
+            <a:pPr algn="l" marL="365760" indent="-365760">
+              <a:spcAft>
+                <a:spcPts val="800"/>
+              </a:spcAft>
+              <a:buClr>
+                <a:srgbClr val="1E40AF"/>
+              </a:buClr>
+              <a:buFont typeface="Arial"/>
+              <a:buChar char="•"/>
+            </a:pPr>
+            <a:r>
+              <a:rPr sz="2300">
+                <a:solidFill>
+                  <a:srgbClr val="1E293B"/>
+                </a:solidFill>
+                <a:latin typeface="Calibri"/>
+              </a:rPr>
+              <a:t>Khác: không có phép màu; niềm tin đến từ tình người và lá cờ đỏ cách mạng.</a:t>
+            </a:r>
+          </a:p>
+        </p:txBody>
+      </p:sp>
+      <p:sp>
+        <p:nvSpPr>
+          <p:cNvPr id="8" name="Rounded Rectangle 7"/>
+          <p:cNvSpPr/>
+          <p:nvPr/>
+        </p:nvSpPr>
+        <p:spPr>
+          <a:xfrm>
+            <a:off x="731520" y="5074920"/>
+            <a:ext cx="10789920" cy="731520"/>
+          </a:xfrm>
+          <a:prstGeom prst="roundRect">
+            <a:avLst>
+              <a:gd name="adj" fmla="val 8000"/>
+            </a:avLst>
+          </a:prstGeom>
+          <a:solidFill>
+            <a:srgbClr val="FEF2F2"/>
+          </a:solidFill>
+          <a:ln w="19050">
+            <a:solidFill>
+              <a:srgbClr val="991B1B"/>
+            </a:solidFill>
+          </a:ln>
+          <a:effectLst/>
+        </p:spPr>
+        <p:style>
+          <a:lnRef idx="1">
+            <a:schemeClr val="accent1"/>
+          </a:lnRef>
+          <a:fillRef idx="3">
+            <a:schemeClr val="accent1"/>
+          </a:fillRef>
+          <a:effectRef idx="2">
+            <a:schemeClr val="accent1"/>
+          </a:effectRef>
+          <a:fontRef idx="minor">
+            <a:schemeClr val="lt1"/>
+          </a:fontRef>
+        </p:style>
+        <p:txBody>
+          <a:bodyPr rtlCol="0" anchor="ctr"/>
+          <a:lstStyle/>
+          <a:p>
+            <a:pPr algn="ctr"/>
+          </a:p>
+        </p:txBody>
+      </p:sp>
+      <p:sp>
+        <p:nvSpPr>
+          <p:cNvPr id="9" name="TextBox 8"/>
+          <p:cNvSpPr txBox="1"/>
+          <p:nvPr/>
+        </p:nvSpPr>
+        <p:spPr>
+          <a:xfrm>
+            <a:off x="914400" y="5074920"/>
+            <a:ext cx="10424160" cy="731520"/>
+          </a:xfrm>
+          <a:prstGeom prst="rect">
+            <a:avLst/>
+          </a:prstGeom>
+          <a:noFill/>
+        </p:spPr>
+        <p:txBody>
+          <a:bodyPr wrap="square" anchor="ctr" lIns="45720" rIns="45720">
+            <a:spAutoFit/>
+          </a:bodyPr>
+          <a:lstStyle/>
+          <a:p>
+            <a:pPr algn="l">
+              <a:spcAft>
+                <a:spcPts val="400"/>
+              </a:spcAft>
+            </a:pPr>
+            <a:r>
+              <a:rPr sz="2400" b="1">
+                <a:solidFill>
+                  <a:srgbClr val="991B1B"/>
+                </a:solidFill>
+                <a:latin typeface="Calibri"/>
+              </a:rPr>
+              <a:t>Giá trị hiện thực và giá trị nhân đạo sâu sắc.</a:t>
             </a:r>
           </a:p>
         </p:txBody>
@@ -9656,7 +10240,7 @@
     <p:bg>
       <p:bgPr>
         <a:solidFill>
-          <a:srgbClr val="FFFFFF"/>
+          <a:srgbClr val="F8F9FA"/>
         </a:solidFill>
         <a:effectLst/>
       </p:bgPr>
@@ -9676,14 +10260,14 @@
         </p:nvSpPr>
         <p:spPr>
           <a:xfrm>
-            <a:off x="457200" y="384048"/>
-            <a:ext cx="109728" cy="658368"/>
+            <a:off x="548640" y="2926080"/>
+            <a:ext cx="164592" cy="1005840"/>
           </a:xfrm>
           <a:prstGeom prst="rect">
             <a:avLst/>
           </a:prstGeom>
           <a:solidFill>
-            <a:srgbClr val="1E40AF"/>
+            <a:srgbClr val="991B1B"/>
           </a:solidFill>
           <a:ln>
             <a:noFill/>
@@ -9714,67 +10298,14 @@
       </p:sp>
       <p:sp>
         <p:nvSpPr>
-          <p:cNvPr id="3" name="Rounded Rectangle 2"/>
-          <p:cNvSpPr/>
-          <p:nvPr/>
-        </p:nvSpPr>
-        <p:spPr>
-          <a:xfrm>
-            <a:off x="10253167" y="457200"/>
-            <a:ext cx="1389888" cy="457200"/>
-          </a:xfrm>
-          <a:prstGeom prst="roundRect">
-            <a:avLst/>
-          </a:prstGeom>
-          <a:solidFill>
-            <a:srgbClr val="1E40AF"/>
-          </a:solidFill>
-          <a:ln>
-            <a:noFill/>
-          </a:ln>
-          <a:effectLst/>
-        </p:spPr>
-        <p:style>
-          <a:lnRef idx="1">
-            <a:schemeClr val="accent1"/>
-          </a:lnRef>
-          <a:fillRef idx="3">
-            <a:schemeClr val="accent1"/>
-          </a:fillRef>
-          <a:effectRef idx="2">
-            <a:schemeClr val="accent1"/>
-          </a:effectRef>
-          <a:fontRef idx="minor">
-            <a:schemeClr val="lt1"/>
-          </a:fontRef>
-        </p:style>
-        <p:txBody>
-          <a:bodyPr rtlCol="0" anchor="ctr" wrap="none" tIns="0" bIns="0"/>
-          <a:lstStyle/>
-          <a:p>
-            <a:pPr algn="ctr"/>
-            <a:r>
-              <a:rPr sz="1400" b="1">
-                <a:solidFill>
-                  <a:srgbClr val="FFFFFF"/>
-                </a:solidFill>
-                <a:latin typeface="Arial"/>
-              </a:rPr>
-              <a:t>ĐỀ BÀI</a:t>
-            </a:r>
-          </a:p>
-        </p:txBody>
-      </p:sp>
-      <p:sp>
-        <p:nvSpPr>
-          <p:cNvPr id="4" name="TextBox 3"/>
+          <p:cNvPr id="3" name="TextBox 2"/>
           <p:cNvSpPr txBox="1"/>
           <p:nvPr/>
         </p:nvSpPr>
         <p:spPr>
           <a:xfrm>
-            <a:off x="731520" y="274320"/>
-            <a:ext cx="9582912" cy="868680"/>
+            <a:off x="914400" y="2743200"/>
+            <a:ext cx="10515600" cy="1371600"/>
           </a:xfrm>
           <a:prstGeom prst="rect">
             <a:avLst/>
@@ -9782,120 +10313,7 @@
           <a:noFill/>
         </p:spPr>
         <p:txBody>
-          <a:bodyPr wrap="square" anchor="ctr">
-            <a:spAutoFit/>
-          </a:bodyPr>
-          <a:lstStyle/>
-          <a:p>
-            <a:r>
-              <a:rPr sz="3600" b="1">
-                <a:solidFill>
-                  <a:srgbClr val="1E40AF"/>
-                </a:solidFill>
-                <a:latin typeface="Arial"/>
-              </a:rPr>
-              <a:t>CỐT TRUYỆN VÀ TRÌNH TỰ KỂ</a:t>
-            </a:r>
-          </a:p>
-        </p:txBody>
-      </p:sp>
-      <p:sp>
-        <p:nvSpPr>
-          <p:cNvPr id="5" name="Rectangle 4"/>
-          <p:cNvSpPr/>
-          <p:nvPr/>
-        </p:nvSpPr>
-        <p:spPr>
-          <a:xfrm>
-            <a:off x="457200" y="1207008"/>
-            <a:ext cx="11274552" cy="22000"/>
-          </a:xfrm>
-          <a:prstGeom prst="rect">
-            <a:avLst/>
-          </a:prstGeom>
-          <a:solidFill>
-            <a:srgbClr val="E2E8F0"/>
-          </a:solidFill>
-          <a:ln>
-            <a:noFill/>
-          </a:ln>
-          <a:effectLst/>
-        </p:spPr>
-        <p:style>
-          <a:lnRef idx="1">
-            <a:schemeClr val="accent1"/>
-          </a:lnRef>
-          <a:fillRef idx="3">
-            <a:schemeClr val="accent1"/>
-          </a:fillRef>
-          <a:effectRef idx="2">
-            <a:schemeClr val="accent1"/>
-          </a:effectRef>
-          <a:fontRef idx="minor">
-            <a:schemeClr val="lt1"/>
-          </a:fontRef>
-        </p:style>
-        <p:txBody>
-          <a:bodyPr rtlCol="0" anchor="ctr"/>
-          <a:lstStyle/>
-          <a:p>
-            <a:pPr algn="ctr"/>
-          </a:p>
-        </p:txBody>
-      </p:sp>
-      <p:sp>
-        <p:nvSpPr>
-          <p:cNvPr id="6" name="TextBox 5"/>
-          <p:cNvSpPr txBox="1"/>
-          <p:nvPr/>
-        </p:nvSpPr>
-        <p:spPr>
-          <a:xfrm>
-            <a:off x="457200" y="6355080"/>
-            <a:ext cx="11274552" cy="365760"/>
-          </a:xfrm>
-          <a:prstGeom prst="rect">
-            <a:avLst/>
-          </a:prstGeom>
-          <a:noFill/>
-        </p:spPr>
-        <p:txBody>
-          <a:bodyPr wrap="none">
-            <a:spAutoFit/>
-          </a:bodyPr>
-          <a:lstStyle/>
-          <a:p>
-            <a:pPr algn="r"/>
-            <a:r>
-              <a:rPr sz="1200">
-                <a:solidFill>
-                  <a:srgbClr val="64748B"/>
-                </a:solidFill>
-                <a:latin typeface="Calibri"/>
-              </a:rPr>
-              <a:t>Ngữ văn 11 · Bài 1: Câu Chuyện Và Điểm Nhìn Trong Truyện Kể          20</a:t>
-            </a:r>
-          </a:p>
-        </p:txBody>
-      </p:sp>
-      <p:sp>
-        <p:nvSpPr>
-          <p:cNvPr id="7" name="TextBox 6"/>
-          <p:cNvSpPr txBox="1"/>
-          <p:nvPr/>
-        </p:nvSpPr>
-        <p:spPr>
-          <a:xfrm>
-            <a:off x="731520" y="1463040"/>
-            <a:ext cx="10789920" cy="3566160"/>
-          </a:xfrm>
-          <a:prstGeom prst="rect">
-            <a:avLst/>
-          </a:prstGeom>
-          <a:noFill/>
-        </p:spPr>
-        <p:txBody>
-          <a:bodyPr wrap="square" anchor="t" lIns="45720" rIns="45720">
+          <a:bodyPr wrap="square" anchor="ctr" lIns="45720" rIns="45720">
             <a:spAutoFit/>
           </a:bodyPr>
           <a:lstStyle/>
@@ -9906,100 +10324,13 @@
               </a:spcAft>
             </a:pPr>
             <a:r>
-              <a:rPr sz="2600" b="1">
-                <a:solidFill>
-                  <a:srgbClr val="1E293B"/>
+              <a:rPr sz="3600" b="1">
+                <a:solidFill>
+                  <a:srgbClr val="1E40AF"/>
                 </a:solidFill>
                 <a:latin typeface="Calibri"/>
               </a:rPr>
-              <a:t>Tóm tắt cốt truyện Chí Phèo theo trình tự thời gian cuộc đời nhân vật. Đánh giá hiệu quả của việc phá vỡ trình tự này.</a:t>
-            </a:r>
-          </a:p>
-        </p:txBody>
-      </p:sp>
-      <p:sp>
-        <p:nvSpPr>
-          <p:cNvPr id="8" name="Rounded Rectangle 7"/>
-          <p:cNvSpPr/>
-          <p:nvPr/>
-        </p:nvSpPr>
-        <p:spPr>
-          <a:xfrm>
-            <a:off x="731520" y="5120640"/>
-            <a:ext cx="10789920" cy="693420"/>
-          </a:xfrm>
-          <a:prstGeom prst="roundRect">
-            <a:avLst>
-              <a:gd name="adj" fmla="val 8000"/>
-            </a:avLst>
-          </a:prstGeom>
-          <a:solidFill>
-            <a:srgbClr val="EFF4FF"/>
-          </a:solidFill>
-          <a:ln w="19050">
-            <a:solidFill>
-              <a:srgbClr val="1E40AF"/>
-            </a:solidFill>
-          </a:ln>
-          <a:effectLst/>
-        </p:spPr>
-        <p:style>
-          <a:lnRef idx="1">
-            <a:schemeClr val="accent1"/>
-          </a:lnRef>
-          <a:fillRef idx="3">
-            <a:schemeClr val="accent1"/>
-          </a:fillRef>
-          <a:effectRef idx="2">
-            <a:schemeClr val="accent1"/>
-          </a:effectRef>
-          <a:fontRef idx="minor">
-            <a:schemeClr val="lt1"/>
-          </a:fontRef>
-        </p:style>
-        <p:txBody>
-          <a:bodyPr rtlCol="0" anchor="ctr"/>
-          <a:lstStyle/>
-          <a:p>
-            <a:pPr algn="ctr"/>
-          </a:p>
-        </p:txBody>
-      </p:sp>
-      <p:sp>
-        <p:nvSpPr>
-          <p:cNvPr id="9" name="TextBox 8"/>
-          <p:cNvSpPr txBox="1"/>
-          <p:nvPr/>
-        </p:nvSpPr>
-        <p:spPr>
-          <a:xfrm>
-            <a:off x="914400" y="5120640"/>
-            <a:ext cx="10424160" cy="693420"/>
-          </a:xfrm>
-          <a:prstGeom prst="rect">
-            <a:avLst/>
-          </a:prstGeom>
-          <a:noFill/>
-        </p:spPr>
-        <p:txBody>
-          <a:bodyPr wrap="square" anchor="ctr" lIns="45720" rIns="45720">
-            <a:spAutoFit/>
-          </a:bodyPr>
-          <a:lstStyle/>
-          <a:p>
-            <a:pPr algn="l">
-              <a:spcAft>
-                <a:spcPts val="400"/>
-              </a:spcAft>
-            </a:pPr>
-            <a:r>
-              <a:rPr sz="2200" b="1">
-                <a:solidFill>
-                  <a:srgbClr val="1E40AF"/>
-                </a:solidFill>
-                <a:latin typeface="Calibri"/>
-              </a:rPr>
-              <a:t>💡 Truyện mở đầu bằng sự việc nào?</a:t>
+              <a:t>TIẾT 4 – 6: CHÍ PHÈO (Nam Cao)</a:t>
             </a:r>
           </a:p>
         </p:txBody>
@@ -10082,14 +10413,14 @@
         </p:nvSpPr>
         <p:spPr>
           <a:xfrm>
-            <a:off x="9942271" y="457200"/>
-            <a:ext cx="1700784" cy="457200"/>
+            <a:off x="9786823" y="457200"/>
+            <a:ext cx="1856232" cy="457200"/>
           </a:xfrm>
           <a:prstGeom prst="roundRect">
             <a:avLst/>
           </a:prstGeom>
           <a:solidFill>
-            <a:srgbClr val="991B1B"/>
+            <a:srgbClr val="1E40AF"/>
           </a:solidFill>
           <a:ln>
             <a:noFill/>
@@ -10122,7 +10453,7 @@
                 </a:solidFill>
                 <a:latin typeface="Arial"/>
               </a:rPr>
-              <a:t>LỜI GIẢI</a:t>
+              <a:t>KHỞI ĐỘNG</a:t>
             </a:r>
           </a:p>
         </p:txBody>
@@ -10136,7 +10467,7 @@
         <p:spPr>
           <a:xfrm>
             <a:off x="731520" y="274320"/>
-            <a:ext cx="9272016" cy="868680"/>
+            <a:ext cx="9116568" cy="868680"/>
           </a:xfrm>
           <a:prstGeom prst="rect">
             <a:avLst/>
@@ -10156,7 +10487,7 @@
                 </a:solidFill>
                 <a:latin typeface="Arial"/>
               </a:rPr>
-              <a:t>CỐT TRUYỆN VÀ TRÌNH TỰ KỂ</a:t>
+              <a:t>TRƯỚC KHI ĐỌC CHÍ PHÈO</a:t>
             </a:r>
           </a:p>
         </p:txBody>
@@ -10249,7 +10580,7 @@
         <p:spPr>
           <a:xfrm>
             <a:off x="731520" y="1463040"/>
-            <a:ext cx="10789920" cy="3474720"/>
+            <a:ext cx="10789920" cy="4572000"/>
           </a:xfrm>
           <a:prstGeom prst="rect">
             <a:avLst/>
@@ -10262,153 +10593,35 @@
           </a:bodyPr>
           <a:lstStyle/>
           <a:p>
-            <a:pPr algn="l" marL="365760" indent="-365760">
+            <a:pPr algn="l">
               <a:spcAft>
                 <a:spcPts val="800"/>
               </a:spcAft>
-              <a:buClr>
-                <a:srgbClr val="1E40AF"/>
-              </a:buClr>
-              <a:buFont typeface="Arial"/>
-              <a:buChar char="•"/>
             </a:pPr>
             <a:r>
-              <a:rPr sz="2300">
+              <a:rPr sz="2600" b="1">
                 <a:solidFill>
                   <a:srgbClr val="1E293B"/>
                 </a:solidFill>
                 <a:latin typeface="Calibri"/>
               </a:rPr>
-              <a:t>Bị bỏ ở lò gạch → canh điền nhà lí Kiến → vào tù → thành “con quỷ dữ”.</a:t>
-            </a:r>
-          </a:p>
-          <a:p>
-            <a:pPr algn="l" marL="365760" indent="-365760">
+              <a:t>Thế nào là định kiến xã hội? Định kiến có thể ảnh hưởng đến cá nhân và cộng đồng như thế nào?</a:t>
+            </a:r>
+          </a:p>
+          <a:p>
+            <a:pPr algn="l">
               <a:spcAft>
                 <a:spcPts val="800"/>
               </a:spcAft>
-              <a:buClr>
-                <a:srgbClr val="1E40AF"/>
-              </a:buClr>
-              <a:buFont typeface="Arial"/>
-              <a:buChar char="•"/>
             </a:pPr>
             <a:r>
-              <a:rPr sz="2300">
+              <a:rPr sz="2600" b="1">
                 <a:solidFill>
                   <a:srgbClr val="1E293B"/>
                 </a:solidFill>
                 <a:latin typeface="Calibri"/>
               </a:rPr>
-              <a:t>Gặp thị Nở, thức tỉnh → bị cự tuyệt → giết Bá Kiến, tự sát.</a:t>
-            </a:r>
-          </a:p>
-          <a:p>
-            <a:pPr algn="l" marL="365760" indent="-365760">
-              <a:spcAft>
-                <a:spcPts val="800"/>
-              </a:spcAft>
-              <a:buClr>
-                <a:srgbClr val="1E40AF"/>
-              </a:buClr>
-              <a:buFont typeface="Arial"/>
-              <a:buChar char="•"/>
-            </a:pPr>
-            <a:r>
-              <a:rPr sz="2300">
-                <a:solidFill>
-                  <a:srgbClr val="1E293B"/>
-                </a:solidFill>
-                <a:latin typeface="Calibri"/>
-              </a:rPr>
-              <a:t>Mở đầu bằng tiếng chửi → gây ấn tượng, tô đậm bi kịch.</a:t>
-            </a:r>
-          </a:p>
-        </p:txBody>
-      </p:sp>
-      <p:sp>
-        <p:nvSpPr>
-          <p:cNvPr id="8" name="Rounded Rectangle 7"/>
-          <p:cNvSpPr/>
-          <p:nvPr/>
-        </p:nvSpPr>
-        <p:spPr>
-          <a:xfrm>
-            <a:off x="731520" y="5074920"/>
-            <a:ext cx="10789920" cy="731520"/>
-          </a:xfrm>
-          <a:prstGeom prst="roundRect">
-            <a:avLst>
-              <a:gd name="adj" fmla="val 8000"/>
-            </a:avLst>
-          </a:prstGeom>
-          <a:solidFill>
-            <a:srgbClr val="FEF2F2"/>
-          </a:solidFill>
-          <a:ln w="19050">
-            <a:solidFill>
-              <a:srgbClr val="991B1B"/>
-            </a:solidFill>
-          </a:ln>
-          <a:effectLst/>
-        </p:spPr>
-        <p:style>
-          <a:lnRef idx="1">
-            <a:schemeClr val="accent1"/>
-          </a:lnRef>
-          <a:fillRef idx="3">
-            <a:schemeClr val="accent1"/>
-          </a:fillRef>
-          <a:effectRef idx="2">
-            <a:schemeClr val="accent1"/>
-          </a:effectRef>
-          <a:fontRef idx="minor">
-            <a:schemeClr val="lt1"/>
-          </a:fontRef>
-        </p:style>
-        <p:txBody>
-          <a:bodyPr rtlCol="0" anchor="ctr"/>
-          <a:lstStyle/>
-          <a:p>
-            <a:pPr algn="ctr"/>
-          </a:p>
-        </p:txBody>
-      </p:sp>
-      <p:sp>
-        <p:nvSpPr>
-          <p:cNvPr id="9" name="TextBox 8"/>
-          <p:cNvSpPr txBox="1"/>
-          <p:nvPr/>
-        </p:nvSpPr>
-        <p:spPr>
-          <a:xfrm>
-            <a:off x="914400" y="5074920"/>
-            <a:ext cx="10424160" cy="731520"/>
-          </a:xfrm>
-          <a:prstGeom prst="rect">
-            <a:avLst/>
-          </a:prstGeom>
-          <a:noFill/>
-        </p:spPr>
-        <p:txBody>
-          <a:bodyPr wrap="square" anchor="ctr" lIns="45720" rIns="45720">
-            <a:spAutoFit/>
-          </a:bodyPr>
-          <a:lstStyle/>
-          <a:p>
-            <a:pPr algn="l">
-              <a:spcAft>
-                <a:spcPts val="400"/>
-              </a:spcAft>
-            </a:pPr>
-            <a:r>
-              <a:rPr sz="2400" b="1">
-                <a:solidFill>
-                  <a:srgbClr val="991B1B"/>
-                </a:solidFill>
-                <a:latin typeface="Calibri"/>
-              </a:rPr>
-              <a:t>Kết cấu mới lạ, gợi vòng luẩn quẩn của bi kịch.</a:t>
+              <a:t>Khi nghe gọi ai đó là “Chí Phèo”, cách gọi ấy hàm ẩn đánh giá gì?</a:t>
             </a:r>
           </a:p>
         </p:txBody>
@@ -10491,14 +10704,14 @@
         </p:nvSpPr>
         <p:spPr>
           <a:xfrm>
-            <a:off x="10253167" y="457200"/>
-            <a:ext cx="1389888" cy="457200"/>
+            <a:off x="10408615" y="457200"/>
+            <a:ext cx="1234440" cy="457200"/>
           </a:xfrm>
           <a:prstGeom prst="roundRect">
             <a:avLst/>
           </a:prstGeom>
           <a:solidFill>
-            <a:srgbClr val="1E40AF"/>
+            <a:srgbClr val="991B1B"/>
           </a:solidFill>
           <a:ln>
             <a:noFill/>
@@ -10531,7 +10744,7 @@
                 </a:solidFill>
                 <a:latin typeface="Arial"/>
               </a:rPr>
-              <a:t>ĐỀ BÀI</a:t>
+              <a:t>VIDEO</a:t>
             </a:r>
           </a:p>
         </p:txBody>
@@ -10545,7 +10758,7 @@
         <p:spPr>
           <a:xfrm>
             <a:off x="731520" y="274320"/>
-            <a:ext cx="9582912" cy="868680"/>
+            <a:ext cx="9738360" cy="868680"/>
           </a:xfrm>
           <a:prstGeom prst="rect">
             <a:avLst/>
@@ -10565,7 +10778,7 @@
                 </a:solidFill>
                 <a:latin typeface="Arial"/>
               </a:rPr>
-              <a:t>ĐIỂM NHÌN TRONG ĐOẠN MỞ ĐẦU</a:t>
+              <a:t>VIDEO THAM KHẢO</a:t>
             </a:r>
           </a:p>
         </p:txBody>
@@ -10649,16 +10862,40 @@
           </a:p>
         </p:txBody>
       </p:sp>
-      <p:sp>
-        <p:nvSpPr>
-          <p:cNvPr id="7" name="TextBox 6"/>
+      <p:pic>
+        <p:nvPicPr>
+          <p:cNvPr id="7" name="Picture 6" descr="QR_video_FShtDV29lXQ.png"/>
+          <p:cNvPicPr>
+            <a:picLocks noChangeAspect="1"/>
+          </p:cNvPicPr>
+          <p:nvPr/>
+        </p:nvPicPr>
+        <p:blipFill>
+          <a:blip r:embed="rId2"/>
+          <a:stretch>
+            <a:fillRect/>
+          </a:stretch>
+        </p:blipFill>
+        <p:spPr>
+          <a:xfrm>
+            <a:off x="8412480" y="1554480"/>
+            <a:ext cx="3108960" cy="3108960"/>
+          </a:xfrm>
+          <a:prstGeom prst="rect">
+            <a:avLst/>
+          </a:prstGeom>
+        </p:spPr>
+      </p:pic>
+      <p:sp>
+        <p:nvSpPr>
+          <p:cNvPr id="8" name="TextBox 7"/>
           <p:cNvSpPr txBox="1"/>
           <p:nvPr/>
         </p:nvSpPr>
         <p:spPr>
           <a:xfrm>
-            <a:off x="731520" y="1463040"/>
-            <a:ext cx="10789920" cy="3566160"/>
+            <a:off x="731520" y="1554480"/>
+            <a:ext cx="7498079" cy="4206240"/>
           </a:xfrm>
           <a:prstGeom prst="rect">
             <a:avLst/>
@@ -10683,94 +10920,61 @@
                 </a:solidFill>
                 <a:latin typeface="Calibri"/>
               </a:rPr>
-              <a:t>Phân loại điểm nhìn trong đoạn mở đầu (người kể – nhân vật; bên ngoài – bên trong). Nhận xét sự dịch chuyển giữa các điểm nhìn.</a:t>
-            </a:r>
-          </a:p>
-        </p:txBody>
-      </p:sp>
-      <p:sp>
-        <p:nvSpPr>
-          <p:cNvPr id="8" name="Rounded Rectangle 7"/>
-          <p:cNvSpPr/>
-          <p:nvPr/>
-        </p:nvSpPr>
-        <p:spPr>
-          <a:xfrm>
-            <a:off x="731520" y="5120640"/>
-            <a:ext cx="10789920" cy="693420"/>
-          </a:xfrm>
-          <a:prstGeom prst="roundRect">
-            <a:avLst>
-              <a:gd name="adj" fmla="val 8000"/>
-            </a:avLst>
-          </a:prstGeom>
-          <a:solidFill>
-            <a:srgbClr val="EFF4FF"/>
-          </a:solidFill>
-          <a:ln w="19050">
-            <a:solidFill>
-              <a:srgbClr val="1E40AF"/>
-            </a:solidFill>
-          </a:ln>
-          <a:effectLst/>
-        </p:spPr>
-        <p:style>
-          <a:lnRef idx="1">
-            <a:schemeClr val="accent1"/>
-          </a:lnRef>
-          <a:fillRef idx="3">
-            <a:schemeClr val="accent1"/>
-          </a:fillRef>
-          <a:effectRef idx="2">
-            <a:schemeClr val="accent1"/>
-          </a:effectRef>
-          <a:fontRef idx="minor">
-            <a:schemeClr val="lt1"/>
-          </a:fontRef>
-        </p:style>
-        <p:txBody>
-          <a:bodyPr rtlCol="0" anchor="ctr"/>
-          <a:lstStyle/>
-          <a:p>
-            <a:pPr algn="ctr"/>
-          </a:p>
-        </p:txBody>
-      </p:sp>
-      <p:sp>
-        <p:nvSpPr>
-          <p:cNvPr id="9" name="TextBox 8"/>
-          <p:cNvSpPr txBox="1"/>
-          <p:nvPr/>
-        </p:nvSpPr>
-        <p:spPr>
-          <a:xfrm>
-            <a:off x="914400" y="5120640"/>
-            <a:ext cx="10424160" cy="693420"/>
-          </a:xfrm>
-          <a:prstGeom prst="rect">
-            <a:avLst/>
-          </a:prstGeom>
-          <a:noFill/>
-        </p:spPr>
-        <p:txBody>
-          <a:bodyPr wrap="square" anchor="ctr" lIns="45720" rIns="45720">
-            <a:spAutoFit/>
-          </a:bodyPr>
-          <a:lstStyle/>
+              <a:t>🎬 Làng Vũ Đại ngày ấy (1982)</a:t>
+            </a:r>
+          </a:p>
           <a:p>
             <a:pPr algn="l">
               <a:spcAft>
-                <a:spcPts val="400"/>
+                <a:spcPts val="800"/>
               </a:spcAft>
             </a:pPr>
             <a:r>
-              <a:rPr sz="2200" b="1">
-                <a:solidFill>
-                  <a:srgbClr val="1E40AF"/>
+              <a:rPr sz="2000">
+                <a:solidFill>
+                  <a:srgbClr val="64748B"/>
                 </a:solidFill>
                 <a:latin typeface="Calibri"/>
               </a:rPr>
-              <a:t>💡 Tìm câu thể hiện suy nghĩ của Chí Phèo, của dân làng.</a:t>
+              <a:t>Kênh: Sao Vàng</a:t>
+            </a:r>
+          </a:p>
+          <a:p>
+            <a:pPr algn="l" marL="365760" indent="-365760">
+              <a:spcAft>
+                <a:spcPts val="800"/>
+              </a:spcAft>
+              <a:buClr>
+                <a:srgbClr val="1E40AF"/>
+              </a:buClr>
+              <a:buFont typeface="Arial"/>
+              <a:buChar char="•"/>
+            </a:pPr>
+            <a:r>
+              <a:rPr sz="2000">
+                <a:solidFill>
+                  <a:srgbClr val="1E293B"/>
+                </a:solidFill>
+                <a:latin typeface="Calibri"/>
+              </a:rPr>
+              <a:t>Mở đầu Chí Phèo – chiếu trích đoạn phim chuyển thể (Chí Phèo – Thị Nở)</a:t>
+            </a:r>
+          </a:p>
+          <a:p>
+            <a:pPr algn="l">
+              <a:spcAft>
+                <a:spcPts val="800"/>
+              </a:spcAft>
+            </a:pPr>
+            <a:r>
+              <a:rPr sz="1600">
+                <a:solidFill>
+                  <a:srgbClr val="64748B"/>
+                </a:solidFill>
+                <a:latin typeface="Calibri"/>
+                <a:hlinkClick r:id="rId3"/>
+              </a:rPr>
+              <a:t>https://www.youtube.com/watch?v=FShtDV29lXQ</a:t>
             </a:r>
           </a:p>
         </p:txBody>
@@ -10853,14 +11057,14 @@
         </p:nvSpPr>
         <p:spPr>
           <a:xfrm>
-            <a:off x="9942271" y="457200"/>
-            <a:ext cx="1700784" cy="457200"/>
+            <a:off x="10253167" y="457200"/>
+            <a:ext cx="1389888" cy="457200"/>
           </a:xfrm>
           <a:prstGeom prst="roundRect">
             <a:avLst/>
           </a:prstGeom>
           <a:solidFill>
-            <a:srgbClr val="991B1B"/>
+            <a:srgbClr val="1E40AF"/>
           </a:solidFill>
           <a:ln>
             <a:noFill/>
@@ -10893,7 +11097,7 @@
                 </a:solidFill>
                 <a:latin typeface="Arial"/>
               </a:rPr>
-              <a:t>LỜI GIẢI</a:t>
+              <a:t>ĐỀ BÀI</a:t>
             </a:r>
           </a:p>
         </p:txBody>
@@ -10907,7 +11111,7 @@
         <p:spPr>
           <a:xfrm>
             <a:off x="731520" y="274320"/>
-            <a:ext cx="9272016" cy="868680"/>
+            <a:ext cx="9582912" cy="868680"/>
           </a:xfrm>
           <a:prstGeom prst="rect">
             <a:avLst/>
@@ -10927,7 +11131,7 @@
                 </a:solidFill>
                 <a:latin typeface="Arial"/>
               </a:rPr>
-              <a:t>ĐIỂM NHÌN TRONG ĐOẠN MỞ ĐẦU</a:t>
+              <a:t>CỐT TRUYỆN VÀ TRÌNH TỰ KỂ</a:t>
             </a:r>
           </a:p>
         </p:txBody>
@@ -11020,7 +11224,7 @@
         <p:spPr>
           <a:xfrm>
             <a:off x="731520" y="1463040"/>
-            <a:ext cx="10789920" cy="3474720"/>
+            <a:ext cx="10789920" cy="3566160"/>
           </a:xfrm>
           <a:prstGeom prst="rect">
             <a:avLst/>
@@ -11033,66 +11237,19 @@
           </a:bodyPr>
           <a:lstStyle/>
           <a:p>
-            <a:pPr algn="l" marL="365760" indent="-365760">
+            <a:pPr algn="l">
               <a:spcAft>
                 <a:spcPts val="800"/>
               </a:spcAft>
-              <a:buClr>
-                <a:srgbClr val="1E40AF"/>
-              </a:buClr>
-              <a:buFont typeface="Arial"/>
-              <a:buChar char="•"/>
             </a:pPr>
             <a:r>
-              <a:rPr sz="2300">
+              <a:rPr sz="2600" b="1">
                 <a:solidFill>
                   <a:srgbClr val="1E293B"/>
                 </a:solidFill>
                 <a:latin typeface="Calibri"/>
               </a:rPr>
-              <a:t>Người kể quan sát hành động chửi (bên ngoài).</a:t>
-            </a:r>
-          </a:p>
-          <a:p>
-            <a:pPr algn="l" marL="365760" indent="-365760">
-              <a:spcAft>
-                <a:spcPts val="800"/>
-              </a:spcAft>
-              <a:buClr>
-                <a:srgbClr val="1E40AF"/>
-              </a:buClr>
-              <a:buFont typeface="Arial"/>
-              <a:buChar char="•"/>
-            </a:pPr>
-            <a:r>
-              <a:rPr sz="2300">
-                <a:solidFill>
-                  <a:srgbClr val="1E293B"/>
-                </a:solidFill>
-                <a:latin typeface="Calibri"/>
-              </a:rPr>
-              <a:t>“Tức thật! Tức thật!” – điểm nhìn bên trong Chí Phèo (lời nửa trực tiếp).</a:t>
-            </a:r>
-          </a:p>
-          <a:p>
-            <a:pPr algn="l" marL="365760" indent="-365760">
-              <a:spcAft>
-                <a:spcPts val="800"/>
-              </a:spcAft>
-              <a:buClr>
-                <a:srgbClr val="1E40AF"/>
-              </a:buClr>
-              <a:buFont typeface="Arial"/>
-              <a:buChar char="•"/>
-            </a:pPr>
-            <a:r>
-              <a:rPr sz="2300">
-                <a:solidFill>
-                  <a:srgbClr val="1E293B"/>
-                </a:solidFill>
-                <a:latin typeface="Calibri"/>
-              </a:rPr>
-              <a:t>“Chắc nó trừ mình ra!” – điểm nhìn dân làng Vũ Đại.</a:t>
+              <a:t>Tóm tắt cốt truyện Chí Phèo theo trình tự thời gian cuộc đời nhân vật. Đánh giá hiệu quả của việc phá vỡ trình tự này.</a:t>
             </a:r>
           </a:p>
         </p:txBody>
@@ -11105,8 +11262,8 @@
         </p:nvSpPr>
         <p:spPr>
           <a:xfrm>
-            <a:off x="731520" y="5074920"/>
-            <a:ext cx="10789920" cy="731520"/>
+            <a:off x="731520" y="5120640"/>
+            <a:ext cx="10789920" cy="693420"/>
           </a:xfrm>
           <a:prstGeom prst="roundRect">
             <a:avLst>
@@ -11114,11 +11271,11 @@
             </a:avLst>
           </a:prstGeom>
           <a:solidFill>
-            <a:srgbClr val="FEF2F2"/>
+            <a:srgbClr val="EFF4FF"/>
           </a:solidFill>
           <a:ln w="19050">
             <a:solidFill>
-              <a:srgbClr val="991B1B"/>
+              <a:srgbClr val="1E40AF"/>
             </a:solidFill>
           </a:ln>
           <a:effectLst/>
@@ -11153,8 +11310,8 @@
         </p:nvSpPr>
         <p:spPr>
           <a:xfrm>
-            <a:off x="914400" y="5074920"/>
-            <a:ext cx="10424160" cy="731520"/>
+            <a:off x="914400" y="5120640"/>
+            <a:ext cx="10424160" cy="693420"/>
           </a:xfrm>
           <a:prstGeom prst="rect">
             <a:avLst/>
@@ -11173,13 +11330,13 @@
               </a:spcAft>
             </a:pPr>
             <a:r>
-              <a:rPr sz="2400" b="1">
-                <a:solidFill>
-                  <a:srgbClr val="991B1B"/>
+              <a:rPr sz="2200" b="1">
+                <a:solidFill>
+                  <a:srgbClr val="1E40AF"/>
                 </a:solidFill>
                 <a:latin typeface="Calibri"/>
               </a:rPr>
-              <a:t>Tiếng chửi là tiếng kêu của kẻ bị cự tuyệt quyền làm người.</a:t>
+              <a:t>💡 Truyện mở đầu bằng sự việc nào?</a:t>
             </a:r>
           </a:p>
         </p:txBody>
@@ -11262,14 +11419,14 @@
         </p:nvSpPr>
         <p:spPr>
           <a:xfrm>
-            <a:off x="10253167" y="457200"/>
-            <a:ext cx="1389888" cy="457200"/>
+            <a:off x="9942271" y="457200"/>
+            <a:ext cx="1700784" cy="457200"/>
           </a:xfrm>
           <a:prstGeom prst="roundRect">
             <a:avLst/>
           </a:prstGeom>
           <a:solidFill>
-            <a:srgbClr val="1E40AF"/>
+            <a:srgbClr val="991B1B"/>
           </a:solidFill>
           <a:ln>
             <a:noFill/>
@@ -11302,7 +11459,7 @@
                 </a:solidFill>
                 <a:latin typeface="Arial"/>
               </a:rPr>
-              <a:t>ĐỀ BÀI</a:t>
+              <a:t>LỜI GIẢI</a:t>
             </a:r>
           </a:p>
         </p:txBody>
@@ -11316,7 +11473,7 @@
         <p:spPr>
           <a:xfrm>
             <a:off x="731520" y="274320"/>
-            <a:ext cx="9582912" cy="868680"/>
+            <a:ext cx="9272016" cy="868680"/>
           </a:xfrm>
           <a:prstGeom prst="rect">
             <a:avLst/>
@@ -11336,7 +11493,7 @@
                 </a:solidFill>
                 <a:latin typeface="Arial"/>
               </a:rPr>
-              <a:t>BUỔI SÁNG SAU KHI GẶP THỊ NỞ</a:t>
+              <a:t>CỐT TRUYỆN VÀ TRÌNH TỰ KỂ</a:t>
             </a:r>
           </a:p>
         </p:txBody>
@@ -11429,7 +11586,7 @@
         <p:spPr>
           <a:xfrm>
             <a:off x="731520" y="1463040"/>
-            <a:ext cx="10789920" cy="3566160"/>
+            <a:ext cx="10789920" cy="3474720"/>
           </a:xfrm>
           <a:prstGeom prst="rect">
             <a:avLst/>
@@ -11442,19 +11599,66 @@
           </a:bodyPr>
           <a:lstStyle/>
           <a:p>
-            <a:pPr algn="l">
+            <a:pPr algn="l" marL="365760" indent="-365760">
               <a:spcAft>
                 <a:spcPts val="800"/>
               </a:spcAft>
+              <a:buClr>
+                <a:srgbClr val="1E40AF"/>
+              </a:buClr>
+              <a:buFont typeface="Arial"/>
+              <a:buChar char="•"/>
             </a:pPr>
             <a:r>
-              <a:rPr sz="2600" b="1">
+              <a:rPr sz="2300">
                 <a:solidFill>
                   <a:srgbClr val="1E293B"/>
                 </a:solidFill>
                 <a:latin typeface="Calibri"/>
               </a:rPr>
-              <a:t>Phân tích diễn biến tâm trạng Chí Phèo buổi sáng sau cuộc gặp thị Nở. Nhân tố nào quyết định sự hồi sinh nhân tính?</a:t>
+              <a:t>Bị bỏ ở lò gạch → canh điền nhà lí Kiến → vào tù → thành “con quỷ dữ”.</a:t>
+            </a:r>
+          </a:p>
+          <a:p>
+            <a:pPr algn="l" marL="365760" indent="-365760">
+              <a:spcAft>
+                <a:spcPts val="800"/>
+              </a:spcAft>
+              <a:buClr>
+                <a:srgbClr val="1E40AF"/>
+              </a:buClr>
+              <a:buFont typeface="Arial"/>
+              <a:buChar char="•"/>
+            </a:pPr>
+            <a:r>
+              <a:rPr sz="2300">
+                <a:solidFill>
+                  <a:srgbClr val="1E293B"/>
+                </a:solidFill>
+                <a:latin typeface="Calibri"/>
+              </a:rPr>
+              <a:t>Gặp thị Nở, thức tỉnh → bị cự tuyệt → giết Bá Kiến, tự sát.</a:t>
+            </a:r>
+          </a:p>
+          <a:p>
+            <a:pPr algn="l" marL="365760" indent="-365760">
+              <a:spcAft>
+                <a:spcPts val="800"/>
+              </a:spcAft>
+              <a:buClr>
+                <a:srgbClr val="1E40AF"/>
+              </a:buClr>
+              <a:buFont typeface="Arial"/>
+              <a:buChar char="•"/>
+            </a:pPr>
+            <a:r>
+              <a:rPr sz="2300">
+                <a:solidFill>
+                  <a:srgbClr val="1E293B"/>
+                </a:solidFill>
+                <a:latin typeface="Calibri"/>
+              </a:rPr>
+              <a:t>Mở đầu bằng tiếng chửi → gây ấn tượng, tô đậm bi kịch.</a:t>
             </a:r>
           </a:p>
         </p:txBody>
@@ -11467,8 +11671,8 @@
         </p:nvSpPr>
         <p:spPr>
           <a:xfrm>
-            <a:off x="731520" y="5120640"/>
-            <a:ext cx="10789920" cy="693420"/>
+            <a:off x="731520" y="5074920"/>
+            <a:ext cx="10789920" cy="731520"/>
           </a:xfrm>
           <a:prstGeom prst="roundRect">
             <a:avLst>
@@ -11476,11 +11680,11 @@
             </a:avLst>
           </a:prstGeom>
           <a:solidFill>
-            <a:srgbClr val="EFF4FF"/>
+            <a:srgbClr val="FEF2F2"/>
           </a:solidFill>
           <a:ln w="19050">
             <a:solidFill>
-              <a:srgbClr val="1E40AF"/>
+              <a:srgbClr val="991B1B"/>
             </a:solidFill>
           </a:ln>
           <a:effectLst/>
@@ -11515,8 +11719,8 @@
         </p:nvSpPr>
         <p:spPr>
           <a:xfrm>
-            <a:off x="914400" y="5120640"/>
-            <a:ext cx="10424160" cy="693420"/>
+            <a:off x="914400" y="5074920"/>
+            <a:ext cx="10424160" cy="731520"/>
           </a:xfrm>
           <a:prstGeom prst="rect">
             <a:avLst/>
@@ -11535,13 +11739,13 @@
               </a:spcAft>
             </a:pPr>
             <a:r>
-              <a:rPr sz="2200" b="1">
-                <a:solidFill>
-                  <a:srgbClr val="1E40AF"/>
+              <a:rPr sz="2400" b="1">
+                <a:solidFill>
+                  <a:srgbClr val="991B1B"/>
                 </a:solidFill>
                 <a:latin typeface="Calibri"/>
               </a:rPr>
-              <a:t>💡 Chú ý âm thanh cuộc sống và bát cháo hành.</a:t>
+              <a:t>Kết cấu mới lạ, gợi vòng luẩn quẩn của bi kịch.</a:t>
             </a:r>
           </a:p>
         </p:txBody>
@@ -11624,14 +11828,14 @@
         </p:nvSpPr>
         <p:spPr>
           <a:xfrm>
-            <a:off x="9942271" y="457200"/>
-            <a:ext cx="1700784" cy="457200"/>
+            <a:off x="10253167" y="457200"/>
+            <a:ext cx="1389888" cy="457200"/>
           </a:xfrm>
           <a:prstGeom prst="roundRect">
             <a:avLst/>
           </a:prstGeom>
           <a:solidFill>
-            <a:srgbClr val="991B1B"/>
+            <a:srgbClr val="1E40AF"/>
           </a:solidFill>
           <a:ln>
             <a:noFill/>
@@ -11664,7 +11868,7 @@
                 </a:solidFill>
                 <a:latin typeface="Arial"/>
               </a:rPr>
-              <a:t>LỜI GIẢI</a:t>
+              <a:t>ĐỀ BÀI</a:t>
             </a:r>
           </a:p>
         </p:txBody>
@@ -11678,7 +11882,7 @@
         <p:spPr>
           <a:xfrm>
             <a:off x="731520" y="274320"/>
-            <a:ext cx="9272016" cy="868680"/>
+            <a:ext cx="9582912" cy="868680"/>
           </a:xfrm>
           <a:prstGeom prst="rect">
             <a:avLst/>
@@ -11698,7 +11902,7 @@
                 </a:solidFill>
                 <a:latin typeface="Arial"/>
               </a:rPr>
-              <a:t>BUỔI SÁNG SAU KHI GẶP THỊ NỞ</a:t>
+              <a:t>ĐIỂM NHÌN TRONG ĐOẠN MỞ ĐẦU</a:t>
             </a:r>
           </a:p>
         </p:txBody>
@@ -11791,7 +11995,7 @@
         <p:spPr>
           <a:xfrm>
             <a:off x="731520" y="1463040"/>
-            <a:ext cx="10789920" cy="3474720"/>
+            <a:ext cx="10789920" cy="3566160"/>
           </a:xfrm>
           <a:prstGeom prst="rect">
             <a:avLst/>
@@ -11804,66 +12008,19 @@
           </a:bodyPr>
           <a:lstStyle/>
           <a:p>
-            <a:pPr algn="l" marL="365760" indent="-365760">
+            <a:pPr algn="l">
               <a:spcAft>
                 <a:spcPts val="800"/>
               </a:spcAft>
-              <a:buClr>
-                <a:srgbClr val="1E40AF"/>
-              </a:buClr>
-              <a:buFont typeface="Arial"/>
-              <a:buChar char="•"/>
             </a:pPr>
             <a:r>
-              <a:rPr sz="2300">
+              <a:rPr sz="2600" b="1">
                 <a:solidFill>
                   <a:srgbClr val="1E293B"/>
                 </a:solidFill>
                 <a:latin typeface="Calibri"/>
               </a:rPr>
-              <a:t>Tỉnh rượu, nghe tiếng chim, tiếng người đi chợ; nhớ ước mơ xưa.</a:t>
-            </a:r>
-          </a:p>
-          <a:p>
-            <a:pPr algn="l" marL="365760" indent="-365760">
-              <a:spcAft>
-                <a:spcPts val="800"/>
-              </a:spcAft>
-              <a:buClr>
-                <a:srgbClr val="1E40AF"/>
-              </a:buClr>
-              <a:buFont typeface="Arial"/>
-              <a:buChar char="•"/>
-            </a:pPr>
-            <a:r>
-              <a:rPr sz="2300">
-                <a:solidFill>
-                  <a:srgbClr val="1E293B"/>
-                </a:solidFill>
-                <a:latin typeface="Calibri"/>
-              </a:rPr>
-              <a:t>Lo sợ tuổi già cô độc.</a:t>
-            </a:r>
-          </a:p>
-          <a:p>
-            <a:pPr algn="l" marL="365760" indent="-365760">
-              <a:spcAft>
-                <a:spcPts val="800"/>
-              </a:spcAft>
-              <a:buClr>
-                <a:srgbClr val="1E40AF"/>
-              </a:buClr>
-              <a:buFont typeface="Arial"/>
-              <a:buChar char="•"/>
-            </a:pPr>
-            <a:r>
-              <a:rPr sz="2300">
-                <a:solidFill>
-                  <a:srgbClr val="1E293B"/>
-                </a:solidFill>
-                <a:latin typeface="Calibri"/>
-              </a:rPr>
-              <a:t>Bát cháo hành → “ngạc nhiên”, “mắt ươn ướt”, muốn “làm hòa với mọi người”.</a:t>
+              <a:t>Phân loại điểm nhìn trong đoạn mở đầu (người kể – nhân vật; bên ngoài – bên trong). Nhận xét sự dịch chuyển giữa các điểm nhìn.</a:t>
             </a:r>
           </a:p>
         </p:txBody>
@@ -11876,8 +12033,8 @@
         </p:nvSpPr>
         <p:spPr>
           <a:xfrm>
-            <a:off x="731520" y="5074920"/>
-            <a:ext cx="10789920" cy="731520"/>
+            <a:off x="731520" y="5120640"/>
+            <a:ext cx="10789920" cy="693420"/>
           </a:xfrm>
           <a:prstGeom prst="roundRect">
             <a:avLst>
@@ -11885,11 +12042,11 @@
             </a:avLst>
           </a:prstGeom>
           <a:solidFill>
-            <a:srgbClr val="FEF2F2"/>
+            <a:srgbClr val="EFF4FF"/>
           </a:solidFill>
           <a:ln w="19050">
             <a:solidFill>
-              <a:srgbClr val="991B1B"/>
+              <a:srgbClr val="1E40AF"/>
             </a:solidFill>
           </a:ln>
           <a:effectLst/>
@@ -11924,8 +12081,8 @@
         </p:nvSpPr>
         <p:spPr>
           <a:xfrm>
-            <a:off x="914400" y="5074920"/>
-            <a:ext cx="10424160" cy="731520"/>
+            <a:off x="914400" y="5120640"/>
+            <a:ext cx="10424160" cy="693420"/>
           </a:xfrm>
           <a:prstGeom prst="rect">
             <a:avLst/>
@@ -11944,13 +12101,13 @@
               </a:spcAft>
             </a:pPr>
             <a:r>
-              <a:rPr sz="2400" b="1">
-                <a:solidFill>
-                  <a:srgbClr val="991B1B"/>
+              <a:rPr sz="2200" b="1">
+                <a:solidFill>
+                  <a:srgbClr val="1E40AF"/>
                 </a:solidFill>
                 <a:latin typeface="Calibri"/>
               </a:rPr>
-              <a:t>Tình thương mộc mạc của thị Nở đánh thức nhân tính.</a:t>
+              <a:t>💡 Tìm câu thể hiện suy nghĩ của Chí Phèo, của dân làng.</a:t>
             </a:r>
           </a:p>
         </p:txBody>
@@ -12033,14 +12190,14 @@
         </p:nvSpPr>
         <p:spPr>
           <a:xfrm>
-            <a:off x="10253167" y="457200"/>
-            <a:ext cx="1389888" cy="457200"/>
+            <a:off x="9942271" y="457200"/>
+            <a:ext cx="1700784" cy="457200"/>
           </a:xfrm>
           <a:prstGeom prst="roundRect">
             <a:avLst/>
           </a:prstGeom>
           <a:solidFill>
-            <a:srgbClr val="1E40AF"/>
+            <a:srgbClr val="991B1B"/>
           </a:solidFill>
           <a:ln>
             <a:noFill/>
@@ -12073,7 +12230,7 @@
                 </a:solidFill>
                 <a:latin typeface="Arial"/>
               </a:rPr>
-              <a:t>ĐỀ BÀI</a:t>
+              <a:t>LỜI GIẢI</a:t>
             </a:r>
           </a:p>
         </p:txBody>
@@ -12087,7 +12244,7 @@
         <p:spPr>
           <a:xfrm>
             <a:off x="731520" y="274320"/>
-            <a:ext cx="9582912" cy="868680"/>
+            <a:ext cx="9272016" cy="868680"/>
           </a:xfrm>
           <a:prstGeom prst="rect">
             <a:avLst/>
@@ -12107,7 +12264,7 @@
                 </a:solidFill>
                 <a:latin typeface="Arial"/>
               </a:rPr>
-              <a:t>BỊ CỰ TUYỆT</a:t>
+              <a:t>ĐIỂM NHÌN TRONG ĐOẠN MỞ ĐẦU</a:t>
             </a:r>
           </a:p>
         </p:txBody>
@@ -12200,7 +12357,7 @@
         <p:spPr>
           <a:xfrm>
             <a:off x="731520" y="1463040"/>
-            <a:ext cx="10789920" cy="3566160"/>
+            <a:ext cx="10789920" cy="3474720"/>
           </a:xfrm>
           <a:prstGeom prst="rect">
             <a:avLst/>
@@ -12213,19 +12370,66 @@
           </a:bodyPr>
           <a:lstStyle/>
           <a:p>
-            <a:pPr algn="l">
+            <a:pPr algn="l" marL="365760" indent="-365760">
               <a:spcAft>
                 <a:spcPts val="800"/>
               </a:spcAft>
+              <a:buClr>
+                <a:srgbClr val="1E40AF"/>
+              </a:buClr>
+              <a:buFont typeface="Arial"/>
+              <a:buChar char="•"/>
             </a:pPr>
             <a:r>
-              <a:rPr sz="2600" b="1">
+              <a:rPr sz="2300">
                 <a:solidFill>
                   <a:srgbClr val="1E293B"/>
                 </a:solidFill>
                 <a:latin typeface="Calibri"/>
               </a:rPr>
-              <a:t>Phân tích phản ứng tâm lí và hành động của Chí Phèo sau khi bị thị Nở từ chối. Người kể có đưa ra phán đoán đáng tin cậy không?</a:t>
+              <a:t>Người kể quan sát hành động chửi (bên ngoài).</a:t>
+            </a:r>
+          </a:p>
+          <a:p>
+            <a:pPr algn="l" marL="365760" indent="-365760">
+              <a:spcAft>
+                <a:spcPts val="800"/>
+              </a:spcAft>
+              <a:buClr>
+                <a:srgbClr val="1E40AF"/>
+              </a:buClr>
+              <a:buFont typeface="Arial"/>
+              <a:buChar char="•"/>
+            </a:pPr>
+            <a:r>
+              <a:rPr sz="2300">
+                <a:solidFill>
+                  <a:srgbClr val="1E293B"/>
+                </a:solidFill>
+                <a:latin typeface="Calibri"/>
+              </a:rPr>
+              <a:t>“Tức thật! Tức thật!” – điểm nhìn bên trong Chí Phèo (lời nửa trực tiếp).</a:t>
+            </a:r>
+          </a:p>
+          <a:p>
+            <a:pPr algn="l" marL="365760" indent="-365760">
+              <a:spcAft>
+                <a:spcPts val="800"/>
+              </a:spcAft>
+              <a:buClr>
+                <a:srgbClr val="1E40AF"/>
+              </a:buClr>
+              <a:buFont typeface="Arial"/>
+              <a:buChar char="•"/>
+            </a:pPr>
+            <a:r>
+              <a:rPr sz="2300">
+                <a:solidFill>
+                  <a:srgbClr val="1E293B"/>
+                </a:solidFill>
+                <a:latin typeface="Calibri"/>
+              </a:rPr>
+              <a:t>“Chắc nó trừ mình ra!” – điểm nhìn dân làng Vũ Đại.</a:t>
             </a:r>
           </a:p>
         </p:txBody>
@@ -12238,8 +12442,8 @@
         </p:nvSpPr>
         <p:spPr>
           <a:xfrm>
-            <a:off x="731520" y="5120640"/>
-            <a:ext cx="10789920" cy="693420"/>
+            <a:off x="731520" y="5074920"/>
+            <a:ext cx="10789920" cy="731520"/>
           </a:xfrm>
           <a:prstGeom prst="roundRect">
             <a:avLst>
@@ -12247,11 +12451,11 @@
             </a:avLst>
           </a:prstGeom>
           <a:solidFill>
-            <a:srgbClr val="EFF4FF"/>
+            <a:srgbClr val="FEF2F2"/>
           </a:solidFill>
           <a:ln w="19050">
             <a:solidFill>
-              <a:srgbClr val="1E40AF"/>
+              <a:srgbClr val="991B1B"/>
             </a:solidFill>
           </a:ln>
           <a:effectLst/>
@@ -12286,8 +12490,8 @@
         </p:nvSpPr>
         <p:spPr>
           <a:xfrm>
-            <a:off x="914400" y="5120640"/>
-            <a:ext cx="10424160" cy="693420"/>
+            <a:off x="914400" y="5074920"/>
+            <a:ext cx="10424160" cy="731520"/>
           </a:xfrm>
           <a:prstGeom prst="rect">
             <a:avLst/>
@@ -12306,13 +12510,13 @@
               </a:spcAft>
             </a:pPr>
             <a:r>
-              <a:rPr sz="2200" b="1">
-                <a:solidFill>
-                  <a:srgbClr val="1E40AF"/>
+              <a:rPr sz="2400" b="1">
+                <a:solidFill>
+                  <a:srgbClr val="991B1B"/>
                 </a:solidFill>
                 <a:latin typeface="Calibri"/>
               </a:rPr>
-              <a:t>💡 “Càng uống lại càng tỉnh ra” gợi điều gì?</a:t>
+              <a:t>Tiếng chửi là tiếng kêu của kẻ bị cự tuyệt quyền làm người.</a:t>
             </a:r>
           </a:p>
         </p:txBody>
@@ -12395,14 +12599,14 @@
         </p:nvSpPr>
         <p:spPr>
           <a:xfrm>
-            <a:off x="9942271" y="457200"/>
-            <a:ext cx="1700784" cy="457200"/>
+            <a:off x="10253167" y="457200"/>
+            <a:ext cx="1389888" cy="457200"/>
           </a:xfrm>
           <a:prstGeom prst="roundRect">
             <a:avLst/>
           </a:prstGeom>
           <a:solidFill>
-            <a:srgbClr val="991B1B"/>
+            <a:srgbClr val="1E40AF"/>
           </a:solidFill>
           <a:ln>
             <a:noFill/>
@@ -12435,7 +12639,7 @@
                 </a:solidFill>
                 <a:latin typeface="Arial"/>
               </a:rPr>
-              <a:t>LỜI GIẢI</a:t>
+              <a:t>ĐỀ BÀI</a:t>
             </a:r>
           </a:p>
         </p:txBody>
@@ -12449,7 +12653,7 @@
         <p:spPr>
           <a:xfrm>
             <a:off x="731520" y="274320"/>
-            <a:ext cx="9272016" cy="868680"/>
+            <a:ext cx="9582912" cy="868680"/>
           </a:xfrm>
           <a:prstGeom prst="rect">
             <a:avLst/>
@@ -12469,7 +12673,7 @@
                 </a:solidFill>
                 <a:latin typeface="Arial"/>
               </a:rPr>
-              <a:t>BỊ CỰ TUYỆT</a:t>
+              <a:t>BUỔI SÁNG SAU KHI GẶP THỊ NỞ</a:t>
             </a:r>
           </a:p>
         </p:txBody>
@@ -12562,7 +12766,7 @@
         <p:spPr>
           <a:xfrm>
             <a:off x="731520" y="1463040"/>
-            <a:ext cx="10789920" cy="3474720"/>
+            <a:ext cx="10789920" cy="3566160"/>
           </a:xfrm>
           <a:prstGeom prst="rect">
             <a:avLst/>
@@ -12575,66 +12779,19 @@
           </a:bodyPr>
           <a:lstStyle/>
           <a:p>
-            <a:pPr algn="l" marL="365760" indent="-365760">
+            <a:pPr algn="l">
               <a:spcAft>
                 <a:spcPts val="800"/>
               </a:spcAft>
-              <a:buClr>
-                <a:srgbClr val="1E40AF"/>
-              </a:buClr>
-              <a:buFont typeface="Arial"/>
-              <a:buChar char="•"/>
             </a:pPr>
             <a:r>
-              <a:rPr sz="2300">
+              <a:rPr sz="2600" b="1">
                 <a:solidFill>
                   <a:srgbClr val="1E293B"/>
                 </a:solidFill>
                 <a:latin typeface="Calibri"/>
               </a:rPr>
-              <a:t>Ngạc nhiên, níu kéo; uống rượu nhưng “càng uống lại càng tỉnh”.</a:t>
-            </a:r>
-          </a:p>
-          <a:p>
-            <a:pPr algn="l" marL="365760" indent="-365760">
-              <a:spcAft>
-                <a:spcPts val="800"/>
-              </a:spcAft>
-              <a:buClr>
-                <a:srgbClr val="1E40AF"/>
-              </a:buClr>
-              <a:buFont typeface="Arial"/>
-              <a:buChar char="•"/>
-            </a:pPr>
-            <a:r>
-              <a:rPr sz="2300">
-                <a:solidFill>
-                  <a:srgbClr val="1E293B"/>
-                </a:solidFill>
-                <a:latin typeface="Calibri"/>
-              </a:rPr>
-              <a:t>Ôm mặt khóc rưng rức; xách dao đến nhà Bá Kiến.</a:t>
-            </a:r>
-          </a:p>
-          <a:p>
-            <a:pPr algn="l" marL="365760" indent="-365760">
-              <a:spcAft>
-                <a:spcPts val="800"/>
-              </a:spcAft>
-              <a:buClr>
-                <a:srgbClr val="1E40AF"/>
-              </a:buClr>
-              <a:buFont typeface="Arial"/>
-              <a:buChar char="•"/>
-            </a:pPr>
-            <a:r>
-              <a:rPr sz="2300">
-                <a:solidFill>
-                  <a:srgbClr val="1E293B"/>
-                </a:solidFill>
-                <a:latin typeface="Calibri"/>
-              </a:rPr>
-              <a:t>“Ai cho tao lương thiện?” – người kể thấu hiểu, phán đoán tin cậy.</a:t>
+              <a:t>Phân tích diễn biến tâm trạng Chí Phèo buổi sáng sau cuộc gặp thị Nở. Nhân tố nào quyết định sự hồi sinh nhân tính?</a:t>
             </a:r>
           </a:p>
         </p:txBody>
@@ -12647,8 +12804,8 @@
         </p:nvSpPr>
         <p:spPr>
           <a:xfrm>
-            <a:off x="731520" y="5074920"/>
-            <a:ext cx="10789920" cy="731520"/>
+            <a:off x="731520" y="5120640"/>
+            <a:ext cx="10789920" cy="693420"/>
           </a:xfrm>
           <a:prstGeom prst="roundRect">
             <a:avLst>
@@ -12656,11 +12813,11 @@
             </a:avLst>
           </a:prstGeom>
           <a:solidFill>
-            <a:srgbClr val="FEF2F2"/>
+            <a:srgbClr val="EFF4FF"/>
           </a:solidFill>
           <a:ln w="19050">
             <a:solidFill>
-              <a:srgbClr val="991B1B"/>
+              <a:srgbClr val="1E40AF"/>
             </a:solidFill>
           </a:ln>
           <a:effectLst/>
@@ -12695,8 +12852,8 @@
         </p:nvSpPr>
         <p:spPr>
           <a:xfrm>
-            <a:off x="914400" y="5074920"/>
-            <a:ext cx="10424160" cy="731520"/>
+            <a:off x="914400" y="5120640"/>
+            <a:ext cx="10424160" cy="693420"/>
           </a:xfrm>
           <a:prstGeom prst="rect">
             <a:avLst/>
@@ -12715,13 +12872,13 @@
               </a:spcAft>
             </a:pPr>
             <a:r>
-              <a:rPr sz="2400" b="1">
-                <a:solidFill>
-                  <a:srgbClr val="991B1B"/>
+              <a:rPr sz="2200" b="1">
+                <a:solidFill>
+                  <a:srgbClr val="1E40AF"/>
                 </a:solidFill>
                 <a:latin typeface="Calibri"/>
               </a:rPr>
-              <a:t>Bi kịch bị cự tuyệt quyền làm người.</a:t>
+              <a:t>💡 Chú ý âm thanh cuộc sống và bát cháo hành.</a:t>
             </a:r>
           </a:p>
         </p:txBody>
@@ -12804,14 +12961,14 @@
         </p:nvSpPr>
         <p:spPr>
           <a:xfrm>
-            <a:off x="10253167" y="457200"/>
-            <a:ext cx="1389888" cy="457200"/>
+            <a:off x="9942271" y="457200"/>
+            <a:ext cx="1700784" cy="457200"/>
           </a:xfrm>
           <a:prstGeom prst="roundRect">
             <a:avLst/>
           </a:prstGeom>
           <a:solidFill>
-            <a:srgbClr val="1E40AF"/>
+            <a:srgbClr val="991B1B"/>
           </a:solidFill>
           <a:ln>
             <a:noFill/>
@@ -12844,7 +13001,7 @@
                 </a:solidFill>
                 <a:latin typeface="Arial"/>
               </a:rPr>
-              <a:t>ĐỀ BÀI</a:t>
+              <a:t>LỜI GIẢI</a:t>
             </a:r>
           </a:p>
         </p:txBody>
@@ -12858,7 +13015,7 @@
         <p:spPr>
           <a:xfrm>
             <a:off x="731520" y="274320"/>
-            <a:ext cx="9582912" cy="868680"/>
+            <a:ext cx="9272016" cy="868680"/>
           </a:xfrm>
           <a:prstGeom prst="rect">
             <a:avLst/>
@@ -12878,7 +13035,7 @@
                 </a:solidFill>
                 <a:latin typeface="Arial"/>
               </a:rPr>
-              <a:t>ĐOẠN KẾT – SO SÁNH VỚI VỢ NHẶT</a:t>
+              <a:t>BUỔI SÁNG SAU KHI GẶP THỊ NỞ</a:t>
             </a:r>
           </a:p>
         </p:txBody>
@@ -12971,7 +13128,7 @@
         <p:spPr>
           <a:xfrm>
             <a:off x="731520" y="1463040"/>
-            <a:ext cx="10789920" cy="3566160"/>
+            <a:ext cx="10789920" cy="3474720"/>
           </a:xfrm>
           <a:prstGeom prst="rect">
             <a:avLst/>
@@ -12984,19 +13141,66 @@
           </a:bodyPr>
           <a:lstStyle/>
           <a:p>
-            <a:pPr algn="l">
+            <a:pPr algn="l" marL="365760" indent="-365760">
               <a:spcAft>
                 <a:spcPts val="800"/>
               </a:spcAft>
+              <a:buClr>
+                <a:srgbClr val="1E40AF"/>
+              </a:buClr>
+              <a:buFont typeface="Arial"/>
+              <a:buChar char="•"/>
             </a:pPr>
             <a:r>
-              <a:rPr sz="2600" b="1">
+              <a:rPr sz="2300">
                 <a:solidFill>
                   <a:srgbClr val="1E293B"/>
                 </a:solidFill>
                 <a:latin typeface="Calibri"/>
               </a:rPr>
-              <a:t>Nhận xét điểm nhìn, giọng điệu ở đoạn kết; ý nghĩa cái chết của Chí Phèo. So sánh đoạn kết Chí Phèo và Vợ nhặt.</a:t>
+              <a:t>Tỉnh rượu, nghe tiếng chim, tiếng người đi chợ; nhớ ước mơ xưa.</a:t>
+            </a:r>
+          </a:p>
+          <a:p>
+            <a:pPr algn="l" marL="365760" indent="-365760">
+              <a:spcAft>
+                <a:spcPts val="800"/>
+              </a:spcAft>
+              <a:buClr>
+                <a:srgbClr val="1E40AF"/>
+              </a:buClr>
+              <a:buFont typeface="Arial"/>
+              <a:buChar char="•"/>
+            </a:pPr>
+            <a:r>
+              <a:rPr sz="2300">
+                <a:solidFill>
+                  <a:srgbClr val="1E293B"/>
+                </a:solidFill>
+                <a:latin typeface="Calibri"/>
+              </a:rPr>
+              <a:t>Lo sợ tuổi già cô độc.</a:t>
+            </a:r>
+          </a:p>
+          <a:p>
+            <a:pPr algn="l" marL="365760" indent="-365760">
+              <a:spcAft>
+                <a:spcPts val="800"/>
+              </a:spcAft>
+              <a:buClr>
+                <a:srgbClr val="1E40AF"/>
+              </a:buClr>
+              <a:buFont typeface="Arial"/>
+              <a:buChar char="•"/>
+            </a:pPr>
+            <a:r>
+              <a:rPr sz="2300">
+                <a:solidFill>
+                  <a:srgbClr val="1E293B"/>
+                </a:solidFill>
+                <a:latin typeface="Calibri"/>
+              </a:rPr>
+              <a:t>Bát cháo hành → “ngạc nhiên”, “mắt ươn ướt”, muốn “làm hòa với mọi người”.</a:t>
             </a:r>
           </a:p>
         </p:txBody>
@@ -13009,8 +13213,8 @@
         </p:nvSpPr>
         <p:spPr>
           <a:xfrm>
-            <a:off x="731520" y="5120640"/>
-            <a:ext cx="10789920" cy="693420"/>
+            <a:off x="731520" y="5074920"/>
+            <a:ext cx="10789920" cy="731520"/>
           </a:xfrm>
           <a:prstGeom prst="roundRect">
             <a:avLst>
@@ -13018,11 +13222,11 @@
             </a:avLst>
           </a:prstGeom>
           <a:solidFill>
-            <a:srgbClr val="EFF4FF"/>
+            <a:srgbClr val="FEF2F2"/>
           </a:solidFill>
           <a:ln w="19050">
             <a:solidFill>
-              <a:srgbClr val="1E40AF"/>
+              <a:srgbClr val="991B1B"/>
             </a:solidFill>
           </a:ln>
           <a:effectLst/>
@@ -13057,8 +13261,8 @@
         </p:nvSpPr>
         <p:spPr>
           <a:xfrm>
-            <a:off x="914400" y="5120640"/>
-            <a:ext cx="10424160" cy="693420"/>
+            <a:off x="914400" y="5074920"/>
+            <a:ext cx="10424160" cy="731520"/>
           </a:xfrm>
           <a:prstGeom prst="rect">
             <a:avLst/>
@@ -13077,13 +13281,13 @@
               </a:spcAft>
             </a:pPr>
             <a:r>
-              <a:rPr sz="2200" b="1">
-                <a:solidFill>
-                  <a:srgbClr val="1E40AF"/>
+              <a:rPr sz="2400" b="1">
+                <a:solidFill>
+                  <a:srgbClr val="991B1B"/>
                 </a:solidFill>
                 <a:latin typeface="Calibri"/>
               </a:rPr>
-              <a:t>💡 Hình ảnh cuối cùng của mỗi truyện là gì?</a:t>
+              <a:t>Tình thương mộc mạc của thị Nở đánh thức nhân tính.</a:t>
             </a:r>
           </a:p>
         </p:txBody>
@@ -13166,14 +13370,14 @@
         </p:nvSpPr>
         <p:spPr>
           <a:xfrm>
-            <a:off x="9942271" y="457200"/>
-            <a:ext cx="1700784" cy="457200"/>
+            <a:off x="10253167" y="457200"/>
+            <a:ext cx="1389888" cy="457200"/>
           </a:xfrm>
           <a:prstGeom prst="roundRect">
             <a:avLst/>
           </a:prstGeom>
           <a:solidFill>
-            <a:srgbClr val="991B1B"/>
+            <a:srgbClr val="1E40AF"/>
           </a:solidFill>
           <a:ln>
             <a:noFill/>
@@ -13206,7 +13410,7 @@
                 </a:solidFill>
                 <a:latin typeface="Arial"/>
               </a:rPr>
-              <a:t>LỜI GIẢI</a:t>
+              <a:t>ĐỀ BÀI</a:t>
             </a:r>
           </a:p>
         </p:txBody>
@@ -13220,7 +13424,7 @@
         <p:spPr>
           <a:xfrm>
             <a:off x="731520" y="274320"/>
-            <a:ext cx="9272016" cy="868680"/>
+            <a:ext cx="9582912" cy="868680"/>
           </a:xfrm>
           <a:prstGeom prst="rect">
             <a:avLst/>
@@ -13240,7 +13444,7 @@
                 </a:solidFill>
                 <a:latin typeface="Arial"/>
               </a:rPr>
-              <a:t>ĐOẠN KẾT – SO SÁNH VỚI VỢ NHẶT</a:t>
+              <a:t>BỊ CỰ TUYỆT</a:t>
             </a:r>
           </a:p>
         </p:txBody>
@@ -13333,7 +13537,7 @@
         <p:spPr>
           <a:xfrm>
             <a:off x="731520" y="1463040"/>
-            <a:ext cx="10789920" cy="3474720"/>
+            <a:ext cx="10789920" cy="3566160"/>
           </a:xfrm>
           <a:prstGeom prst="rect">
             <a:avLst/>
@@ -13346,66 +13550,19 @@
           </a:bodyPr>
           <a:lstStyle/>
           <a:p>
-            <a:pPr algn="l" marL="365760" indent="-365760">
+            <a:pPr algn="l">
               <a:spcAft>
                 <a:spcPts val="800"/>
               </a:spcAft>
-              <a:buClr>
-                <a:srgbClr val="1E40AF"/>
-              </a:buClr>
-              <a:buFont typeface="Arial"/>
-              <a:buChar char="•"/>
             </a:pPr>
             <a:r>
-              <a:rPr sz="2300">
+              <a:rPr sz="2600" b="1">
                 <a:solidFill>
                   <a:srgbClr val="1E293B"/>
                 </a:solidFill>
                 <a:latin typeface="Calibri"/>
               </a:rPr>
-              <a:t>Chí Phèo: dân làng hả hê bàn tán; thị Nở nghĩ đến “cái lò gạch cũ bỏ không” → vòng luẩn quẩn.</a:t>
-            </a:r>
-          </a:p>
-          <a:p>
-            <a:pPr algn="l" marL="365760" indent="-365760">
-              <a:spcAft>
-                <a:spcPts val="800"/>
-              </a:spcAft>
-              <a:buClr>
-                <a:srgbClr val="1E40AF"/>
-              </a:buClr>
-              <a:buFont typeface="Arial"/>
-              <a:buChar char="•"/>
-            </a:pPr>
-            <a:r>
-              <a:rPr sz="2300">
-                <a:solidFill>
-                  <a:srgbClr val="1E293B"/>
-                </a:solidFill>
-                <a:latin typeface="Calibri"/>
-              </a:rPr>
-              <a:t>Vợ nhặt: lá cờ đỏ trong óc Tràng → niềm tin, lối thoát.</a:t>
-            </a:r>
-          </a:p>
-          <a:p>
-            <a:pPr algn="l" marL="365760" indent="-365760">
-              <a:spcAft>
-                <a:spcPts val="800"/>
-              </a:spcAft>
-              <a:buClr>
-                <a:srgbClr val="1E40AF"/>
-              </a:buClr>
-              <a:buFont typeface="Arial"/>
-              <a:buChar char="•"/>
-            </a:pPr>
-            <a:r>
-              <a:rPr sz="2300">
-                <a:solidFill>
-                  <a:srgbClr val="1E293B"/>
-                </a:solidFill>
-                <a:latin typeface="Calibri"/>
-              </a:rPr>
-              <a:t>Cái chết của Chí Phèo: tố cáo xã hội, khẳng định khát vọng lương thiện.</a:t>
+              <a:t>Phân tích phản ứng tâm lí và hành động của Chí Phèo sau khi bị thị Nở từ chối. Người kể có đưa ra phán đoán đáng tin cậy không?</a:t>
             </a:r>
           </a:p>
         </p:txBody>
@@ -13418,8 +13575,8 @@
         </p:nvSpPr>
         <p:spPr>
           <a:xfrm>
-            <a:off x="731520" y="5074920"/>
-            <a:ext cx="10789920" cy="731520"/>
+            <a:off x="731520" y="5120640"/>
+            <a:ext cx="10789920" cy="693420"/>
           </a:xfrm>
           <a:prstGeom prst="roundRect">
             <a:avLst>
@@ -13427,11 +13584,11 @@
             </a:avLst>
           </a:prstGeom>
           <a:solidFill>
-            <a:srgbClr val="FEF2F2"/>
+            <a:srgbClr val="EFF4FF"/>
           </a:solidFill>
           <a:ln w="19050">
             <a:solidFill>
-              <a:srgbClr val="991B1B"/>
+              <a:srgbClr val="1E40AF"/>
             </a:solidFill>
           </a:ln>
           <a:effectLst/>
@@ -13466,8 +13623,8 @@
         </p:nvSpPr>
         <p:spPr>
           <a:xfrm>
-            <a:off x="914400" y="5074920"/>
-            <a:ext cx="10424160" cy="731520"/>
+            <a:off x="914400" y="5120640"/>
+            <a:ext cx="10424160" cy="693420"/>
           </a:xfrm>
           <a:prstGeom prst="rect">
             <a:avLst/>
@@ -13486,13 +13643,13 @@
               </a:spcAft>
             </a:pPr>
             <a:r>
-              <a:rPr sz="2400" b="1">
-                <a:solidFill>
-                  <a:srgbClr val="991B1B"/>
+              <a:rPr sz="2200" b="1">
+                <a:solidFill>
+                  <a:srgbClr val="1E40AF"/>
                 </a:solidFill>
                 <a:latin typeface="Calibri"/>
               </a:rPr>
-              <a:t>Hai cách kết – hai tư tưởng nhân đạo.</a:t>
+              <a:t>💡 “Càng uống lại càng tỉnh ra” gợi điều gì?</a:t>
             </a:r>
           </a:p>
         </p:txBody>
@@ -13684,14 +13841,14 @@
         </p:nvSpPr>
         <p:spPr>
           <a:xfrm>
-            <a:off x="10097719" y="457200"/>
-            <a:ext cx="1545336" cy="457200"/>
+            <a:off x="9942271" y="457200"/>
+            <a:ext cx="1700784" cy="457200"/>
           </a:xfrm>
           <a:prstGeom prst="roundRect">
             <a:avLst/>
           </a:prstGeom>
           <a:solidFill>
-            <a:srgbClr val="166534"/>
+            <a:srgbClr val="991B1B"/>
           </a:solidFill>
           <a:ln>
             <a:noFill/>
@@ -13724,7 +13881,7 @@
                 </a:solidFill>
                 <a:latin typeface="Arial"/>
               </a:rPr>
-              <a:t>GHI NHỚ</a:t>
+              <a:t>LỜI GIẢI</a:t>
             </a:r>
           </a:p>
         </p:txBody>
@@ -13738,7 +13895,7 @@
         <p:spPr>
           <a:xfrm>
             <a:off x="731520" y="274320"/>
-            <a:ext cx="9427464" cy="868680"/>
+            <a:ext cx="9272016" cy="868680"/>
           </a:xfrm>
           <a:prstGeom prst="rect">
             <a:avLst/>
@@ -13758,7 +13915,7 @@
                 </a:solidFill>
                 <a:latin typeface="Arial"/>
               </a:rPr>
-              <a:t>NGHỆ THUẬT KỂ CHUYỆN CỦA NAM CAO</a:t>
+              <a:t>BỊ CỰ TUYỆT</a:t>
             </a:r>
           </a:p>
         </p:txBody>
@@ -13851,7 +14008,7 @@
         <p:spPr>
           <a:xfrm>
             <a:off x="731520" y="1463040"/>
-            <a:ext cx="10789920" cy="4754880"/>
+            <a:ext cx="10789920" cy="3474720"/>
           </a:xfrm>
           <a:prstGeom prst="rect">
             <a:avLst/>
@@ -13875,13 +14032,13 @@
               <a:buChar char="•"/>
             </a:pPr>
             <a:r>
-              <a:rPr sz="2400">
+              <a:rPr sz="2300">
                 <a:solidFill>
                   <a:srgbClr val="1E293B"/>
                 </a:solidFill>
                 <a:latin typeface="Calibri"/>
               </a:rPr>
-              <a:t>Người kể chuyện ngôi thứ ba, vừa khách quan vừa cảm thông.</a:t>
+              <a:t>Ngạc nhiên, níu kéo; uống rượu nhưng “càng uống lại càng tỉnh”.</a:t>
             </a:r>
           </a:p>
           <a:p>
@@ -13896,13 +14053,13 @@
               <a:buChar char="•"/>
             </a:pPr>
             <a:r>
-              <a:rPr sz="2400">
+              <a:rPr sz="2300">
                 <a:solidFill>
                   <a:srgbClr val="1E293B"/>
                 </a:solidFill>
                 <a:latin typeface="Calibri"/>
               </a:rPr>
-              <a:t>Phối hợp nhiều điểm nhìn; lời nửa trực tiếp.</a:t>
+              <a:t>Ôm mặt khóc rưng rức; xách dao đến nhà Bá Kiến.</a:t>
             </a:r>
           </a:p>
           <a:p>
@@ -13917,34 +14074,100 @@
               <a:buChar char="•"/>
             </a:pPr>
             <a:r>
-              <a:rPr sz="2400">
+              <a:rPr sz="2300">
                 <a:solidFill>
                   <a:srgbClr val="1E293B"/>
                 </a:solidFill>
                 <a:latin typeface="Calibri"/>
               </a:rPr>
-              <a:t>Kết cấu phá vỡ trình tự thời gian.</a:t>
-            </a:r>
-          </a:p>
-          <a:p>
-            <a:pPr algn="l" marL="365760" indent="-365760">
+              <a:t>“Ai cho tao lương thiện?” – người kể thấu hiểu, phán đoán tin cậy.</a:t>
+            </a:r>
+          </a:p>
+        </p:txBody>
+      </p:sp>
+      <p:sp>
+        <p:nvSpPr>
+          <p:cNvPr id="8" name="Rounded Rectangle 7"/>
+          <p:cNvSpPr/>
+          <p:nvPr/>
+        </p:nvSpPr>
+        <p:spPr>
+          <a:xfrm>
+            <a:off x="731520" y="5074920"/>
+            <a:ext cx="10789920" cy="731520"/>
+          </a:xfrm>
+          <a:prstGeom prst="roundRect">
+            <a:avLst>
+              <a:gd name="adj" fmla="val 8000"/>
+            </a:avLst>
+          </a:prstGeom>
+          <a:solidFill>
+            <a:srgbClr val="FEF2F2"/>
+          </a:solidFill>
+          <a:ln w="19050">
+            <a:solidFill>
+              <a:srgbClr val="991B1B"/>
+            </a:solidFill>
+          </a:ln>
+          <a:effectLst/>
+        </p:spPr>
+        <p:style>
+          <a:lnRef idx="1">
+            <a:schemeClr val="accent1"/>
+          </a:lnRef>
+          <a:fillRef idx="3">
+            <a:schemeClr val="accent1"/>
+          </a:fillRef>
+          <a:effectRef idx="2">
+            <a:schemeClr val="accent1"/>
+          </a:effectRef>
+          <a:fontRef idx="minor">
+            <a:schemeClr val="lt1"/>
+          </a:fontRef>
+        </p:style>
+        <p:txBody>
+          <a:bodyPr rtlCol="0" anchor="ctr"/>
+          <a:lstStyle/>
+          <a:p>
+            <a:pPr algn="ctr"/>
+          </a:p>
+        </p:txBody>
+      </p:sp>
+      <p:sp>
+        <p:nvSpPr>
+          <p:cNvPr id="9" name="TextBox 8"/>
+          <p:cNvSpPr txBox="1"/>
+          <p:nvPr/>
+        </p:nvSpPr>
+        <p:spPr>
+          <a:xfrm>
+            <a:off x="914400" y="5074920"/>
+            <a:ext cx="10424160" cy="731520"/>
+          </a:xfrm>
+          <a:prstGeom prst="rect">
+            <a:avLst/>
+          </a:prstGeom>
+          <a:noFill/>
+        </p:spPr>
+        <p:txBody>
+          <a:bodyPr wrap="square" anchor="ctr" lIns="45720" rIns="45720">
+            <a:spAutoFit/>
+          </a:bodyPr>
+          <a:lstStyle/>
+          <a:p>
+            <a:pPr algn="l">
               <a:spcAft>
-                <a:spcPts val="800"/>
+                <a:spcPts val="400"/>
               </a:spcAft>
-              <a:buClr>
-                <a:srgbClr val="1E40AF"/>
-              </a:buClr>
-              <a:buFont typeface="Arial"/>
-              <a:buChar char="•"/>
             </a:pPr>
             <a:r>
-              <a:rPr sz="2400">
-                <a:solidFill>
-                  <a:srgbClr val="1E293B"/>
+              <a:rPr sz="2400" b="1">
+                <a:solidFill>
+                  <a:srgbClr val="991B1B"/>
                 </a:solidFill>
                 <a:latin typeface="Calibri"/>
               </a:rPr>
-              <a:t>Ngôn ngữ sinh động, gần đời thường.</a:t>
+              <a:t>Bi kịch bị cự tuyệt quyền làm người.</a:t>
             </a:r>
           </a:p>
         </p:txBody>
@@ -13963,7 +14186,7 @@
     <p:bg>
       <p:bgPr>
         <a:solidFill>
-          <a:srgbClr val="F8F9FA"/>
+          <a:srgbClr val="FFFFFF"/>
         </a:solidFill>
         <a:effectLst/>
       </p:bgPr>
@@ -13983,14 +14206,14 @@
         </p:nvSpPr>
         <p:spPr>
           <a:xfrm>
-            <a:off x="548640" y="2926080"/>
-            <a:ext cx="164592" cy="1005840"/>
+            <a:off x="457200" y="384048"/>
+            <a:ext cx="109728" cy="658368"/>
           </a:xfrm>
           <a:prstGeom prst="rect">
             <a:avLst/>
           </a:prstGeom>
           <a:solidFill>
-            <a:srgbClr val="991B1B"/>
+            <a:srgbClr val="1E40AF"/>
           </a:solidFill>
           <a:ln>
             <a:noFill/>
@@ -14021,14 +14244,67 @@
       </p:sp>
       <p:sp>
         <p:nvSpPr>
-          <p:cNvPr id="3" name="TextBox 2"/>
+          <p:cNvPr id="3" name="Rounded Rectangle 2"/>
+          <p:cNvSpPr/>
+          <p:nvPr/>
+        </p:nvSpPr>
+        <p:spPr>
+          <a:xfrm>
+            <a:off x="10253167" y="457200"/>
+            <a:ext cx="1389888" cy="457200"/>
+          </a:xfrm>
+          <a:prstGeom prst="roundRect">
+            <a:avLst/>
+          </a:prstGeom>
+          <a:solidFill>
+            <a:srgbClr val="1E40AF"/>
+          </a:solidFill>
+          <a:ln>
+            <a:noFill/>
+          </a:ln>
+          <a:effectLst/>
+        </p:spPr>
+        <p:style>
+          <a:lnRef idx="1">
+            <a:schemeClr val="accent1"/>
+          </a:lnRef>
+          <a:fillRef idx="3">
+            <a:schemeClr val="accent1"/>
+          </a:fillRef>
+          <a:effectRef idx="2">
+            <a:schemeClr val="accent1"/>
+          </a:effectRef>
+          <a:fontRef idx="minor">
+            <a:schemeClr val="lt1"/>
+          </a:fontRef>
+        </p:style>
+        <p:txBody>
+          <a:bodyPr rtlCol="0" anchor="ctr" wrap="none" tIns="0" bIns="0"/>
+          <a:lstStyle/>
+          <a:p>
+            <a:pPr algn="ctr"/>
+            <a:r>
+              <a:rPr sz="1400" b="1">
+                <a:solidFill>
+                  <a:srgbClr val="FFFFFF"/>
+                </a:solidFill>
+                <a:latin typeface="Arial"/>
+              </a:rPr>
+              <a:t>ĐỀ BÀI</a:t>
+            </a:r>
+          </a:p>
+        </p:txBody>
+      </p:sp>
+      <p:sp>
+        <p:nvSpPr>
+          <p:cNvPr id="4" name="TextBox 3"/>
           <p:cNvSpPr txBox="1"/>
           <p:nvPr/>
         </p:nvSpPr>
         <p:spPr>
           <a:xfrm>
-            <a:off x="914400" y="2743200"/>
-            <a:ext cx="10515600" cy="1371600"/>
+            <a:off x="731520" y="274320"/>
+            <a:ext cx="9582912" cy="868680"/>
           </a:xfrm>
           <a:prstGeom prst="rect">
             <a:avLst/>
@@ -14036,7 +14312,120 @@
           <a:noFill/>
         </p:spPr>
         <p:txBody>
-          <a:bodyPr wrap="square" anchor="ctr" lIns="45720" rIns="45720">
+          <a:bodyPr wrap="square" anchor="ctr">
+            <a:spAutoFit/>
+          </a:bodyPr>
+          <a:lstStyle/>
+          <a:p>
+            <a:r>
+              <a:rPr sz="3600" b="1">
+                <a:solidFill>
+                  <a:srgbClr val="1E40AF"/>
+                </a:solidFill>
+                <a:latin typeface="Arial"/>
+              </a:rPr>
+              <a:t>ĐOẠN KẾT – SO SÁNH VỚI VỢ NHẶT</a:t>
+            </a:r>
+          </a:p>
+        </p:txBody>
+      </p:sp>
+      <p:sp>
+        <p:nvSpPr>
+          <p:cNvPr id="5" name="Rectangle 4"/>
+          <p:cNvSpPr/>
+          <p:nvPr/>
+        </p:nvSpPr>
+        <p:spPr>
+          <a:xfrm>
+            <a:off x="457200" y="1207008"/>
+            <a:ext cx="11274552" cy="22000"/>
+          </a:xfrm>
+          <a:prstGeom prst="rect">
+            <a:avLst/>
+          </a:prstGeom>
+          <a:solidFill>
+            <a:srgbClr val="E2E8F0"/>
+          </a:solidFill>
+          <a:ln>
+            <a:noFill/>
+          </a:ln>
+          <a:effectLst/>
+        </p:spPr>
+        <p:style>
+          <a:lnRef idx="1">
+            <a:schemeClr val="accent1"/>
+          </a:lnRef>
+          <a:fillRef idx="3">
+            <a:schemeClr val="accent1"/>
+          </a:fillRef>
+          <a:effectRef idx="2">
+            <a:schemeClr val="accent1"/>
+          </a:effectRef>
+          <a:fontRef idx="minor">
+            <a:schemeClr val="lt1"/>
+          </a:fontRef>
+        </p:style>
+        <p:txBody>
+          <a:bodyPr rtlCol="0" anchor="ctr"/>
+          <a:lstStyle/>
+          <a:p>
+            <a:pPr algn="ctr"/>
+          </a:p>
+        </p:txBody>
+      </p:sp>
+      <p:sp>
+        <p:nvSpPr>
+          <p:cNvPr id="6" name="TextBox 5"/>
+          <p:cNvSpPr txBox="1"/>
+          <p:nvPr/>
+        </p:nvSpPr>
+        <p:spPr>
+          <a:xfrm>
+            <a:off x="457200" y="6355080"/>
+            <a:ext cx="11274552" cy="365760"/>
+          </a:xfrm>
+          <a:prstGeom prst="rect">
+            <a:avLst/>
+          </a:prstGeom>
+          <a:noFill/>
+        </p:spPr>
+        <p:txBody>
+          <a:bodyPr wrap="none">
+            <a:spAutoFit/>
+          </a:bodyPr>
+          <a:lstStyle/>
+          <a:p>
+            <a:pPr algn="r"/>
+            <a:r>
+              <a:rPr sz="1200">
+                <a:solidFill>
+                  <a:srgbClr val="64748B"/>
+                </a:solidFill>
+                <a:latin typeface="Calibri"/>
+              </a:rPr>
+              <a:t>Ngữ văn 11 · Bài 1: Câu Chuyện Và Điểm Nhìn Trong Truyện Kể          31</a:t>
+            </a:r>
+          </a:p>
+        </p:txBody>
+      </p:sp>
+      <p:sp>
+        <p:nvSpPr>
+          <p:cNvPr id="7" name="TextBox 6"/>
+          <p:cNvSpPr txBox="1"/>
+          <p:nvPr/>
+        </p:nvSpPr>
+        <p:spPr>
+          <a:xfrm>
+            <a:off x="731520" y="1463040"/>
+            <a:ext cx="10789920" cy="3566160"/>
+          </a:xfrm>
+          <a:prstGeom prst="rect">
+            <a:avLst/>
+          </a:prstGeom>
+          <a:noFill/>
+        </p:spPr>
+        <p:txBody>
+          <a:bodyPr wrap="square" anchor="t" lIns="45720" rIns="45720">
             <a:spAutoFit/>
           </a:bodyPr>
           <a:lstStyle/>
@@ -14047,13 +14436,100 @@
               </a:spcAft>
             </a:pPr>
             <a:r>
-              <a:rPr sz="3600" b="1">
+              <a:rPr sz="2600" b="1">
+                <a:solidFill>
+                  <a:srgbClr val="1E293B"/>
+                </a:solidFill>
+                <a:latin typeface="Calibri"/>
+              </a:rPr>
+              <a:t>Nhận xét điểm nhìn, giọng điệu ở đoạn kết; ý nghĩa cái chết của Chí Phèo. So sánh đoạn kết Chí Phèo và Vợ nhặt.</a:t>
+            </a:r>
+          </a:p>
+        </p:txBody>
+      </p:sp>
+      <p:sp>
+        <p:nvSpPr>
+          <p:cNvPr id="8" name="Rounded Rectangle 7"/>
+          <p:cNvSpPr/>
+          <p:nvPr/>
+        </p:nvSpPr>
+        <p:spPr>
+          <a:xfrm>
+            <a:off x="731520" y="5120640"/>
+            <a:ext cx="10789920" cy="693420"/>
+          </a:xfrm>
+          <a:prstGeom prst="roundRect">
+            <a:avLst>
+              <a:gd name="adj" fmla="val 8000"/>
+            </a:avLst>
+          </a:prstGeom>
+          <a:solidFill>
+            <a:srgbClr val="EFF4FF"/>
+          </a:solidFill>
+          <a:ln w="19050">
+            <a:solidFill>
+              <a:srgbClr val="1E40AF"/>
+            </a:solidFill>
+          </a:ln>
+          <a:effectLst/>
+        </p:spPr>
+        <p:style>
+          <a:lnRef idx="1">
+            <a:schemeClr val="accent1"/>
+          </a:lnRef>
+          <a:fillRef idx="3">
+            <a:schemeClr val="accent1"/>
+          </a:fillRef>
+          <a:effectRef idx="2">
+            <a:schemeClr val="accent1"/>
+          </a:effectRef>
+          <a:fontRef idx="minor">
+            <a:schemeClr val="lt1"/>
+          </a:fontRef>
+        </p:style>
+        <p:txBody>
+          <a:bodyPr rtlCol="0" anchor="ctr"/>
+          <a:lstStyle/>
+          <a:p>
+            <a:pPr algn="ctr"/>
+          </a:p>
+        </p:txBody>
+      </p:sp>
+      <p:sp>
+        <p:nvSpPr>
+          <p:cNvPr id="9" name="TextBox 8"/>
+          <p:cNvSpPr txBox="1"/>
+          <p:nvPr/>
+        </p:nvSpPr>
+        <p:spPr>
+          <a:xfrm>
+            <a:off x="914400" y="5120640"/>
+            <a:ext cx="10424160" cy="693420"/>
+          </a:xfrm>
+          <a:prstGeom prst="rect">
+            <a:avLst/>
+          </a:prstGeom>
+          <a:noFill/>
+        </p:spPr>
+        <p:txBody>
+          <a:bodyPr wrap="square" anchor="ctr" lIns="45720" rIns="45720">
+            <a:spAutoFit/>
+          </a:bodyPr>
+          <a:lstStyle/>
+          <a:p>
+            <a:pPr algn="l">
+              <a:spcAft>
+                <a:spcPts val="400"/>
+              </a:spcAft>
+            </a:pPr>
+            <a:r>
+              <a:rPr sz="2200" b="1">
                 <a:solidFill>
                   <a:srgbClr val="1E40AF"/>
                 </a:solidFill>
                 <a:latin typeface="Calibri"/>
               </a:rPr>
-              <a:t>TIẾT 7: THỰC HÀNH TIẾNG VIỆT</a:t>
+              <a:t>💡 Hình ảnh cuối cùng của mỗi truyện là gì?</a:t>
             </a:r>
           </a:p>
         </p:txBody>
@@ -14136,14 +14612,14 @@
         </p:nvSpPr>
         <p:spPr>
           <a:xfrm>
-            <a:off x="10253167" y="457200"/>
-            <a:ext cx="1389888" cy="457200"/>
+            <a:off x="9942271" y="457200"/>
+            <a:ext cx="1700784" cy="457200"/>
           </a:xfrm>
           <a:prstGeom prst="roundRect">
             <a:avLst/>
           </a:prstGeom>
           <a:solidFill>
-            <a:srgbClr val="1E40AF"/>
+            <a:srgbClr val="991B1B"/>
           </a:solidFill>
           <a:ln>
             <a:noFill/>
@@ -14176,7 +14652,7 @@
                 </a:solidFill>
                 <a:latin typeface="Arial"/>
               </a:rPr>
-              <a:t>ĐỀ BÀI</a:t>
+              <a:t>LỜI GIẢI</a:t>
             </a:r>
           </a:p>
         </p:txBody>
@@ -14190,7 +14666,7 @@
         <p:spPr>
           <a:xfrm>
             <a:off x="731520" y="274320"/>
-            <a:ext cx="9582912" cy="868680"/>
+            <a:ext cx="9272016" cy="868680"/>
           </a:xfrm>
           <a:prstGeom prst="rect">
             <a:avLst/>
@@ -14210,7 +14686,7 @@
                 </a:solidFill>
                 <a:latin typeface="Arial"/>
               </a:rPr>
-              <a:t>NGÔN NGỮ NÓI ĐƯỢC TÁI TẠO</a:t>
+              <a:t>ĐOẠN KẾT – SO SÁNH VỚI VỢ NHẶT</a:t>
             </a:r>
           </a:p>
         </p:txBody>
@@ -14303,7 +14779,7 @@
         <p:spPr>
           <a:xfrm>
             <a:off x="731520" y="1463040"/>
-            <a:ext cx="10789920" cy="3566160"/>
+            <a:ext cx="10789920" cy="3474720"/>
           </a:xfrm>
           <a:prstGeom prst="rect">
             <a:avLst/>
@@ -14316,19 +14792,66 @@
           </a:bodyPr>
           <a:lstStyle/>
           <a:p>
-            <a:pPr algn="l">
+            <a:pPr algn="l" marL="365760" indent="-365760">
               <a:spcAft>
                 <a:spcPts val="800"/>
               </a:spcAft>
+              <a:buClr>
+                <a:srgbClr val="1E40AF"/>
+              </a:buClr>
+              <a:buFont typeface="Arial"/>
+              <a:buChar char="•"/>
             </a:pPr>
             <a:r>
-              <a:rPr sz="2600" b="1">
+              <a:rPr sz="2300">
                 <a:solidFill>
                   <a:srgbClr val="1E293B"/>
                 </a:solidFill>
                 <a:latin typeface="Calibri"/>
               </a:rPr>
-              <a:t>Phân tích đặc điểm ngôn ngữ nói được tái tạo trong lời Bá Kiến: “Cái anh này nói mới hay! Ai làm gì anh mà anh phải chết? Đời người chứ có phải con ngoé đâu?”</a:t>
+              <a:t>Chí Phèo: dân làng hả hê bàn tán; thị Nở nghĩ đến “cái lò gạch cũ bỏ không” → vòng luẩn quẩn.</a:t>
+            </a:r>
+          </a:p>
+          <a:p>
+            <a:pPr algn="l" marL="365760" indent="-365760">
+              <a:spcAft>
+                <a:spcPts val="800"/>
+              </a:spcAft>
+              <a:buClr>
+                <a:srgbClr val="1E40AF"/>
+              </a:buClr>
+              <a:buFont typeface="Arial"/>
+              <a:buChar char="•"/>
+            </a:pPr>
+            <a:r>
+              <a:rPr sz="2300">
+                <a:solidFill>
+                  <a:srgbClr val="1E293B"/>
+                </a:solidFill>
+                <a:latin typeface="Calibri"/>
+              </a:rPr>
+              <a:t>Vợ nhặt: lá cờ đỏ trong óc Tràng → niềm tin, lối thoát.</a:t>
+            </a:r>
+          </a:p>
+          <a:p>
+            <a:pPr algn="l" marL="365760" indent="-365760">
+              <a:spcAft>
+                <a:spcPts val="800"/>
+              </a:spcAft>
+              <a:buClr>
+                <a:srgbClr val="1E40AF"/>
+              </a:buClr>
+              <a:buFont typeface="Arial"/>
+              <a:buChar char="•"/>
+            </a:pPr>
+            <a:r>
+              <a:rPr sz="2300">
+                <a:solidFill>
+                  <a:srgbClr val="1E293B"/>
+                </a:solidFill>
+                <a:latin typeface="Calibri"/>
+              </a:rPr>
+              <a:t>Cái chết của Chí Phèo: tố cáo xã hội, khẳng định khát vọng lương thiện.</a:t>
             </a:r>
           </a:p>
         </p:txBody>
@@ -14341,8 +14864,8 @@
         </p:nvSpPr>
         <p:spPr>
           <a:xfrm>
-            <a:off x="731520" y="5120640"/>
-            <a:ext cx="10789920" cy="693420"/>
+            <a:off x="731520" y="5074920"/>
+            <a:ext cx="10789920" cy="731520"/>
           </a:xfrm>
           <a:prstGeom prst="roundRect">
             <a:avLst>
@@ -14350,11 +14873,11 @@
             </a:avLst>
           </a:prstGeom>
           <a:solidFill>
-            <a:srgbClr val="EFF4FF"/>
+            <a:srgbClr val="FEF2F2"/>
           </a:solidFill>
           <a:ln w="19050">
             <a:solidFill>
-              <a:srgbClr val="1E40AF"/>
+              <a:srgbClr val="991B1B"/>
             </a:solidFill>
           </a:ln>
           <a:effectLst/>
@@ -14389,8 +14912,8 @@
         </p:nvSpPr>
         <p:spPr>
           <a:xfrm>
-            <a:off x="914400" y="5120640"/>
-            <a:ext cx="10424160" cy="693420"/>
+            <a:off x="914400" y="5074920"/>
+            <a:ext cx="10424160" cy="731520"/>
           </a:xfrm>
           <a:prstGeom prst="rect">
             <a:avLst/>
@@ -14409,13 +14932,13 @@
               </a:spcAft>
             </a:pPr>
             <a:r>
-              <a:rPr sz="2200" b="1">
-                <a:solidFill>
-                  <a:srgbClr val="1E40AF"/>
+              <a:rPr sz="2400" b="1">
+                <a:solidFill>
+                  <a:srgbClr val="991B1B"/>
                 </a:solidFill>
                 <a:latin typeface="Calibri"/>
               </a:rPr>
-              <a:t>💡 Chú ý trợ từ, ngữ điệu, cách xưng hô.</a:t>
+              <a:t>Hai cách kết – hai tư tưởng nhân đạo.</a:t>
             </a:r>
           </a:p>
         </p:txBody>
@@ -14498,14 +15021,14 @@
         </p:nvSpPr>
         <p:spPr>
           <a:xfrm>
-            <a:off x="9942271" y="457200"/>
-            <a:ext cx="1700784" cy="457200"/>
+            <a:off x="10097719" y="457200"/>
+            <a:ext cx="1545336" cy="457200"/>
           </a:xfrm>
           <a:prstGeom prst="roundRect">
             <a:avLst/>
           </a:prstGeom>
           <a:solidFill>
-            <a:srgbClr val="991B1B"/>
+            <a:srgbClr val="166534"/>
           </a:solidFill>
           <a:ln>
             <a:noFill/>
@@ -14538,7 +15061,7 @@
                 </a:solidFill>
                 <a:latin typeface="Arial"/>
               </a:rPr>
-              <a:t>LỜI GIẢI</a:t>
+              <a:t>GHI NHỚ</a:t>
             </a:r>
           </a:p>
         </p:txBody>
@@ -14552,7 +15075,7 @@
         <p:spPr>
           <a:xfrm>
             <a:off x="731520" y="274320"/>
-            <a:ext cx="9272016" cy="868680"/>
+            <a:ext cx="9427464" cy="868680"/>
           </a:xfrm>
           <a:prstGeom prst="rect">
             <a:avLst/>
@@ -14572,7 +15095,7 @@
                 </a:solidFill>
                 <a:latin typeface="Arial"/>
               </a:rPr>
-              <a:t>NGÔN NGỮ NÓI ĐƯỢC TÁI TẠO</a:t>
+              <a:t>NGHỆ THUẬT KỂ CHUYỆN CỦA NAM CAO</a:t>
             </a:r>
           </a:p>
         </p:txBody>
@@ -14665,7 +15188,7 @@
         <p:spPr>
           <a:xfrm>
             <a:off x="731520" y="1463040"/>
-            <a:ext cx="10789920" cy="3474720"/>
+            <a:ext cx="10789920" cy="4754880"/>
           </a:xfrm>
           <a:prstGeom prst="rect">
             <a:avLst/>
@@ -14689,13 +15212,13 @@
               <a:buChar char="•"/>
             </a:pPr>
             <a:r>
-              <a:rPr sz="2300">
+              <a:rPr sz="2400">
                 <a:solidFill>
                   <a:srgbClr val="1E293B"/>
                 </a:solidFill>
                 <a:latin typeface="Calibri"/>
               </a:rPr>
-              <a:t>Khẩu ngữ, trợ từ “chứ”, “đâu”; câu hỏi tu từ.</a:t>
+              <a:t>Người kể chuyện ngôi thứ ba, vừa khách quan vừa cảm thông.</a:t>
             </a:r>
           </a:p>
           <a:p>
@@ -14710,13 +15233,13 @@
               <a:buChar char="•"/>
             </a:pPr>
             <a:r>
-              <a:rPr sz="2300">
+              <a:rPr sz="2400">
                 <a:solidFill>
                   <a:srgbClr val="1E293B"/>
                 </a:solidFill>
                 <a:latin typeface="Calibri"/>
               </a:rPr>
-              <a:t>Xưng hô thân mật – “anh”; ngữ điệu dịu giọng.</a:t>
+              <a:t>Phối hợp nhiều điểm nhìn; lời nửa trực tiếp.</a:t>
             </a:r>
           </a:p>
           <a:p>
@@ -14731,100 +15254,34 @@
               <a:buChar char="•"/>
             </a:pPr>
             <a:r>
-              <a:rPr sz="2300">
+              <a:rPr sz="2400">
                 <a:solidFill>
                   <a:srgbClr val="1E293B"/>
                 </a:solidFill>
                 <a:latin typeface="Calibri"/>
               </a:rPr>
-              <a:t>Mục đích: xoa dịu, khống chế Chí Phèo.</a:t>
-            </a:r>
-          </a:p>
-        </p:txBody>
-      </p:sp>
-      <p:sp>
-        <p:nvSpPr>
-          <p:cNvPr id="8" name="Rounded Rectangle 7"/>
-          <p:cNvSpPr/>
-          <p:nvPr/>
-        </p:nvSpPr>
-        <p:spPr>
-          <a:xfrm>
-            <a:off x="731520" y="5074920"/>
-            <a:ext cx="10789920" cy="731520"/>
-          </a:xfrm>
-          <a:prstGeom prst="roundRect">
-            <a:avLst>
-              <a:gd name="adj" fmla="val 8000"/>
-            </a:avLst>
-          </a:prstGeom>
-          <a:solidFill>
-            <a:srgbClr val="FEF2F2"/>
-          </a:solidFill>
-          <a:ln w="19050">
-            <a:solidFill>
-              <a:srgbClr val="991B1B"/>
-            </a:solidFill>
-          </a:ln>
-          <a:effectLst/>
-        </p:spPr>
-        <p:style>
-          <a:lnRef idx="1">
-            <a:schemeClr val="accent1"/>
-          </a:lnRef>
-          <a:fillRef idx="3">
-            <a:schemeClr val="accent1"/>
-          </a:fillRef>
-          <a:effectRef idx="2">
-            <a:schemeClr val="accent1"/>
-          </a:effectRef>
-          <a:fontRef idx="minor">
-            <a:schemeClr val="lt1"/>
-          </a:fontRef>
-        </p:style>
-        <p:txBody>
-          <a:bodyPr rtlCol="0" anchor="ctr"/>
-          <a:lstStyle/>
-          <a:p>
-            <a:pPr algn="ctr"/>
-          </a:p>
-        </p:txBody>
-      </p:sp>
-      <p:sp>
-        <p:nvSpPr>
-          <p:cNvPr id="9" name="TextBox 8"/>
-          <p:cNvSpPr txBox="1"/>
-          <p:nvPr/>
-        </p:nvSpPr>
-        <p:spPr>
-          <a:xfrm>
-            <a:off x="914400" y="5074920"/>
-            <a:ext cx="10424160" cy="731520"/>
-          </a:xfrm>
-          <a:prstGeom prst="rect">
-            <a:avLst/>
-          </a:prstGeom>
-          <a:noFill/>
-        </p:spPr>
-        <p:txBody>
-          <a:bodyPr wrap="square" anchor="ctr" lIns="45720" rIns="45720">
-            <a:spAutoFit/>
-          </a:bodyPr>
-          <a:lstStyle/>
-          <a:p>
-            <a:pPr algn="l">
+              <a:t>Kết cấu phá vỡ trình tự thời gian.</a:t>
+            </a:r>
+          </a:p>
+          <a:p>
+            <a:pPr algn="l" marL="365760" indent="-365760">
               <a:spcAft>
-                <a:spcPts val="400"/>
+                <a:spcPts val="800"/>
               </a:spcAft>
+              <a:buClr>
+                <a:srgbClr val="1E40AF"/>
+              </a:buClr>
+              <a:buFont typeface="Arial"/>
+              <a:buChar char="•"/>
             </a:pPr>
             <a:r>
-              <a:rPr sz="2400" b="1">
-                <a:solidFill>
-                  <a:srgbClr val="991B1B"/>
+              <a:rPr sz="2400">
+                <a:solidFill>
+                  <a:srgbClr val="1E293B"/>
                 </a:solidFill>
                 <a:latin typeface="Calibri"/>
               </a:rPr>
-              <a:t>Ngữ điệu là phương tiện quan trọng của ngôn ngữ nói.</a:t>
+              <a:t>Ngôn ngữ sinh động, gần đời thường.</a:t>
             </a:r>
           </a:p>
         </p:txBody>
@@ -14843,7 +15300,7 @@
     <p:bg>
       <p:bgPr>
         <a:solidFill>
-          <a:srgbClr val="FFFFFF"/>
+          <a:srgbClr val="F8F9FA"/>
         </a:solidFill>
         <a:effectLst/>
       </p:bgPr>
@@ -14863,14 +15320,14 @@
         </p:nvSpPr>
         <p:spPr>
           <a:xfrm>
-            <a:off x="457200" y="384048"/>
-            <a:ext cx="109728" cy="658368"/>
+            <a:off x="548640" y="2926080"/>
+            <a:ext cx="164592" cy="1005840"/>
           </a:xfrm>
           <a:prstGeom prst="rect">
             <a:avLst/>
           </a:prstGeom>
           <a:solidFill>
-            <a:srgbClr val="1E40AF"/>
+            <a:srgbClr val="991B1B"/>
           </a:solidFill>
           <a:ln>
             <a:noFill/>
@@ -14901,67 +15358,14 @@
       </p:sp>
       <p:sp>
         <p:nvSpPr>
-          <p:cNvPr id="3" name="Rounded Rectangle 2"/>
-          <p:cNvSpPr/>
-          <p:nvPr/>
-        </p:nvSpPr>
-        <p:spPr>
-          <a:xfrm>
-            <a:off x="10253167" y="457200"/>
-            <a:ext cx="1389888" cy="457200"/>
-          </a:xfrm>
-          <a:prstGeom prst="roundRect">
-            <a:avLst/>
-          </a:prstGeom>
-          <a:solidFill>
-            <a:srgbClr val="1E40AF"/>
-          </a:solidFill>
-          <a:ln>
-            <a:noFill/>
-          </a:ln>
-          <a:effectLst/>
-        </p:spPr>
-        <p:style>
-          <a:lnRef idx="1">
-            <a:schemeClr val="accent1"/>
-          </a:lnRef>
-          <a:fillRef idx="3">
-            <a:schemeClr val="accent1"/>
-          </a:fillRef>
-          <a:effectRef idx="2">
-            <a:schemeClr val="accent1"/>
-          </a:effectRef>
-          <a:fontRef idx="minor">
-            <a:schemeClr val="lt1"/>
-          </a:fontRef>
-        </p:style>
-        <p:txBody>
-          <a:bodyPr rtlCol="0" anchor="ctr" wrap="none" tIns="0" bIns="0"/>
-          <a:lstStyle/>
-          <a:p>
-            <a:pPr algn="ctr"/>
-            <a:r>
-              <a:rPr sz="1400" b="1">
-                <a:solidFill>
-                  <a:srgbClr val="FFFFFF"/>
-                </a:solidFill>
-                <a:latin typeface="Arial"/>
-              </a:rPr>
-              <a:t>ĐỀ BÀI</a:t>
-            </a:r>
-          </a:p>
-        </p:txBody>
-      </p:sp>
-      <p:sp>
-        <p:nvSpPr>
-          <p:cNvPr id="4" name="TextBox 3"/>
+          <p:cNvPr id="3" name="TextBox 2"/>
           <p:cNvSpPr txBox="1"/>
           <p:nvPr/>
         </p:nvSpPr>
         <p:spPr>
           <a:xfrm>
-            <a:off x="731520" y="274320"/>
-            <a:ext cx="9582912" cy="868680"/>
+            <a:off x="914400" y="2743200"/>
+            <a:ext cx="10515600" cy="1371600"/>
           </a:xfrm>
           <a:prstGeom prst="rect">
             <a:avLst/>
@@ -14969,120 +15373,7 @@
           <a:noFill/>
         </p:spPr>
         <p:txBody>
-          <a:bodyPr wrap="square" anchor="ctr">
-            <a:spAutoFit/>
-          </a:bodyPr>
-          <a:lstStyle/>
-          <a:p>
-            <a:r>
-              <a:rPr sz="3600" b="1">
-                <a:solidFill>
-                  <a:srgbClr val="1E40AF"/>
-                </a:solidFill>
-                <a:latin typeface="Arial"/>
-              </a:rPr>
-              <a:t>ĐẶC ĐIỂM NGÔN NGỮ VIẾT</a:t>
-            </a:r>
-          </a:p>
-        </p:txBody>
-      </p:sp>
-      <p:sp>
-        <p:nvSpPr>
-          <p:cNvPr id="5" name="Rectangle 4"/>
-          <p:cNvSpPr/>
-          <p:nvPr/>
-        </p:nvSpPr>
-        <p:spPr>
-          <a:xfrm>
-            <a:off x="457200" y="1207008"/>
-            <a:ext cx="11274552" cy="22000"/>
-          </a:xfrm>
-          <a:prstGeom prst="rect">
-            <a:avLst/>
-          </a:prstGeom>
-          <a:solidFill>
-            <a:srgbClr val="E2E8F0"/>
-          </a:solidFill>
-          <a:ln>
-            <a:noFill/>
-          </a:ln>
-          <a:effectLst/>
-        </p:spPr>
-        <p:style>
-          <a:lnRef idx="1">
-            <a:schemeClr val="accent1"/>
-          </a:lnRef>
-          <a:fillRef idx="3">
-            <a:schemeClr val="accent1"/>
-          </a:fillRef>
-          <a:effectRef idx="2">
-            <a:schemeClr val="accent1"/>
-          </a:effectRef>
-          <a:fontRef idx="minor">
-            <a:schemeClr val="lt1"/>
-          </a:fontRef>
-        </p:style>
-        <p:txBody>
-          <a:bodyPr rtlCol="0" anchor="ctr"/>
-          <a:lstStyle/>
-          <a:p>
-            <a:pPr algn="ctr"/>
-          </a:p>
-        </p:txBody>
-      </p:sp>
-      <p:sp>
-        <p:nvSpPr>
-          <p:cNvPr id="6" name="TextBox 5"/>
-          <p:cNvSpPr txBox="1"/>
-          <p:nvPr/>
-        </p:nvSpPr>
-        <p:spPr>
-          <a:xfrm>
-            <a:off x="457200" y="6355080"/>
-            <a:ext cx="11274552" cy="365760"/>
-          </a:xfrm>
-          <a:prstGeom prst="rect">
-            <a:avLst/>
-          </a:prstGeom>
-          <a:noFill/>
-        </p:spPr>
-        <p:txBody>
-          <a:bodyPr wrap="none">
-            <a:spAutoFit/>
-          </a:bodyPr>
-          <a:lstStyle/>
-          <a:p>
-            <a:pPr algn="r"/>
-            <a:r>
-              <a:rPr sz="1200">
-                <a:solidFill>
-                  <a:srgbClr val="64748B"/>
-                </a:solidFill>
-                <a:latin typeface="Calibri"/>
-              </a:rPr>
-              <a:t>Ngữ văn 11 · Bài 1: Câu Chuyện Và Điểm Nhìn Trong Truyện Kể          34</a:t>
-            </a:r>
-          </a:p>
-        </p:txBody>
-      </p:sp>
-      <p:sp>
-        <p:nvSpPr>
-          <p:cNvPr id="7" name="TextBox 6"/>
-          <p:cNvSpPr txBox="1"/>
-          <p:nvPr/>
-        </p:nvSpPr>
-        <p:spPr>
-          <a:xfrm>
-            <a:off x="731520" y="1463040"/>
-            <a:ext cx="10789920" cy="3566160"/>
-          </a:xfrm>
-          <a:prstGeom prst="rect">
-            <a:avLst/>
-          </a:prstGeom>
-          <a:noFill/>
-        </p:spPr>
-        <p:txBody>
-          <a:bodyPr wrap="square" anchor="t" lIns="45720" rIns="45720">
+          <a:bodyPr wrap="square" anchor="ctr" lIns="45720" rIns="45720">
             <a:spAutoFit/>
           </a:bodyPr>
           <a:lstStyle/>
@@ -15093,100 +15384,13 @@
               </a:spcAft>
             </a:pPr>
             <a:r>
-              <a:rPr sz="2600" b="1">
-                <a:solidFill>
-                  <a:srgbClr val="1E293B"/>
+              <a:rPr sz="3600" b="1">
+                <a:solidFill>
+                  <a:srgbClr val="1E40AF"/>
                 </a:solidFill>
                 <a:latin typeface="Calibri"/>
               </a:rPr>
-              <a:t>Phân tích đặc điểm ngôn ngữ viết trong đoạn: “Cái đói đã tràn đến xóm này tự lúc nào…” (Vợ nhặt).</a:t>
-            </a:r>
-          </a:p>
-        </p:txBody>
-      </p:sp>
-      <p:sp>
-        <p:nvSpPr>
-          <p:cNvPr id="8" name="Rounded Rectangle 7"/>
-          <p:cNvSpPr/>
-          <p:nvPr/>
-        </p:nvSpPr>
-        <p:spPr>
-          <a:xfrm>
-            <a:off x="731520" y="5120640"/>
-            <a:ext cx="10789920" cy="693420"/>
-          </a:xfrm>
-          <a:prstGeom prst="roundRect">
-            <a:avLst>
-              <a:gd name="adj" fmla="val 8000"/>
-            </a:avLst>
-          </a:prstGeom>
-          <a:solidFill>
-            <a:srgbClr val="EFF4FF"/>
-          </a:solidFill>
-          <a:ln w="19050">
-            <a:solidFill>
-              <a:srgbClr val="1E40AF"/>
-            </a:solidFill>
-          </a:ln>
-          <a:effectLst/>
-        </p:spPr>
-        <p:style>
-          <a:lnRef idx="1">
-            <a:schemeClr val="accent1"/>
-          </a:lnRef>
-          <a:fillRef idx="3">
-            <a:schemeClr val="accent1"/>
-          </a:fillRef>
-          <a:effectRef idx="2">
-            <a:schemeClr val="accent1"/>
-          </a:effectRef>
-          <a:fontRef idx="minor">
-            <a:schemeClr val="lt1"/>
-          </a:fontRef>
-        </p:style>
-        <p:txBody>
-          <a:bodyPr rtlCol="0" anchor="ctr"/>
-          <a:lstStyle/>
-          <a:p>
-            <a:pPr algn="ctr"/>
-          </a:p>
-        </p:txBody>
-      </p:sp>
-      <p:sp>
-        <p:nvSpPr>
-          <p:cNvPr id="9" name="TextBox 8"/>
-          <p:cNvSpPr txBox="1"/>
-          <p:nvPr/>
-        </p:nvSpPr>
-        <p:spPr>
-          <a:xfrm>
-            <a:off x="914400" y="5120640"/>
-            <a:ext cx="10424160" cy="693420"/>
-          </a:xfrm>
-          <a:prstGeom prst="rect">
-            <a:avLst/>
-          </a:prstGeom>
-          <a:noFill/>
-        </p:spPr>
-        <p:txBody>
-          <a:bodyPr wrap="square" anchor="ctr" lIns="45720" rIns="45720">
-            <a:spAutoFit/>
-          </a:bodyPr>
-          <a:lstStyle/>
-          <a:p>
-            <a:pPr algn="l">
-              <a:spcAft>
-                <a:spcPts val="400"/>
-              </a:spcAft>
-            </a:pPr>
-            <a:r>
-              <a:rPr sz="2200" b="1">
-                <a:solidFill>
-                  <a:srgbClr val="1E40AF"/>
-                </a:solidFill>
-                <a:latin typeface="Calibri"/>
-              </a:rPr>
-              <a:t>💡 Câu văn, từ ngữ, phép tu từ có gì đặc biệt?</a:t>
+              <a:t>TIẾT 7: THỰC HÀNH TIẾNG VIỆT</a:t>
             </a:r>
           </a:p>
         </p:txBody>
@@ -15269,14 +15473,14 @@
         </p:nvSpPr>
         <p:spPr>
           <a:xfrm>
-            <a:off x="9942271" y="457200"/>
-            <a:ext cx="1700784" cy="457200"/>
+            <a:off x="10253167" y="457200"/>
+            <a:ext cx="1389888" cy="457200"/>
           </a:xfrm>
           <a:prstGeom prst="roundRect">
             <a:avLst/>
           </a:prstGeom>
           <a:solidFill>
-            <a:srgbClr val="991B1B"/>
+            <a:srgbClr val="1E40AF"/>
           </a:solidFill>
           <a:ln>
             <a:noFill/>
@@ -15309,7 +15513,7 @@
                 </a:solidFill>
                 <a:latin typeface="Arial"/>
               </a:rPr>
-              <a:t>LỜI GIẢI</a:t>
+              <a:t>ĐỀ BÀI</a:t>
             </a:r>
           </a:p>
         </p:txBody>
@@ -15323,7 +15527,7 @@
         <p:spPr>
           <a:xfrm>
             <a:off x="731520" y="274320"/>
-            <a:ext cx="9272016" cy="868680"/>
+            <a:ext cx="9582912" cy="868680"/>
           </a:xfrm>
           <a:prstGeom prst="rect">
             <a:avLst/>
@@ -15343,7 +15547,7 @@
                 </a:solidFill>
                 <a:latin typeface="Arial"/>
               </a:rPr>
-              <a:t>ĐẶC ĐIỂM NGÔN NGỮ VIẾT</a:t>
+              <a:t>NGÔN NGỮ NÓI ĐƯỢC TÁI TẠO</a:t>
             </a:r>
           </a:p>
         </p:txBody>
@@ -15436,7 +15640,7 @@
         <p:spPr>
           <a:xfrm>
             <a:off x="731520" y="1463040"/>
-            <a:ext cx="10789920" cy="3474720"/>
+            <a:ext cx="10789920" cy="3566160"/>
           </a:xfrm>
           <a:prstGeom prst="rect">
             <a:avLst/>
@@ -15449,66 +15653,19 @@
           </a:bodyPr>
           <a:lstStyle/>
           <a:p>
-            <a:pPr algn="l" marL="365760" indent="-365760">
+            <a:pPr algn="l">
               <a:spcAft>
                 <a:spcPts val="800"/>
               </a:spcAft>
-              <a:buClr>
-                <a:srgbClr val="1E40AF"/>
-              </a:buClr>
-              <a:buFont typeface="Arial"/>
-              <a:buChar char="•"/>
             </a:pPr>
             <a:r>
-              <a:rPr sz="2300">
+              <a:rPr sz="2600" b="1">
                 <a:solidFill>
                   <a:srgbClr val="1E293B"/>
                 </a:solidFill>
                 <a:latin typeface="Calibri"/>
               </a:rPr>
-              <a:t>Câu dài, nhiều thành phần.</a:t>
-            </a:r>
-          </a:p>
-          <a:p>
-            <a:pPr algn="l" marL="365760" indent="-365760">
-              <a:spcAft>
-                <a:spcPts val="800"/>
-              </a:spcAft>
-              <a:buClr>
-                <a:srgbClr val="1E40AF"/>
-              </a:buClr>
-              <a:buFont typeface="Arial"/>
-              <a:buChar char="•"/>
-            </a:pPr>
-            <a:r>
-              <a:rPr sz="2300">
-                <a:solidFill>
-                  <a:srgbClr val="1E293B"/>
-                </a:solidFill>
-                <a:latin typeface="Calibri"/>
-              </a:rPr>
-              <a:t>Từ ngữ chọn lọc, giàu hình ảnh: “xanh xám như những bóng ma”.</a:t>
-            </a:r>
-          </a:p>
-          <a:p>
-            <a:pPr algn="l" marL="365760" indent="-365760">
-              <a:spcAft>
-                <a:spcPts val="800"/>
-              </a:spcAft>
-              <a:buClr>
-                <a:srgbClr val="1E40AF"/>
-              </a:buClr>
-              <a:buFont typeface="Arial"/>
-              <a:buChar char="•"/>
-            </a:pPr>
-            <a:r>
-              <a:rPr sz="2300">
-                <a:solidFill>
-                  <a:srgbClr val="1E293B"/>
-                </a:solidFill>
-                <a:latin typeface="Calibri"/>
-              </a:rPr>
-              <a:t>Trình tự miêu tả mạch lạc, đúng chuẩn.</a:t>
+              <a:t>Phân tích đặc điểm ngôn ngữ nói được tái tạo trong lời Bá Kiến: “Cái anh này nói mới hay! Ai làm gì anh mà anh phải chết? Đời người chứ có phải con ngoé đâu?”</a:t>
             </a:r>
           </a:p>
         </p:txBody>
@@ -15521,8 +15678,8 @@
         </p:nvSpPr>
         <p:spPr>
           <a:xfrm>
-            <a:off x="731520" y="5074920"/>
-            <a:ext cx="10789920" cy="731520"/>
+            <a:off x="731520" y="5120640"/>
+            <a:ext cx="10789920" cy="693420"/>
           </a:xfrm>
           <a:prstGeom prst="roundRect">
             <a:avLst>
@@ -15530,11 +15687,11 @@
             </a:avLst>
           </a:prstGeom>
           <a:solidFill>
-            <a:srgbClr val="FEF2F2"/>
+            <a:srgbClr val="EFF4FF"/>
           </a:solidFill>
           <a:ln w="19050">
             <a:solidFill>
-              <a:srgbClr val="991B1B"/>
+              <a:srgbClr val="1E40AF"/>
             </a:solidFill>
           </a:ln>
           <a:effectLst/>
@@ -15569,8 +15726,8 @@
         </p:nvSpPr>
         <p:spPr>
           <a:xfrm>
-            <a:off x="914400" y="5074920"/>
-            <a:ext cx="10424160" cy="731520"/>
+            <a:off x="914400" y="5120640"/>
+            <a:ext cx="10424160" cy="693420"/>
           </a:xfrm>
           <a:prstGeom prst="rect">
             <a:avLst/>
@@ -15589,13 +15746,13 @@
               </a:spcAft>
             </a:pPr>
             <a:r>
-              <a:rPr sz="2400" b="1">
-                <a:solidFill>
-                  <a:srgbClr val="991B1B"/>
+              <a:rPr sz="2200" b="1">
+                <a:solidFill>
+                  <a:srgbClr val="1E40AF"/>
                 </a:solidFill>
                 <a:latin typeface="Calibri"/>
               </a:rPr>
-              <a:t>Ngôn ngữ viết được gọt giũa, lưu trữ lâu dài.</a:t>
+              <a:t>💡 Chú ý trợ từ, ngữ điệu, cách xưng hô.</a:t>
             </a:r>
           </a:p>
         </p:txBody>
@@ -15614,7 +15771,7 @@
     <p:bg>
       <p:bgPr>
         <a:solidFill>
-          <a:srgbClr val="F8F9FA"/>
+          <a:srgbClr val="FFFFFF"/>
         </a:solidFill>
         <a:effectLst/>
       </p:bgPr>
@@ -15634,10 +15791,54 @@
         </p:nvSpPr>
         <p:spPr>
           <a:xfrm>
-            <a:off x="548640" y="2926080"/>
-            <a:ext cx="164592" cy="1005840"/>
-          </a:xfrm>
-          <a:prstGeom prst="rect">
+            <a:off x="457200" y="384048"/>
+            <a:ext cx="109728" cy="658368"/>
+          </a:xfrm>
+          <a:prstGeom prst="rect">
+            <a:avLst/>
+          </a:prstGeom>
+          <a:solidFill>
+            <a:srgbClr val="1E40AF"/>
+          </a:solidFill>
+          <a:ln>
+            <a:noFill/>
+          </a:ln>
+          <a:effectLst/>
+        </p:spPr>
+        <p:style>
+          <a:lnRef idx="1">
+            <a:schemeClr val="accent1"/>
+          </a:lnRef>
+          <a:fillRef idx="3">
+            <a:schemeClr val="accent1"/>
+          </a:fillRef>
+          <a:effectRef idx="2">
+            <a:schemeClr val="accent1"/>
+          </a:effectRef>
+          <a:fontRef idx="minor">
+            <a:schemeClr val="lt1"/>
+          </a:fontRef>
+        </p:style>
+        <p:txBody>
+          <a:bodyPr rtlCol="0" anchor="ctr"/>
+          <a:lstStyle/>
+          <a:p>
+            <a:pPr algn="ctr"/>
+          </a:p>
+        </p:txBody>
+      </p:sp>
+      <p:sp>
+        <p:nvSpPr>
+          <p:cNvPr id="3" name="Rounded Rectangle 2"/>
+          <p:cNvSpPr/>
+          <p:nvPr/>
+        </p:nvSpPr>
+        <p:spPr>
+          <a:xfrm>
+            <a:off x="9942271" y="457200"/>
+            <a:ext cx="1700784" cy="457200"/>
+          </a:xfrm>
+          <a:prstGeom prst="roundRect">
             <a:avLst/>
           </a:prstGeom>
           <a:solidFill>
@@ -15663,6 +15864,93 @@
           </a:fontRef>
         </p:style>
         <p:txBody>
+          <a:bodyPr rtlCol="0" anchor="ctr" wrap="none" tIns="0" bIns="0"/>
+          <a:lstStyle/>
+          <a:p>
+            <a:pPr algn="ctr"/>
+            <a:r>
+              <a:rPr sz="1400" b="1">
+                <a:solidFill>
+                  <a:srgbClr val="FFFFFF"/>
+                </a:solidFill>
+                <a:latin typeface="Arial"/>
+              </a:rPr>
+              <a:t>LỜI GIẢI</a:t>
+            </a:r>
+          </a:p>
+        </p:txBody>
+      </p:sp>
+      <p:sp>
+        <p:nvSpPr>
+          <p:cNvPr id="4" name="TextBox 3"/>
+          <p:cNvSpPr txBox="1"/>
+          <p:nvPr/>
+        </p:nvSpPr>
+        <p:spPr>
+          <a:xfrm>
+            <a:off x="731520" y="274320"/>
+            <a:ext cx="9272016" cy="868680"/>
+          </a:xfrm>
+          <a:prstGeom prst="rect">
+            <a:avLst/>
+          </a:prstGeom>
+          <a:noFill/>
+        </p:spPr>
+        <p:txBody>
+          <a:bodyPr wrap="square" anchor="ctr">
+            <a:spAutoFit/>
+          </a:bodyPr>
+          <a:lstStyle/>
+          <a:p>
+            <a:r>
+              <a:rPr sz="3600" b="1">
+                <a:solidFill>
+                  <a:srgbClr val="1E40AF"/>
+                </a:solidFill>
+                <a:latin typeface="Arial"/>
+              </a:rPr>
+              <a:t>NGÔN NGỮ NÓI ĐƯỢC TÁI TẠO</a:t>
+            </a:r>
+          </a:p>
+        </p:txBody>
+      </p:sp>
+      <p:sp>
+        <p:nvSpPr>
+          <p:cNvPr id="5" name="Rectangle 4"/>
+          <p:cNvSpPr/>
+          <p:nvPr/>
+        </p:nvSpPr>
+        <p:spPr>
+          <a:xfrm>
+            <a:off x="457200" y="1207008"/>
+            <a:ext cx="11274552" cy="22000"/>
+          </a:xfrm>
+          <a:prstGeom prst="rect">
+            <a:avLst/>
+          </a:prstGeom>
+          <a:solidFill>
+            <a:srgbClr val="E2E8F0"/>
+          </a:solidFill>
+          <a:ln>
+            <a:noFill/>
+          </a:ln>
+          <a:effectLst/>
+        </p:spPr>
+        <p:style>
+          <a:lnRef idx="1">
+            <a:schemeClr val="accent1"/>
+          </a:lnRef>
+          <a:fillRef idx="3">
+            <a:schemeClr val="accent1"/>
+          </a:fillRef>
+          <a:effectRef idx="2">
+            <a:schemeClr val="accent1"/>
+          </a:effectRef>
+          <a:fontRef idx="minor">
+            <a:schemeClr val="lt1"/>
+          </a:fontRef>
+        </p:style>
+        <p:txBody>
           <a:bodyPr rtlCol="0" anchor="ctr"/>
           <a:lstStyle/>
           <a:p>
@@ -15672,14 +15960,183 @@
       </p:sp>
       <p:sp>
         <p:nvSpPr>
-          <p:cNvPr id="3" name="TextBox 2"/>
+          <p:cNvPr id="6" name="TextBox 5"/>
           <p:cNvSpPr txBox="1"/>
           <p:nvPr/>
         </p:nvSpPr>
         <p:spPr>
           <a:xfrm>
-            <a:off x="914400" y="2743200"/>
-            <a:ext cx="10515600" cy="1371600"/>
+            <a:off x="457200" y="6355080"/>
+            <a:ext cx="11274552" cy="365760"/>
+          </a:xfrm>
+          <a:prstGeom prst="rect">
+            <a:avLst/>
+          </a:prstGeom>
+          <a:noFill/>
+        </p:spPr>
+        <p:txBody>
+          <a:bodyPr wrap="none">
+            <a:spAutoFit/>
+          </a:bodyPr>
+          <a:lstStyle/>
+          <a:p>
+            <a:pPr algn="r"/>
+            <a:r>
+              <a:rPr sz="1200">
+                <a:solidFill>
+                  <a:srgbClr val="64748B"/>
+                </a:solidFill>
+                <a:latin typeface="Calibri"/>
+              </a:rPr>
+              <a:t>Ngữ văn 11 · Bài 1: Câu Chuyện Và Điểm Nhìn Trong Truyện Kể          36</a:t>
+            </a:r>
+          </a:p>
+        </p:txBody>
+      </p:sp>
+      <p:sp>
+        <p:nvSpPr>
+          <p:cNvPr id="7" name="TextBox 6"/>
+          <p:cNvSpPr txBox="1"/>
+          <p:nvPr/>
+        </p:nvSpPr>
+        <p:spPr>
+          <a:xfrm>
+            <a:off x="731520" y="1463040"/>
+            <a:ext cx="10789920" cy="3474720"/>
+          </a:xfrm>
+          <a:prstGeom prst="rect">
+            <a:avLst/>
+          </a:prstGeom>
+          <a:noFill/>
+        </p:spPr>
+        <p:txBody>
+          <a:bodyPr wrap="square" anchor="t" lIns="45720" rIns="45720">
+            <a:spAutoFit/>
+          </a:bodyPr>
+          <a:lstStyle/>
+          <a:p>
+            <a:pPr algn="l" marL="365760" indent="-365760">
+              <a:spcAft>
+                <a:spcPts val="800"/>
+              </a:spcAft>
+              <a:buClr>
+                <a:srgbClr val="1E40AF"/>
+              </a:buClr>
+              <a:buFont typeface="Arial"/>
+              <a:buChar char="•"/>
+            </a:pPr>
+            <a:r>
+              <a:rPr sz="2300">
+                <a:solidFill>
+                  <a:srgbClr val="1E293B"/>
+                </a:solidFill>
+                <a:latin typeface="Calibri"/>
+              </a:rPr>
+              <a:t>Khẩu ngữ, trợ từ “chứ”, “đâu”; câu hỏi tu từ.</a:t>
+            </a:r>
+          </a:p>
+          <a:p>
+            <a:pPr algn="l" marL="365760" indent="-365760">
+              <a:spcAft>
+                <a:spcPts val="800"/>
+              </a:spcAft>
+              <a:buClr>
+                <a:srgbClr val="1E40AF"/>
+              </a:buClr>
+              <a:buFont typeface="Arial"/>
+              <a:buChar char="•"/>
+            </a:pPr>
+            <a:r>
+              <a:rPr sz="2300">
+                <a:solidFill>
+                  <a:srgbClr val="1E293B"/>
+                </a:solidFill>
+                <a:latin typeface="Calibri"/>
+              </a:rPr>
+              <a:t>Xưng hô thân mật – “anh”; ngữ điệu dịu giọng.</a:t>
+            </a:r>
+          </a:p>
+          <a:p>
+            <a:pPr algn="l" marL="365760" indent="-365760">
+              <a:spcAft>
+                <a:spcPts val="800"/>
+              </a:spcAft>
+              <a:buClr>
+                <a:srgbClr val="1E40AF"/>
+              </a:buClr>
+              <a:buFont typeface="Arial"/>
+              <a:buChar char="•"/>
+            </a:pPr>
+            <a:r>
+              <a:rPr sz="2300">
+                <a:solidFill>
+                  <a:srgbClr val="1E293B"/>
+                </a:solidFill>
+                <a:latin typeface="Calibri"/>
+              </a:rPr>
+              <a:t>Mục đích: xoa dịu, khống chế Chí Phèo.</a:t>
+            </a:r>
+          </a:p>
+        </p:txBody>
+      </p:sp>
+      <p:sp>
+        <p:nvSpPr>
+          <p:cNvPr id="8" name="Rounded Rectangle 7"/>
+          <p:cNvSpPr/>
+          <p:nvPr/>
+        </p:nvSpPr>
+        <p:spPr>
+          <a:xfrm>
+            <a:off x="731520" y="5074920"/>
+            <a:ext cx="10789920" cy="731520"/>
+          </a:xfrm>
+          <a:prstGeom prst="roundRect">
+            <a:avLst>
+              <a:gd name="adj" fmla="val 8000"/>
+            </a:avLst>
+          </a:prstGeom>
+          <a:solidFill>
+            <a:srgbClr val="FEF2F2"/>
+          </a:solidFill>
+          <a:ln w="19050">
+            <a:solidFill>
+              <a:srgbClr val="991B1B"/>
+            </a:solidFill>
+          </a:ln>
+          <a:effectLst/>
+        </p:spPr>
+        <p:style>
+          <a:lnRef idx="1">
+            <a:schemeClr val="accent1"/>
+          </a:lnRef>
+          <a:fillRef idx="3">
+            <a:schemeClr val="accent1"/>
+          </a:fillRef>
+          <a:effectRef idx="2">
+            <a:schemeClr val="accent1"/>
+          </a:effectRef>
+          <a:fontRef idx="minor">
+            <a:schemeClr val="lt1"/>
+          </a:fontRef>
+        </p:style>
+        <p:txBody>
+          <a:bodyPr rtlCol="0" anchor="ctr"/>
+          <a:lstStyle/>
+          <a:p>
+            <a:pPr algn="ctr"/>
+          </a:p>
+        </p:txBody>
+      </p:sp>
+      <p:sp>
+        <p:nvSpPr>
+          <p:cNvPr id="9" name="TextBox 8"/>
+          <p:cNvSpPr txBox="1"/>
+          <p:nvPr/>
+        </p:nvSpPr>
+        <p:spPr>
+          <a:xfrm>
+            <a:off x="914400" y="5074920"/>
+            <a:ext cx="10424160" cy="731520"/>
           </a:xfrm>
           <a:prstGeom prst="rect">
             <a:avLst/>
@@ -15694,17 +16151,17 @@
           <a:p>
             <a:pPr algn="l">
               <a:spcAft>
-                <a:spcPts val="800"/>
+                <a:spcPts val="400"/>
               </a:spcAft>
             </a:pPr>
             <a:r>
-              <a:rPr sz="3600" b="1">
-                <a:solidFill>
-                  <a:srgbClr val="1E40AF"/>
+              <a:rPr sz="2400" b="1">
+                <a:solidFill>
+                  <a:srgbClr val="991B1B"/>
                 </a:solidFill>
                 <a:latin typeface="Calibri"/>
               </a:rPr>
-              <a:t>TIẾT 8 – 11: VIẾT – NÓI VÀ NGHE</a:t>
+              <a:t>Ngữ điệu là phương tiện quan trọng của ngôn ngữ nói.</a:t>
             </a:r>
           </a:p>
         </p:txBody>
@@ -15787,14 +16244,14 @@
         </p:nvSpPr>
         <p:spPr>
           <a:xfrm>
-            <a:off x="10097719" y="457200"/>
-            <a:ext cx="1545336" cy="457200"/>
+            <a:off x="10253167" y="457200"/>
+            <a:ext cx="1389888" cy="457200"/>
           </a:xfrm>
           <a:prstGeom prst="roundRect">
             <a:avLst/>
           </a:prstGeom>
           <a:solidFill>
-            <a:srgbClr val="166534"/>
+            <a:srgbClr val="1E40AF"/>
           </a:solidFill>
           <a:ln>
             <a:noFill/>
@@ -15827,7 +16284,7 @@
                 </a:solidFill>
                 <a:latin typeface="Arial"/>
               </a:rPr>
-              <a:t>GHI NHỚ</a:t>
+              <a:t>ĐỀ BÀI</a:t>
             </a:r>
           </a:p>
         </p:txBody>
@@ -15841,7 +16298,7 @@
         <p:spPr>
           <a:xfrm>
             <a:off x="731520" y="274320"/>
-            <a:ext cx="9427464" cy="868680"/>
+            <a:ext cx="9582912" cy="868680"/>
           </a:xfrm>
           <a:prstGeom prst="rect">
             <a:avLst/>
@@ -15861,7 +16318,7 @@
                 </a:solidFill>
                 <a:latin typeface="Arial"/>
               </a:rPr>
-              <a:t>YÊU CẦU BÀI VIẾT</a:t>
+              <a:t>ĐẶC ĐIỂM NGÔN NGỮ VIẾT</a:t>
             </a:r>
           </a:p>
         </p:txBody>
@@ -15954,7 +16411,7 @@
         <p:spPr>
           <a:xfrm>
             <a:off x="731520" y="1463040"/>
-            <a:ext cx="10789920" cy="4754880"/>
+            <a:ext cx="10789920" cy="3566160"/>
           </a:xfrm>
           <a:prstGeom prst="rect">
             <a:avLst/>
@@ -15967,87 +16424,106 @@
           </a:bodyPr>
           <a:lstStyle/>
           <a:p>
-            <a:pPr algn="l" marL="365760" indent="-365760">
+            <a:pPr algn="l">
               <a:spcAft>
                 <a:spcPts val="800"/>
               </a:spcAft>
-              <a:buClr>
-                <a:srgbClr val="1E40AF"/>
-              </a:buClr>
-              <a:buFont typeface="Arial"/>
-              <a:buChar char="•"/>
             </a:pPr>
             <a:r>
-              <a:rPr sz="2400">
+              <a:rPr sz="2600" b="1">
                 <a:solidFill>
                   <a:srgbClr val="1E293B"/>
                 </a:solidFill>
                 <a:latin typeface="Calibri"/>
               </a:rPr>
-              <a:t>Giới thiệu tác phẩm, các phương diện nghệ thuật sẽ phân tích.</a:t>
-            </a:r>
-          </a:p>
-          <a:p>
-            <a:pPr algn="l" marL="365760" indent="-365760">
+              <a:t>Phân tích đặc điểm ngôn ngữ viết trong đoạn: “Cái đói đã tràn đến xóm này tự lúc nào…” (Vợ nhặt).</a:t>
+            </a:r>
+          </a:p>
+        </p:txBody>
+      </p:sp>
+      <p:sp>
+        <p:nvSpPr>
+          <p:cNvPr id="8" name="Rounded Rectangle 7"/>
+          <p:cNvSpPr/>
+          <p:nvPr/>
+        </p:nvSpPr>
+        <p:spPr>
+          <a:xfrm>
+            <a:off x="731520" y="5120640"/>
+            <a:ext cx="10789920" cy="693420"/>
+          </a:xfrm>
+          <a:prstGeom prst="roundRect">
+            <a:avLst>
+              <a:gd name="adj" fmla="val 8000"/>
+            </a:avLst>
+          </a:prstGeom>
+          <a:solidFill>
+            <a:srgbClr val="EFF4FF"/>
+          </a:solidFill>
+          <a:ln w="19050">
+            <a:solidFill>
+              <a:srgbClr val="1E40AF"/>
+            </a:solidFill>
+          </a:ln>
+          <a:effectLst/>
+        </p:spPr>
+        <p:style>
+          <a:lnRef idx="1">
+            <a:schemeClr val="accent1"/>
+          </a:lnRef>
+          <a:fillRef idx="3">
+            <a:schemeClr val="accent1"/>
+          </a:fillRef>
+          <a:effectRef idx="2">
+            <a:schemeClr val="accent1"/>
+          </a:effectRef>
+          <a:fontRef idx="minor">
+            <a:schemeClr val="lt1"/>
+          </a:fontRef>
+        </p:style>
+        <p:txBody>
+          <a:bodyPr rtlCol="0" anchor="ctr"/>
+          <a:lstStyle/>
+          <a:p>
+            <a:pPr algn="ctr"/>
+          </a:p>
+        </p:txBody>
+      </p:sp>
+      <p:sp>
+        <p:nvSpPr>
+          <p:cNvPr id="9" name="TextBox 8"/>
+          <p:cNvSpPr txBox="1"/>
+          <p:nvPr/>
+        </p:nvSpPr>
+        <p:spPr>
+          <a:xfrm>
+            <a:off x="914400" y="5120640"/>
+            <a:ext cx="10424160" cy="693420"/>
+          </a:xfrm>
+          <a:prstGeom prst="rect">
+            <a:avLst/>
+          </a:prstGeom>
+          <a:noFill/>
+        </p:spPr>
+        <p:txBody>
+          <a:bodyPr wrap="square" anchor="ctr" lIns="45720" rIns="45720">
+            <a:spAutoFit/>
+          </a:bodyPr>
+          <a:lstStyle/>
+          <a:p>
+            <a:pPr algn="l">
               <a:spcAft>
-                <a:spcPts val="800"/>
+                <a:spcPts val="400"/>
               </a:spcAft>
-              <a:buClr>
-                <a:srgbClr val="1E40AF"/>
-              </a:buClr>
-              <a:buFont typeface="Arial"/>
-              <a:buChar char="•"/>
             </a:pPr>
             <a:r>
-              <a:rPr sz="2400">
-                <a:solidFill>
-                  <a:srgbClr val="1E293B"/>
+              <a:rPr sz="2200" b="1">
+                <a:solidFill>
+                  <a:srgbClr val="1E40AF"/>
                 </a:solidFill>
                 <a:latin typeface="Calibri"/>
               </a:rPr>
-              <a:t>Phân tích cụ thể: tình huống, cốt truyện, người kể chuyện, điểm nhìn, lời văn, giọng điệu.</a:t>
-            </a:r>
-          </a:p>
-          <a:p>
-            <a:pPr algn="l" marL="365760" indent="-365760">
-              <a:spcAft>
-                <a:spcPts val="800"/>
-              </a:spcAft>
-              <a:buClr>
-                <a:srgbClr val="1E40AF"/>
-              </a:buClr>
-              <a:buFont typeface="Arial"/>
-              <a:buChar char="•"/>
-            </a:pPr>
-            <a:r>
-              <a:rPr sz="2400">
-                <a:solidFill>
-                  <a:srgbClr val="1E293B"/>
-                </a:solidFill>
-                <a:latin typeface="Calibri"/>
-              </a:rPr>
-              <a:t>Nhận định, đánh giá bằng lí lẽ, bằng chứng.</a:t>
-            </a:r>
-          </a:p>
-          <a:p>
-            <a:pPr algn="l" marL="365760" indent="-365760">
-              <a:spcAft>
-                <a:spcPts val="800"/>
-              </a:spcAft>
-              <a:buClr>
-                <a:srgbClr val="1E40AF"/>
-              </a:buClr>
-              <a:buFont typeface="Arial"/>
-              <a:buChar char="•"/>
-            </a:pPr>
-            <a:r>
-              <a:rPr sz="2400">
-                <a:solidFill>
-                  <a:srgbClr val="1E293B"/>
-                </a:solidFill>
-                <a:latin typeface="Calibri"/>
-              </a:rPr>
-              <a:t>Khẳng định giá trị tác phẩm.</a:t>
+              <a:t>💡 Câu văn, từ ngữ, phép tu từ có gì đặc biệt?</a:t>
             </a:r>
           </a:p>
         </p:txBody>
@@ -16130,14 +16606,14 @@
         </p:nvSpPr>
         <p:spPr>
           <a:xfrm>
-            <a:off x="10253167" y="457200"/>
-            <a:ext cx="1389888" cy="457200"/>
+            <a:off x="9942271" y="457200"/>
+            <a:ext cx="1700784" cy="457200"/>
           </a:xfrm>
           <a:prstGeom prst="roundRect">
             <a:avLst/>
           </a:prstGeom>
           <a:solidFill>
-            <a:srgbClr val="1E40AF"/>
+            <a:srgbClr val="991B1B"/>
           </a:solidFill>
           <a:ln>
             <a:noFill/>
@@ -16170,7 +16646,7 @@
                 </a:solidFill>
                 <a:latin typeface="Arial"/>
               </a:rPr>
-              <a:t>ĐỀ BÀI</a:t>
+              <a:t>LỜI GIẢI</a:t>
             </a:r>
           </a:p>
         </p:txBody>
@@ -16184,7 +16660,7 @@
         <p:spPr>
           <a:xfrm>
             <a:off x="731520" y="274320"/>
-            <a:ext cx="9582912" cy="868680"/>
+            <a:ext cx="9272016" cy="868680"/>
           </a:xfrm>
           <a:prstGeom prst="rect">
             <a:avLst/>
@@ -16204,7 +16680,7 @@
                 </a:solidFill>
                 <a:latin typeface="Arial"/>
               </a:rPr>
-              <a:t>ĐỀ THỰC HÀNH VIẾT</a:t>
+              <a:t>ĐẶC ĐIỂM NGÔN NGỮ VIẾT</a:t>
             </a:r>
           </a:p>
         </p:txBody>
@@ -16297,7 +16773,7 @@
         <p:spPr>
           <a:xfrm>
             <a:off x="731520" y="1463040"/>
-            <a:ext cx="10789920" cy="3566160"/>
+            <a:ext cx="10789920" cy="3474720"/>
           </a:xfrm>
           <a:prstGeom prst="rect">
             <a:avLst/>
@@ -16310,19 +16786,66 @@
           </a:bodyPr>
           <a:lstStyle/>
           <a:p>
-            <a:pPr algn="l">
+            <a:pPr algn="l" marL="365760" indent="-365760">
               <a:spcAft>
                 <a:spcPts val="800"/>
               </a:spcAft>
+              <a:buClr>
+                <a:srgbClr val="1E40AF"/>
+              </a:buClr>
+              <a:buFont typeface="Arial"/>
+              <a:buChar char="•"/>
             </a:pPr>
             <a:r>
-              <a:rPr sz="2600" b="1">
+              <a:rPr sz="2300">
                 <a:solidFill>
                   <a:srgbClr val="1E293B"/>
                 </a:solidFill>
                 <a:latin typeface="Calibri"/>
               </a:rPr>
-              <a:t>Phân tích nghệ thuật xây dựng tình huống và cách kể chuyện của Kim Lân trong truyện ngắn Vợ nhặt.</a:t>
+              <a:t>Câu dài, nhiều thành phần.</a:t>
+            </a:r>
+          </a:p>
+          <a:p>
+            <a:pPr algn="l" marL="365760" indent="-365760">
+              <a:spcAft>
+                <a:spcPts val="800"/>
+              </a:spcAft>
+              <a:buClr>
+                <a:srgbClr val="1E40AF"/>
+              </a:buClr>
+              <a:buFont typeface="Arial"/>
+              <a:buChar char="•"/>
+            </a:pPr>
+            <a:r>
+              <a:rPr sz="2300">
+                <a:solidFill>
+                  <a:srgbClr val="1E293B"/>
+                </a:solidFill>
+                <a:latin typeface="Calibri"/>
+              </a:rPr>
+              <a:t>Từ ngữ chọn lọc, giàu hình ảnh: “xanh xám như những bóng ma”.</a:t>
+            </a:r>
+          </a:p>
+          <a:p>
+            <a:pPr algn="l" marL="365760" indent="-365760">
+              <a:spcAft>
+                <a:spcPts val="800"/>
+              </a:spcAft>
+              <a:buClr>
+                <a:srgbClr val="1E40AF"/>
+              </a:buClr>
+              <a:buFont typeface="Arial"/>
+              <a:buChar char="•"/>
+            </a:pPr>
+            <a:r>
+              <a:rPr sz="2300">
+                <a:solidFill>
+                  <a:srgbClr val="1E293B"/>
+                </a:solidFill>
+                <a:latin typeface="Calibri"/>
+              </a:rPr>
+              <a:t>Trình tự miêu tả mạch lạc, đúng chuẩn.</a:t>
             </a:r>
           </a:p>
         </p:txBody>
@@ -16335,8 +16858,8 @@
         </p:nvSpPr>
         <p:spPr>
           <a:xfrm>
-            <a:off x="731520" y="5120640"/>
-            <a:ext cx="10789920" cy="693420"/>
+            <a:off x="731520" y="5074920"/>
+            <a:ext cx="10789920" cy="731520"/>
           </a:xfrm>
           <a:prstGeom prst="roundRect">
             <a:avLst>
@@ -16344,11 +16867,11 @@
             </a:avLst>
           </a:prstGeom>
           <a:solidFill>
-            <a:srgbClr val="EFF4FF"/>
+            <a:srgbClr val="FEF2F2"/>
           </a:solidFill>
           <a:ln w="19050">
             <a:solidFill>
-              <a:srgbClr val="1E40AF"/>
+              <a:srgbClr val="991B1B"/>
             </a:solidFill>
           </a:ln>
           <a:effectLst/>
@@ -16383,8 +16906,8 @@
         </p:nvSpPr>
         <p:spPr>
           <a:xfrm>
-            <a:off x="914400" y="5120640"/>
-            <a:ext cx="10424160" cy="693420"/>
+            <a:off x="914400" y="5074920"/>
+            <a:ext cx="10424160" cy="731520"/>
           </a:xfrm>
           <a:prstGeom prst="rect">
             <a:avLst/>
@@ -16403,13 +16926,13 @@
               </a:spcAft>
             </a:pPr>
             <a:r>
-              <a:rPr sz="2200" b="1">
-                <a:solidFill>
-                  <a:srgbClr val="1E40AF"/>
+              <a:rPr sz="2400" b="1">
+                <a:solidFill>
+                  <a:srgbClr val="991B1B"/>
                 </a:solidFill>
                 <a:latin typeface="Calibri"/>
               </a:rPr>
-              <a:t>💡 Lập dàn ý: mở bài – thân bài (4 – 5 luận điểm) – kết bài.</a:t>
+              <a:t>Ngôn ngữ viết được gọt giũa, lưu trữ lâu dài.</a:t>
             </a:r>
           </a:p>
         </p:txBody>
@@ -16428,7 +16951,7 @@
     <p:bg>
       <p:bgPr>
         <a:solidFill>
-          <a:srgbClr val="FFFFFF"/>
+          <a:srgbClr val="F8F9FA"/>
         </a:solidFill>
         <a:effectLst/>
       </p:bgPr>
@@ -16448,54 +16971,10 @@
         </p:nvSpPr>
         <p:spPr>
           <a:xfrm>
-            <a:off x="457200" y="384048"/>
-            <a:ext cx="109728" cy="658368"/>
-          </a:xfrm>
-          <a:prstGeom prst="rect">
-            <a:avLst/>
-          </a:prstGeom>
-          <a:solidFill>
-            <a:srgbClr val="1E40AF"/>
-          </a:solidFill>
-          <a:ln>
-            <a:noFill/>
-          </a:ln>
-          <a:effectLst/>
-        </p:spPr>
-        <p:style>
-          <a:lnRef idx="1">
-            <a:schemeClr val="accent1"/>
-          </a:lnRef>
-          <a:fillRef idx="3">
-            <a:schemeClr val="accent1"/>
-          </a:fillRef>
-          <a:effectRef idx="2">
-            <a:schemeClr val="accent1"/>
-          </a:effectRef>
-          <a:fontRef idx="minor">
-            <a:schemeClr val="lt1"/>
-          </a:fontRef>
-        </p:style>
-        <p:txBody>
-          <a:bodyPr rtlCol="0" anchor="ctr"/>
-          <a:lstStyle/>
-          <a:p>
-            <a:pPr algn="ctr"/>
-          </a:p>
-        </p:txBody>
-      </p:sp>
-      <p:sp>
-        <p:nvSpPr>
-          <p:cNvPr id="3" name="Rounded Rectangle 2"/>
-          <p:cNvSpPr/>
-          <p:nvPr/>
-        </p:nvSpPr>
-        <p:spPr>
-          <a:xfrm>
-            <a:off x="9942271" y="457200"/>
-            <a:ext cx="1700784" cy="457200"/>
-          </a:xfrm>
-          <a:prstGeom prst="roundRect">
+            <a:off x="548640" y="2926080"/>
+            <a:ext cx="164592" cy="1005840"/>
+          </a:xfrm>
+          <a:prstGeom prst="rect">
             <a:avLst/>
           </a:prstGeom>
           <a:solidFill>
@@ -16521,32 +17000,23 @@
           </a:fontRef>
         </p:style>
         <p:txBody>
-          <a:bodyPr rtlCol="0" anchor="ctr" wrap="none" tIns="0" bIns="0"/>
+          <a:bodyPr rtlCol="0" anchor="ctr"/>
           <a:lstStyle/>
           <a:p>
             <a:pPr algn="ctr"/>
-            <a:r>
-              <a:rPr sz="1400" b="1">
-                <a:solidFill>
-                  <a:srgbClr val="FFFFFF"/>
-                </a:solidFill>
-                <a:latin typeface="Arial"/>
-              </a:rPr>
-              <a:t>LỜI GIẢI</a:t>
-            </a:r>
-          </a:p>
-        </p:txBody>
-      </p:sp>
-      <p:sp>
-        <p:nvSpPr>
-          <p:cNvPr id="4" name="TextBox 3"/>
+          </a:p>
+        </p:txBody>
+      </p:sp>
+      <p:sp>
+        <p:nvSpPr>
+          <p:cNvPr id="3" name="TextBox 2"/>
           <p:cNvSpPr txBox="1"/>
           <p:nvPr/>
         </p:nvSpPr>
         <p:spPr>
           <a:xfrm>
-            <a:off x="731520" y="274320"/>
-            <a:ext cx="9272016" cy="868680"/>
+            <a:off x="914400" y="2743200"/>
+            <a:ext cx="10515600" cy="1371600"/>
           </a:xfrm>
           <a:prstGeom prst="rect">
             <a:avLst/>
@@ -16554,271 +17024,24 @@
           <a:noFill/>
         </p:spPr>
         <p:txBody>
-          <a:bodyPr wrap="square" anchor="ctr">
+          <a:bodyPr wrap="square" anchor="ctr" lIns="45720" rIns="45720">
             <a:spAutoFit/>
           </a:bodyPr>
           <a:lstStyle/>
           <a:p>
-            <a:r>
-              <a:rPr sz="3600" b="1">
-                <a:solidFill>
-                  <a:srgbClr val="1E40AF"/>
-                </a:solidFill>
-                <a:latin typeface="Arial"/>
-              </a:rPr>
-              <a:t>ĐỀ THỰC HÀNH VIẾT</a:t>
-            </a:r>
-          </a:p>
-        </p:txBody>
-      </p:sp>
-      <p:sp>
-        <p:nvSpPr>
-          <p:cNvPr id="5" name="Rectangle 4"/>
-          <p:cNvSpPr/>
-          <p:nvPr/>
-        </p:nvSpPr>
-        <p:spPr>
-          <a:xfrm>
-            <a:off x="457200" y="1207008"/>
-            <a:ext cx="11274552" cy="22000"/>
-          </a:xfrm>
-          <a:prstGeom prst="rect">
-            <a:avLst/>
-          </a:prstGeom>
-          <a:solidFill>
-            <a:srgbClr val="E2E8F0"/>
-          </a:solidFill>
-          <a:ln>
-            <a:noFill/>
-          </a:ln>
-          <a:effectLst/>
-        </p:spPr>
-        <p:style>
-          <a:lnRef idx="1">
-            <a:schemeClr val="accent1"/>
-          </a:lnRef>
-          <a:fillRef idx="3">
-            <a:schemeClr val="accent1"/>
-          </a:fillRef>
-          <a:effectRef idx="2">
-            <a:schemeClr val="accent1"/>
-          </a:effectRef>
-          <a:fontRef idx="minor">
-            <a:schemeClr val="lt1"/>
-          </a:fontRef>
-        </p:style>
-        <p:txBody>
-          <a:bodyPr rtlCol="0" anchor="ctr"/>
-          <a:lstStyle/>
-          <a:p>
-            <a:pPr algn="ctr"/>
-          </a:p>
-        </p:txBody>
-      </p:sp>
-      <p:sp>
-        <p:nvSpPr>
-          <p:cNvPr id="6" name="TextBox 5"/>
-          <p:cNvSpPr txBox="1"/>
-          <p:nvPr/>
-        </p:nvSpPr>
-        <p:spPr>
-          <a:xfrm>
-            <a:off x="457200" y="6355080"/>
-            <a:ext cx="11274552" cy="365760"/>
-          </a:xfrm>
-          <a:prstGeom prst="rect">
-            <a:avLst/>
-          </a:prstGeom>
-          <a:noFill/>
-        </p:spPr>
-        <p:txBody>
-          <a:bodyPr wrap="none">
-            <a:spAutoFit/>
-          </a:bodyPr>
-          <a:lstStyle/>
-          <a:p>
-            <a:pPr algn="r"/>
-            <a:r>
-              <a:rPr sz="1200">
-                <a:solidFill>
-                  <a:srgbClr val="64748B"/>
-                </a:solidFill>
-                <a:latin typeface="Calibri"/>
-              </a:rPr>
-              <a:t>Ngữ văn 11 · Bài 1: Câu Chuyện Và Điểm Nhìn Trong Truyện Kể          39</a:t>
-            </a:r>
-          </a:p>
-        </p:txBody>
-      </p:sp>
-      <p:sp>
-        <p:nvSpPr>
-          <p:cNvPr id="7" name="TextBox 6"/>
-          <p:cNvSpPr txBox="1"/>
-          <p:nvPr/>
-        </p:nvSpPr>
-        <p:spPr>
-          <a:xfrm>
-            <a:off x="731520" y="1463040"/>
-            <a:ext cx="10789920" cy="3474720"/>
-          </a:xfrm>
-          <a:prstGeom prst="rect">
-            <a:avLst/>
-          </a:prstGeom>
-          <a:noFill/>
-        </p:spPr>
-        <p:txBody>
-          <a:bodyPr wrap="square" anchor="t" lIns="45720" rIns="45720">
-            <a:spAutoFit/>
-          </a:bodyPr>
-          <a:lstStyle/>
-          <a:p>
-            <a:pPr algn="l" marL="365760" indent="-365760">
+            <a:pPr algn="l">
               <a:spcAft>
                 <a:spcPts val="800"/>
               </a:spcAft>
-              <a:buClr>
-                <a:srgbClr val="1E40AF"/>
-              </a:buClr>
-              <a:buFont typeface="Arial"/>
-              <a:buChar char="•"/>
             </a:pPr>
             <a:r>
-              <a:rPr sz="2300">
-                <a:solidFill>
-                  <a:srgbClr val="1E293B"/>
+              <a:rPr sz="3600" b="1">
+                <a:solidFill>
+                  <a:srgbClr val="1E40AF"/>
                 </a:solidFill>
                 <a:latin typeface="Calibri"/>
               </a:rPr>
-              <a:t>MB: giới thiệu tác phẩm, nêu vấn đề.</a:t>
-            </a:r>
-          </a:p>
-          <a:p>
-            <a:pPr algn="l" marL="365760" indent="-365760">
-              <a:spcAft>
-                <a:spcPts val="800"/>
-              </a:spcAft>
-              <a:buClr>
-                <a:srgbClr val="1E40AF"/>
-              </a:buClr>
-              <a:buFont typeface="Arial"/>
-              <a:buChar char="•"/>
-            </a:pPr>
-            <a:r>
-              <a:rPr sz="2300">
-                <a:solidFill>
-                  <a:srgbClr val="1E293B"/>
-                </a:solidFill>
-                <a:latin typeface="Calibri"/>
-              </a:rPr>
-              <a:t>TB: tình huống; trình tự kể; người kể, điểm nhìn; giọng điệu, ngôn ngữ; đánh giá.</a:t>
-            </a:r>
-          </a:p>
-          <a:p>
-            <a:pPr algn="l" marL="365760" indent="-365760">
-              <a:spcAft>
-                <a:spcPts val="800"/>
-              </a:spcAft>
-              <a:buClr>
-                <a:srgbClr val="1E40AF"/>
-              </a:buClr>
-              <a:buFont typeface="Arial"/>
-              <a:buChar char="•"/>
-            </a:pPr>
-            <a:r>
-              <a:rPr sz="2300">
-                <a:solidFill>
-                  <a:srgbClr val="1E293B"/>
-                </a:solidFill>
-                <a:latin typeface="Calibri"/>
-              </a:rPr>
-              <a:t>KB: khẳng định giá trị nghệ thuật.</a:t>
-            </a:r>
-          </a:p>
-        </p:txBody>
-      </p:sp>
-      <p:sp>
-        <p:nvSpPr>
-          <p:cNvPr id="8" name="Rounded Rectangle 7"/>
-          <p:cNvSpPr/>
-          <p:nvPr/>
-        </p:nvSpPr>
-        <p:spPr>
-          <a:xfrm>
-            <a:off x="731520" y="5074920"/>
-            <a:ext cx="10789920" cy="731520"/>
-          </a:xfrm>
-          <a:prstGeom prst="roundRect">
-            <a:avLst>
-              <a:gd name="adj" fmla="val 8000"/>
-            </a:avLst>
-          </a:prstGeom>
-          <a:solidFill>
-            <a:srgbClr val="FEF2F2"/>
-          </a:solidFill>
-          <a:ln w="19050">
-            <a:solidFill>
-              <a:srgbClr val="991B1B"/>
-            </a:solidFill>
-          </a:ln>
-          <a:effectLst/>
-        </p:spPr>
-        <p:style>
-          <a:lnRef idx="1">
-            <a:schemeClr val="accent1"/>
-          </a:lnRef>
-          <a:fillRef idx="3">
-            <a:schemeClr val="accent1"/>
-          </a:fillRef>
-          <a:effectRef idx="2">
-            <a:schemeClr val="accent1"/>
-          </a:effectRef>
-          <a:fontRef idx="minor">
-            <a:schemeClr val="lt1"/>
-          </a:fontRef>
-        </p:style>
-        <p:txBody>
-          <a:bodyPr rtlCol="0" anchor="ctr"/>
-          <a:lstStyle/>
-          <a:p>
-            <a:pPr algn="ctr"/>
-          </a:p>
-        </p:txBody>
-      </p:sp>
-      <p:sp>
-        <p:nvSpPr>
-          <p:cNvPr id="9" name="TextBox 8"/>
-          <p:cNvSpPr txBox="1"/>
-          <p:nvPr/>
-        </p:nvSpPr>
-        <p:spPr>
-          <a:xfrm>
-            <a:off x="914400" y="5074920"/>
-            <a:ext cx="10424160" cy="731520"/>
-          </a:xfrm>
-          <a:prstGeom prst="rect">
-            <a:avLst/>
-          </a:prstGeom>
-          <a:noFill/>
-        </p:spPr>
-        <p:txBody>
-          <a:bodyPr wrap="square" anchor="ctr" lIns="45720" rIns="45720">
-            <a:spAutoFit/>
-          </a:bodyPr>
-          <a:lstStyle/>
-          <a:p>
-            <a:pPr algn="l">
-              <a:spcAft>
-                <a:spcPts val="400"/>
-              </a:spcAft>
-            </a:pPr>
-            <a:r>
-              <a:rPr sz="2400" b="1">
-                <a:solidFill>
-                  <a:srgbClr val="991B1B"/>
-                </a:solidFill>
-                <a:latin typeface="Calibri"/>
-              </a:rPr>
-              <a:t>Phân tích CÁCH KỂ, tránh kể lại nội dung.</a:t>
+              <a:t>TIẾT 8 – 11: VIẾT – NÓI VÀ NGHE</a:t>
             </a:r>
           </a:p>
         </p:txBody>
@@ -17232,7 +17455,7 @@
                 </a:solidFill>
                 <a:latin typeface="Arial"/>
               </a:rPr>
-              <a:t>CỦNG CỐ</a:t>
+              <a:t>GHI NHỚ</a:t>
             </a:r>
           </a:p>
         </p:txBody>
@@ -17266,7 +17489,7 @@
                 </a:solidFill>
                 <a:latin typeface="Arial"/>
               </a:rPr>
-              <a:t>SƠ ĐỒ TƯ DUY</a:t>
+              <a:t>YÊU CẦU BÀI VIẾT</a:t>
             </a:r>
           </a:p>
         </p:txBody>
@@ -17350,30 +17573,113 @@
           </a:p>
         </p:txBody>
       </p:sp>
-      <p:pic>
-        <p:nvPicPr>
-          <p:cNvPr id="7" name="Picture 6" descr="SoDoTuDuy_NGUVAN11_Bai1_CauChuyenVaDiemNhin_T1-11.png"/>
-          <p:cNvPicPr>
-            <a:picLocks noChangeAspect="1"/>
-          </p:cNvPicPr>
-          <p:nvPr/>
-        </p:nvPicPr>
-        <p:blipFill>
-          <a:blip r:embed="rId2"/>
-          <a:stretch>
-            <a:fillRect/>
-          </a:stretch>
-        </p:blipFill>
-        <p:spPr>
-          <a:xfrm>
-            <a:off x="1788855" y="1371600"/>
-            <a:ext cx="8675250" cy="4846320"/>
-          </a:xfrm>
-          <a:prstGeom prst="rect">
-            <a:avLst/>
-          </a:prstGeom>
-        </p:spPr>
-      </p:pic>
+      <p:sp>
+        <p:nvSpPr>
+          <p:cNvPr id="7" name="TextBox 6"/>
+          <p:cNvSpPr txBox="1"/>
+          <p:nvPr/>
+        </p:nvSpPr>
+        <p:spPr>
+          <a:xfrm>
+            <a:off x="731520" y="1463040"/>
+            <a:ext cx="10789920" cy="4754880"/>
+          </a:xfrm>
+          <a:prstGeom prst="rect">
+            <a:avLst/>
+          </a:prstGeom>
+          <a:noFill/>
+        </p:spPr>
+        <p:txBody>
+          <a:bodyPr wrap="square" anchor="t" lIns="45720" rIns="45720">
+            <a:spAutoFit/>
+          </a:bodyPr>
+          <a:lstStyle/>
+          <a:p>
+            <a:pPr algn="l" marL="365760" indent="-365760">
+              <a:spcAft>
+                <a:spcPts val="800"/>
+              </a:spcAft>
+              <a:buClr>
+                <a:srgbClr val="1E40AF"/>
+              </a:buClr>
+              <a:buFont typeface="Arial"/>
+              <a:buChar char="•"/>
+            </a:pPr>
+            <a:r>
+              <a:rPr sz="2400">
+                <a:solidFill>
+                  <a:srgbClr val="1E293B"/>
+                </a:solidFill>
+                <a:latin typeface="Calibri"/>
+              </a:rPr>
+              <a:t>Giới thiệu tác phẩm, các phương diện nghệ thuật sẽ phân tích.</a:t>
+            </a:r>
+          </a:p>
+          <a:p>
+            <a:pPr algn="l" marL="365760" indent="-365760">
+              <a:spcAft>
+                <a:spcPts val="800"/>
+              </a:spcAft>
+              <a:buClr>
+                <a:srgbClr val="1E40AF"/>
+              </a:buClr>
+              <a:buFont typeface="Arial"/>
+              <a:buChar char="•"/>
+            </a:pPr>
+            <a:r>
+              <a:rPr sz="2400">
+                <a:solidFill>
+                  <a:srgbClr val="1E293B"/>
+                </a:solidFill>
+                <a:latin typeface="Calibri"/>
+              </a:rPr>
+              <a:t>Phân tích cụ thể: tình huống, cốt truyện, người kể chuyện, điểm nhìn, lời văn, giọng điệu.</a:t>
+            </a:r>
+          </a:p>
+          <a:p>
+            <a:pPr algn="l" marL="365760" indent="-365760">
+              <a:spcAft>
+                <a:spcPts val="800"/>
+              </a:spcAft>
+              <a:buClr>
+                <a:srgbClr val="1E40AF"/>
+              </a:buClr>
+              <a:buFont typeface="Arial"/>
+              <a:buChar char="•"/>
+            </a:pPr>
+            <a:r>
+              <a:rPr sz="2400">
+                <a:solidFill>
+                  <a:srgbClr val="1E293B"/>
+                </a:solidFill>
+                <a:latin typeface="Calibri"/>
+              </a:rPr>
+              <a:t>Nhận định, đánh giá bằng lí lẽ, bằng chứng.</a:t>
+            </a:r>
+          </a:p>
+          <a:p>
+            <a:pPr algn="l" marL="365760" indent="-365760">
+              <a:spcAft>
+                <a:spcPts val="800"/>
+              </a:spcAft>
+              <a:buClr>
+                <a:srgbClr val="1E40AF"/>
+              </a:buClr>
+              <a:buFont typeface="Arial"/>
+              <a:buChar char="•"/>
+            </a:pPr>
+            <a:r>
+              <a:rPr sz="2400">
+                <a:solidFill>
+                  <a:srgbClr val="1E293B"/>
+                </a:solidFill>
+                <a:latin typeface="Calibri"/>
+              </a:rPr>
+              <a:t>Khẳng định giá trị tác phẩm.</a:t>
+            </a:r>
+          </a:p>
+        </p:txBody>
+      </p:sp>
     </p:spTree>
   </p:cSld>
   <p:clrMapOvr>
@@ -17452,8 +17758,370 @@
         </p:nvSpPr>
         <p:spPr>
           <a:xfrm>
-            <a:off x="10097719" y="457200"/>
-            <a:ext cx="1545336" cy="457200"/>
+            <a:off x="10253167" y="457200"/>
+            <a:ext cx="1389888" cy="457200"/>
+          </a:xfrm>
+          <a:prstGeom prst="roundRect">
+            <a:avLst/>
+          </a:prstGeom>
+          <a:solidFill>
+            <a:srgbClr val="1E40AF"/>
+          </a:solidFill>
+          <a:ln>
+            <a:noFill/>
+          </a:ln>
+          <a:effectLst/>
+        </p:spPr>
+        <p:style>
+          <a:lnRef idx="1">
+            <a:schemeClr val="accent1"/>
+          </a:lnRef>
+          <a:fillRef idx="3">
+            <a:schemeClr val="accent1"/>
+          </a:fillRef>
+          <a:effectRef idx="2">
+            <a:schemeClr val="accent1"/>
+          </a:effectRef>
+          <a:fontRef idx="minor">
+            <a:schemeClr val="lt1"/>
+          </a:fontRef>
+        </p:style>
+        <p:txBody>
+          <a:bodyPr rtlCol="0" anchor="ctr" wrap="none" tIns="0" bIns="0"/>
+          <a:lstStyle/>
+          <a:p>
+            <a:pPr algn="ctr"/>
+            <a:r>
+              <a:rPr sz="1400" b="1">
+                <a:solidFill>
+                  <a:srgbClr val="FFFFFF"/>
+                </a:solidFill>
+                <a:latin typeface="Arial"/>
+              </a:rPr>
+              <a:t>ĐỀ BÀI</a:t>
+            </a:r>
+          </a:p>
+        </p:txBody>
+      </p:sp>
+      <p:sp>
+        <p:nvSpPr>
+          <p:cNvPr id="4" name="TextBox 3"/>
+          <p:cNvSpPr txBox="1"/>
+          <p:nvPr/>
+        </p:nvSpPr>
+        <p:spPr>
+          <a:xfrm>
+            <a:off x="731520" y="274320"/>
+            <a:ext cx="9582912" cy="868680"/>
+          </a:xfrm>
+          <a:prstGeom prst="rect">
+            <a:avLst/>
+          </a:prstGeom>
+          <a:noFill/>
+        </p:spPr>
+        <p:txBody>
+          <a:bodyPr wrap="square" anchor="ctr">
+            <a:spAutoFit/>
+          </a:bodyPr>
+          <a:lstStyle/>
+          <a:p>
+            <a:r>
+              <a:rPr sz="3600" b="1">
+                <a:solidFill>
+                  <a:srgbClr val="1E40AF"/>
+                </a:solidFill>
+                <a:latin typeface="Arial"/>
+              </a:rPr>
+              <a:t>ĐỀ THỰC HÀNH VIẾT</a:t>
+            </a:r>
+          </a:p>
+        </p:txBody>
+      </p:sp>
+      <p:sp>
+        <p:nvSpPr>
+          <p:cNvPr id="5" name="Rectangle 4"/>
+          <p:cNvSpPr/>
+          <p:nvPr/>
+        </p:nvSpPr>
+        <p:spPr>
+          <a:xfrm>
+            <a:off x="457200" y="1207008"/>
+            <a:ext cx="11274552" cy="22000"/>
+          </a:xfrm>
+          <a:prstGeom prst="rect">
+            <a:avLst/>
+          </a:prstGeom>
+          <a:solidFill>
+            <a:srgbClr val="E2E8F0"/>
+          </a:solidFill>
+          <a:ln>
+            <a:noFill/>
+          </a:ln>
+          <a:effectLst/>
+        </p:spPr>
+        <p:style>
+          <a:lnRef idx="1">
+            <a:schemeClr val="accent1"/>
+          </a:lnRef>
+          <a:fillRef idx="3">
+            <a:schemeClr val="accent1"/>
+          </a:fillRef>
+          <a:effectRef idx="2">
+            <a:schemeClr val="accent1"/>
+          </a:effectRef>
+          <a:fontRef idx="minor">
+            <a:schemeClr val="lt1"/>
+          </a:fontRef>
+        </p:style>
+        <p:txBody>
+          <a:bodyPr rtlCol="0" anchor="ctr"/>
+          <a:lstStyle/>
+          <a:p>
+            <a:pPr algn="ctr"/>
+          </a:p>
+        </p:txBody>
+      </p:sp>
+      <p:sp>
+        <p:nvSpPr>
+          <p:cNvPr id="6" name="TextBox 5"/>
+          <p:cNvSpPr txBox="1"/>
+          <p:nvPr/>
+        </p:nvSpPr>
+        <p:spPr>
+          <a:xfrm>
+            <a:off x="457200" y="6355080"/>
+            <a:ext cx="11274552" cy="365760"/>
+          </a:xfrm>
+          <a:prstGeom prst="rect">
+            <a:avLst/>
+          </a:prstGeom>
+          <a:noFill/>
+        </p:spPr>
+        <p:txBody>
+          <a:bodyPr wrap="none">
+            <a:spAutoFit/>
+          </a:bodyPr>
+          <a:lstStyle/>
+          <a:p>
+            <a:pPr algn="r"/>
+            <a:r>
+              <a:rPr sz="1200">
+                <a:solidFill>
+                  <a:srgbClr val="64748B"/>
+                </a:solidFill>
+                <a:latin typeface="Calibri"/>
+              </a:rPr>
+              <a:t>Ngữ văn 11 · Bài 1: Câu Chuyện Và Điểm Nhìn Trong Truyện Kể          41</a:t>
+            </a:r>
+          </a:p>
+        </p:txBody>
+      </p:sp>
+      <p:sp>
+        <p:nvSpPr>
+          <p:cNvPr id="7" name="TextBox 6"/>
+          <p:cNvSpPr txBox="1"/>
+          <p:nvPr/>
+        </p:nvSpPr>
+        <p:spPr>
+          <a:xfrm>
+            <a:off x="731520" y="1463040"/>
+            <a:ext cx="10789920" cy="3566160"/>
+          </a:xfrm>
+          <a:prstGeom prst="rect">
+            <a:avLst/>
+          </a:prstGeom>
+          <a:noFill/>
+        </p:spPr>
+        <p:txBody>
+          <a:bodyPr wrap="square" anchor="t" lIns="45720" rIns="45720">
+            <a:spAutoFit/>
+          </a:bodyPr>
+          <a:lstStyle/>
+          <a:p>
+            <a:pPr algn="l">
+              <a:spcAft>
+                <a:spcPts val="800"/>
+              </a:spcAft>
+            </a:pPr>
+            <a:r>
+              <a:rPr sz="2600" b="1">
+                <a:solidFill>
+                  <a:srgbClr val="1E293B"/>
+                </a:solidFill>
+                <a:latin typeface="Calibri"/>
+              </a:rPr>
+              <a:t>Phân tích nghệ thuật xây dựng tình huống và cách kể chuyện của Kim Lân trong truyện ngắn Vợ nhặt.</a:t>
+            </a:r>
+          </a:p>
+        </p:txBody>
+      </p:sp>
+      <p:sp>
+        <p:nvSpPr>
+          <p:cNvPr id="8" name="Rounded Rectangle 7"/>
+          <p:cNvSpPr/>
+          <p:nvPr/>
+        </p:nvSpPr>
+        <p:spPr>
+          <a:xfrm>
+            <a:off x="731520" y="5120640"/>
+            <a:ext cx="10789920" cy="693420"/>
+          </a:xfrm>
+          <a:prstGeom prst="roundRect">
+            <a:avLst>
+              <a:gd name="adj" fmla="val 8000"/>
+            </a:avLst>
+          </a:prstGeom>
+          <a:solidFill>
+            <a:srgbClr val="EFF4FF"/>
+          </a:solidFill>
+          <a:ln w="19050">
+            <a:solidFill>
+              <a:srgbClr val="1E40AF"/>
+            </a:solidFill>
+          </a:ln>
+          <a:effectLst/>
+        </p:spPr>
+        <p:style>
+          <a:lnRef idx="1">
+            <a:schemeClr val="accent1"/>
+          </a:lnRef>
+          <a:fillRef idx="3">
+            <a:schemeClr val="accent1"/>
+          </a:fillRef>
+          <a:effectRef idx="2">
+            <a:schemeClr val="accent1"/>
+          </a:effectRef>
+          <a:fontRef idx="minor">
+            <a:schemeClr val="lt1"/>
+          </a:fontRef>
+        </p:style>
+        <p:txBody>
+          <a:bodyPr rtlCol="0" anchor="ctr"/>
+          <a:lstStyle/>
+          <a:p>
+            <a:pPr algn="ctr"/>
+          </a:p>
+        </p:txBody>
+      </p:sp>
+      <p:sp>
+        <p:nvSpPr>
+          <p:cNvPr id="9" name="TextBox 8"/>
+          <p:cNvSpPr txBox="1"/>
+          <p:nvPr/>
+        </p:nvSpPr>
+        <p:spPr>
+          <a:xfrm>
+            <a:off x="914400" y="5120640"/>
+            <a:ext cx="10424160" cy="693420"/>
+          </a:xfrm>
+          <a:prstGeom prst="rect">
+            <a:avLst/>
+          </a:prstGeom>
+          <a:noFill/>
+        </p:spPr>
+        <p:txBody>
+          <a:bodyPr wrap="square" anchor="ctr" lIns="45720" rIns="45720">
+            <a:spAutoFit/>
+          </a:bodyPr>
+          <a:lstStyle/>
+          <a:p>
+            <a:pPr algn="l">
+              <a:spcAft>
+                <a:spcPts val="400"/>
+              </a:spcAft>
+            </a:pPr>
+            <a:r>
+              <a:rPr sz="2200" b="1">
+                <a:solidFill>
+                  <a:srgbClr val="1E40AF"/>
+                </a:solidFill>
+                <a:latin typeface="Calibri"/>
+              </a:rPr>
+              <a:t>💡 Lập dàn ý: mở bài – thân bài (4 – 5 luận điểm) – kết bài.</a:t>
+            </a:r>
+          </a:p>
+        </p:txBody>
+      </p:sp>
+    </p:spTree>
+  </p:cSld>
+  <p:clrMapOvr>
+    <a:masterClrMapping/>
+  </p:clrMapOvr>
+</p:sld>
+</file>
+
+<file path=ppt/slides/slide42.xml><?xml version="1.0" encoding="utf-8"?>
+<p:sld xmlns:a="http://schemas.openxmlformats.org/drawingml/2006/main" xmlns:p="http://schemas.openxmlformats.org/presentationml/2006/main" xmlns:r="http://schemas.openxmlformats.org/officeDocument/2006/relationships">
+  <p:cSld>
+    <p:bg>
+      <p:bgPr>
+        <a:solidFill>
+          <a:srgbClr val="FFFFFF"/>
+        </a:solidFill>
+        <a:effectLst/>
+      </p:bgPr>
+    </p:bg>
+    <p:spTree>
+      <p:nvGrpSpPr>
+        <p:cNvPr id="1" name=""/>
+        <p:cNvGrpSpPr/>
+        <p:nvPr/>
+      </p:nvGrpSpPr>
+      <p:grpSpPr/>
+      <p:sp>
+        <p:nvSpPr>
+          <p:cNvPr id="2" name="Rectangle 1"/>
+          <p:cNvSpPr/>
+          <p:nvPr/>
+        </p:nvSpPr>
+        <p:spPr>
+          <a:xfrm>
+            <a:off x="457200" y="384048"/>
+            <a:ext cx="109728" cy="658368"/>
+          </a:xfrm>
+          <a:prstGeom prst="rect">
+            <a:avLst/>
+          </a:prstGeom>
+          <a:solidFill>
+            <a:srgbClr val="1E40AF"/>
+          </a:solidFill>
+          <a:ln>
+            <a:noFill/>
+          </a:ln>
+          <a:effectLst/>
+        </p:spPr>
+        <p:style>
+          <a:lnRef idx="1">
+            <a:schemeClr val="accent1"/>
+          </a:lnRef>
+          <a:fillRef idx="3">
+            <a:schemeClr val="accent1"/>
+          </a:fillRef>
+          <a:effectRef idx="2">
+            <a:schemeClr val="accent1"/>
+          </a:effectRef>
+          <a:fontRef idx="minor">
+            <a:schemeClr val="lt1"/>
+          </a:fontRef>
+        </p:style>
+        <p:txBody>
+          <a:bodyPr rtlCol="0" anchor="ctr"/>
+          <a:lstStyle/>
+          <a:p>
+            <a:pPr algn="ctr"/>
+          </a:p>
+        </p:txBody>
+      </p:sp>
+      <p:sp>
+        <p:nvSpPr>
+          <p:cNvPr id="3" name="Rounded Rectangle 2"/>
+          <p:cNvSpPr/>
+          <p:nvPr/>
+        </p:nvSpPr>
+        <p:spPr>
+          <a:xfrm>
+            <a:off x="9942271" y="457200"/>
+            <a:ext cx="1700784" cy="457200"/>
           </a:xfrm>
           <a:prstGeom prst="roundRect">
             <a:avLst/>
@@ -17492,7 +18160,7 @@
                 </a:solidFill>
                 <a:latin typeface="Arial"/>
               </a:rPr>
-              <a:t>CỦNG CỐ</a:t>
+              <a:t>LỜI GIẢI</a:t>
             </a:r>
           </a:p>
         </p:txBody>
@@ -17506,7 +18174,7 @@
         <p:spPr>
           <a:xfrm>
             <a:off x="731520" y="274320"/>
-            <a:ext cx="9427464" cy="868680"/>
+            <a:ext cx="9272016" cy="868680"/>
           </a:xfrm>
           <a:prstGeom prst="rect">
             <a:avLst/>
@@ -17526,7 +18194,7 @@
                 </a:solidFill>
                 <a:latin typeface="Arial"/>
               </a:rPr>
-              <a:t>BÀI TẬP CỦA BẠN</a:t>
+              <a:t>ĐỀ THỰC HÀNH VIẾT</a:t>
             </a:r>
           </a:p>
         </p:txBody>
@@ -17605,7 +18273,676 @@
                 </a:solidFill>
                 <a:latin typeface="Calibri"/>
               </a:rPr>
-              <a:t>Ngữ văn 11 · Bài 1: Câu Chuyện Và Điểm Nhìn Trong Truyện Kể          41</a:t>
+              <a:t>Ngữ văn 11 · Bài 1: Câu Chuyện Và Điểm Nhìn Trong Truyện Kể          42</a:t>
+            </a:r>
+          </a:p>
+        </p:txBody>
+      </p:sp>
+      <p:sp>
+        <p:nvSpPr>
+          <p:cNvPr id="7" name="TextBox 6"/>
+          <p:cNvSpPr txBox="1"/>
+          <p:nvPr/>
+        </p:nvSpPr>
+        <p:spPr>
+          <a:xfrm>
+            <a:off x="731520" y="1463040"/>
+            <a:ext cx="10789920" cy="3474720"/>
+          </a:xfrm>
+          <a:prstGeom prst="rect">
+            <a:avLst/>
+          </a:prstGeom>
+          <a:noFill/>
+        </p:spPr>
+        <p:txBody>
+          <a:bodyPr wrap="square" anchor="t" lIns="45720" rIns="45720">
+            <a:spAutoFit/>
+          </a:bodyPr>
+          <a:lstStyle/>
+          <a:p>
+            <a:pPr algn="l" marL="365760" indent="-365760">
+              <a:spcAft>
+                <a:spcPts val="800"/>
+              </a:spcAft>
+              <a:buClr>
+                <a:srgbClr val="1E40AF"/>
+              </a:buClr>
+              <a:buFont typeface="Arial"/>
+              <a:buChar char="•"/>
+            </a:pPr>
+            <a:r>
+              <a:rPr sz="2300">
+                <a:solidFill>
+                  <a:srgbClr val="1E293B"/>
+                </a:solidFill>
+                <a:latin typeface="Calibri"/>
+              </a:rPr>
+              <a:t>MB: giới thiệu tác phẩm, nêu vấn đề.</a:t>
+            </a:r>
+          </a:p>
+          <a:p>
+            <a:pPr algn="l" marL="365760" indent="-365760">
+              <a:spcAft>
+                <a:spcPts val="800"/>
+              </a:spcAft>
+              <a:buClr>
+                <a:srgbClr val="1E40AF"/>
+              </a:buClr>
+              <a:buFont typeface="Arial"/>
+              <a:buChar char="•"/>
+            </a:pPr>
+            <a:r>
+              <a:rPr sz="2300">
+                <a:solidFill>
+                  <a:srgbClr val="1E293B"/>
+                </a:solidFill>
+                <a:latin typeface="Calibri"/>
+              </a:rPr>
+              <a:t>TB: tình huống; trình tự kể; người kể, điểm nhìn; giọng điệu, ngôn ngữ; đánh giá.</a:t>
+            </a:r>
+          </a:p>
+          <a:p>
+            <a:pPr algn="l" marL="365760" indent="-365760">
+              <a:spcAft>
+                <a:spcPts val="800"/>
+              </a:spcAft>
+              <a:buClr>
+                <a:srgbClr val="1E40AF"/>
+              </a:buClr>
+              <a:buFont typeface="Arial"/>
+              <a:buChar char="•"/>
+            </a:pPr>
+            <a:r>
+              <a:rPr sz="2300">
+                <a:solidFill>
+                  <a:srgbClr val="1E293B"/>
+                </a:solidFill>
+                <a:latin typeface="Calibri"/>
+              </a:rPr>
+              <a:t>KB: khẳng định giá trị nghệ thuật.</a:t>
+            </a:r>
+          </a:p>
+        </p:txBody>
+      </p:sp>
+      <p:sp>
+        <p:nvSpPr>
+          <p:cNvPr id="8" name="Rounded Rectangle 7"/>
+          <p:cNvSpPr/>
+          <p:nvPr/>
+        </p:nvSpPr>
+        <p:spPr>
+          <a:xfrm>
+            <a:off x="731520" y="5074920"/>
+            <a:ext cx="10789920" cy="731520"/>
+          </a:xfrm>
+          <a:prstGeom prst="roundRect">
+            <a:avLst>
+              <a:gd name="adj" fmla="val 8000"/>
+            </a:avLst>
+          </a:prstGeom>
+          <a:solidFill>
+            <a:srgbClr val="FEF2F2"/>
+          </a:solidFill>
+          <a:ln w="19050">
+            <a:solidFill>
+              <a:srgbClr val="991B1B"/>
+            </a:solidFill>
+          </a:ln>
+          <a:effectLst/>
+        </p:spPr>
+        <p:style>
+          <a:lnRef idx="1">
+            <a:schemeClr val="accent1"/>
+          </a:lnRef>
+          <a:fillRef idx="3">
+            <a:schemeClr val="accent1"/>
+          </a:fillRef>
+          <a:effectRef idx="2">
+            <a:schemeClr val="accent1"/>
+          </a:effectRef>
+          <a:fontRef idx="minor">
+            <a:schemeClr val="lt1"/>
+          </a:fontRef>
+        </p:style>
+        <p:txBody>
+          <a:bodyPr rtlCol="0" anchor="ctr"/>
+          <a:lstStyle/>
+          <a:p>
+            <a:pPr algn="ctr"/>
+          </a:p>
+        </p:txBody>
+      </p:sp>
+      <p:sp>
+        <p:nvSpPr>
+          <p:cNvPr id="9" name="TextBox 8"/>
+          <p:cNvSpPr txBox="1"/>
+          <p:nvPr/>
+        </p:nvSpPr>
+        <p:spPr>
+          <a:xfrm>
+            <a:off x="914400" y="5074920"/>
+            <a:ext cx="10424160" cy="731520"/>
+          </a:xfrm>
+          <a:prstGeom prst="rect">
+            <a:avLst/>
+          </a:prstGeom>
+          <a:noFill/>
+        </p:spPr>
+        <p:txBody>
+          <a:bodyPr wrap="square" anchor="ctr" lIns="45720" rIns="45720">
+            <a:spAutoFit/>
+          </a:bodyPr>
+          <a:lstStyle/>
+          <a:p>
+            <a:pPr algn="l">
+              <a:spcAft>
+                <a:spcPts val="400"/>
+              </a:spcAft>
+            </a:pPr>
+            <a:r>
+              <a:rPr sz="2400" b="1">
+                <a:solidFill>
+                  <a:srgbClr val="991B1B"/>
+                </a:solidFill>
+                <a:latin typeface="Calibri"/>
+              </a:rPr>
+              <a:t>Phân tích CÁCH KỂ, tránh kể lại nội dung.</a:t>
+            </a:r>
+          </a:p>
+        </p:txBody>
+      </p:sp>
+    </p:spTree>
+  </p:cSld>
+  <p:clrMapOvr>
+    <a:masterClrMapping/>
+  </p:clrMapOvr>
+</p:sld>
+</file>
+
+<file path=ppt/slides/slide43.xml><?xml version="1.0" encoding="utf-8"?>
+<p:sld xmlns:a="http://schemas.openxmlformats.org/drawingml/2006/main" xmlns:p="http://schemas.openxmlformats.org/presentationml/2006/main" xmlns:r="http://schemas.openxmlformats.org/officeDocument/2006/relationships">
+  <p:cSld>
+    <p:bg>
+      <p:bgPr>
+        <a:solidFill>
+          <a:srgbClr val="FFFFFF"/>
+        </a:solidFill>
+        <a:effectLst/>
+      </p:bgPr>
+    </p:bg>
+    <p:spTree>
+      <p:nvGrpSpPr>
+        <p:cNvPr id="1" name=""/>
+        <p:cNvGrpSpPr/>
+        <p:nvPr/>
+      </p:nvGrpSpPr>
+      <p:grpSpPr/>
+      <p:sp>
+        <p:nvSpPr>
+          <p:cNvPr id="2" name="Rectangle 1"/>
+          <p:cNvSpPr/>
+          <p:nvPr/>
+        </p:nvSpPr>
+        <p:spPr>
+          <a:xfrm>
+            <a:off x="457200" y="384048"/>
+            <a:ext cx="109728" cy="658368"/>
+          </a:xfrm>
+          <a:prstGeom prst="rect">
+            <a:avLst/>
+          </a:prstGeom>
+          <a:solidFill>
+            <a:srgbClr val="1E40AF"/>
+          </a:solidFill>
+          <a:ln>
+            <a:noFill/>
+          </a:ln>
+          <a:effectLst/>
+        </p:spPr>
+        <p:style>
+          <a:lnRef idx="1">
+            <a:schemeClr val="accent1"/>
+          </a:lnRef>
+          <a:fillRef idx="3">
+            <a:schemeClr val="accent1"/>
+          </a:fillRef>
+          <a:effectRef idx="2">
+            <a:schemeClr val="accent1"/>
+          </a:effectRef>
+          <a:fontRef idx="minor">
+            <a:schemeClr val="lt1"/>
+          </a:fontRef>
+        </p:style>
+        <p:txBody>
+          <a:bodyPr rtlCol="0" anchor="ctr"/>
+          <a:lstStyle/>
+          <a:p>
+            <a:pPr algn="ctr"/>
+          </a:p>
+        </p:txBody>
+      </p:sp>
+      <p:sp>
+        <p:nvSpPr>
+          <p:cNvPr id="3" name="Rounded Rectangle 2"/>
+          <p:cNvSpPr/>
+          <p:nvPr/>
+        </p:nvSpPr>
+        <p:spPr>
+          <a:xfrm>
+            <a:off x="10097719" y="457200"/>
+            <a:ext cx="1545336" cy="457200"/>
+          </a:xfrm>
+          <a:prstGeom prst="roundRect">
+            <a:avLst/>
+          </a:prstGeom>
+          <a:solidFill>
+            <a:srgbClr val="166534"/>
+          </a:solidFill>
+          <a:ln>
+            <a:noFill/>
+          </a:ln>
+          <a:effectLst/>
+        </p:spPr>
+        <p:style>
+          <a:lnRef idx="1">
+            <a:schemeClr val="accent1"/>
+          </a:lnRef>
+          <a:fillRef idx="3">
+            <a:schemeClr val="accent1"/>
+          </a:fillRef>
+          <a:effectRef idx="2">
+            <a:schemeClr val="accent1"/>
+          </a:effectRef>
+          <a:fontRef idx="minor">
+            <a:schemeClr val="lt1"/>
+          </a:fontRef>
+        </p:style>
+        <p:txBody>
+          <a:bodyPr rtlCol="0" anchor="ctr" wrap="none" tIns="0" bIns="0"/>
+          <a:lstStyle/>
+          <a:p>
+            <a:pPr algn="ctr"/>
+            <a:r>
+              <a:rPr sz="1400" b="1">
+                <a:solidFill>
+                  <a:srgbClr val="FFFFFF"/>
+                </a:solidFill>
+                <a:latin typeface="Arial"/>
+              </a:rPr>
+              <a:t>CỦNG CỐ</a:t>
+            </a:r>
+          </a:p>
+        </p:txBody>
+      </p:sp>
+      <p:sp>
+        <p:nvSpPr>
+          <p:cNvPr id="4" name="TextBox 3"/>
+          <p:cNvSpPr txBox="1"/>
+          <p:nvPr/>
+        </p:nvSpPr>
+        <p:spPr>
+          <a:xfrm>
+            <a:off x="731520" y="274320"/>
+            <a:ext cx="9427464" cy="868680"/>
+          </a:xfrm>
+          <a:prstGeom prst="rect">
+            <a:avLst/>
+          </a:prstGeom>
+          <a:noFill/>
+        </p:spPr>
+        <p:txBody>
+          <a:bodyPr wrap="square" anchor="ctr">
+            <a:spAutoFit/>
+          </a:bodyPr>
+          <a:lstStyle/>
+          <a:p>
+            <a:r>
+              <a:rPr sz="3600" b="1">
+                <a:solidFill>
+                  <a:srgbClr val="1E40AF"/>
+                </a:solidFill>
+                <a:latin typeface="Arial"/>
+              </a:rPr>
+              <a:t>SƠ ĐỒ TƯ DUY</a:t>
+            </a:r>
+          </a:p>
+        </p:txBody>
+      </p:sp>
+      <p:sp>
+        <p:nvSpPr>
+          <p:cNvPr id="5" name="Rectangle 4"/>
+          <p:cNvSpPr/>
+          <p:nvPr/>
+        </p:nvSpPr>
+        <p:spPr>
+          <a:xfrm>
+            <a:off x="457200" y="1207008"/>
+            <a:ext cx="11274552" cy="22000"/>
+          </a:xfrm>
+          <a:prstGeom prst="rect">
+            <a:avLst/>
+          </a:prstGeom>
+          <a:solidFill>
+            <a:srgbClr val="E2E8F0"/>
+          </a:solidFill>
+          <a:ln>
+            <a:noFill/>
+          </a:ln>
+          <a:effectLst/>
+        </p:spPr>
+        <p:style>
+          <a:lnRef idx="1">
+            <a:schemeClr val="accent1"/>
+          </a:lnRef>
+          <a:fillRef idx="3">
+            <a:schemeClr val="accent1"/>
+          </a:fillRef>
+          <a:effectRef idx="2">
+            <a:schemeClr val="accent1"/>
+          </a:effectRef>
+          <a:fontRef idx="minor">
+            <a:schemeClr val="lt1"/>
+          </a:fontRef>
+        </p:style>
+        <p:txBody>
+          <a:bodyPr rtlCol="0" anchor="ctr"/>
+          <a:lstStyle/>
+          <a:p>
+            <a:pPr algn="ctr"/>
+          </a:p>
+        </p:txBody>
+      </p:sp>
+      <p:sp>
+        <p:nvSpPr>
+          <p:cNvPr id="6" name="TextBox 5"/>
+          <p:cNvSpPr txBox="1"/>
+          <p:nvPr/>
+        </p:nvSpPr>
+        <p:spPr>
+          <a:xfrm>
+            <a:off x="457200" y="6355080"/>
+            <a:ext cx="11274552" cy="365760"/>
+          </a:xfrm>
+          <a:prstGeom prst="rect">
+            <a:avLst/>
+          </a:prstGeom>
+          <a:noFill/>
+        </p:spPr>
+        <p:txBody>
+          <a:bodyPr wrap="none">
+            <a:spAutoFit/>
+          </a:bodyPr>
+          <a:lstStyle/>
+          <a:p>
+            <a:pPr algn="r"/>
+            <a:r>
+              <a:rPr sz="1200">
+                <a:solidFill>
+                  <a:srgbClr val="64748B"/>
+                </a:solidFill>
+                <a:latin typeface="Calibri"/>
+              </a:rPr>
+              <a:t>Ngữ văn 11 · Bài 1: Câu Chuyện Và Điểm Nhìn Trong Truyện Kể          43</a:t>
+            </a:r>
+          </a:p>
+        </p:txBody>
+      </p:sp>
+      <p:pic>
+        <p:nvPicPr>
+          <p:cNvPr id="7" name="Picture 6" descr="SoDoTuDuy_NGUVAN11_Bai1_CauChuyenVaDiemNhin_T1-11.png"/>
+          <p:cNvPicPr>
+            <a:picLocks noChangeAspect="1"/>
+          </p:cNvPicPr>
+          <p:nvPr/>
+        </p:nvPicPr>
+        <p:blipFill>
+          <a:blip r:embed="rId2"/>
+          <a:stretch>
+            <a:fillRect/>
+          </a:stretch>
+        </p:blipFill>
+        <p:spPr>
+          <a:xfrm>
+            <a:off x="1788855" y="1371600"/>
+            <a:ext cx="8675250" cy="4846320"/>
+          </a:xfrm>
+          <a:prstGeom prst="rect">
+            <a:avLst/>
+          </a:prstGeom>
+        </p:spPr>
+      </p:pic>
+    </p:spTree>
+  </p:cSld>
+  <p:clrMapOvr>
+    <a:masterClrMapping/>
+  </p:clrMapOvr>
+</p:sld>
+</file>
+
+<file path=ppt/slides/slide44.xml><?xml version="1.0" encoding="utf-8"?>
+<p:sld xmlns:a="http://schemas.openxmlformats.org/drawingml/2006/main" xmlns:p="http://schemas.openxmlformats.org/presentationml/2006/main" xmlns:r="http://schemas.openxmlformats.org/officeDocument/2006/relationships">
+  <p:cSld>
+    <p:bg>
+      <p:bgPr>
+        <a:solidFill>
+          <a:srgbClr val="FFFFFF"/>
+        </a:solidFill>
+        <a:effectLst/>
+      </p:bgPr>
+    </p:bg>
+    <p:spTree>
+      <p:nvGrpSpPr>
+        <p:cNvPr id="1" name=""/>
+        <p:cNvGrpSpPr/>
+        <p:nvPr/>
+      </p:nvGrpSpPr>
+      <p:grpSpPr/>
+      <p:sp>
+        <p:nvSpPr>
+          <p:cNvPr id="2" name="Rectangle 1"/>
+          <p:cNvSpPr/>
+          <p:nvPr/>
+        </p:nvSpPr>
+        <p:spPr>
+          <a:xfrm>
+            <a:off x="457200" y="384048"/>
+            <a:ext cx="109728" cy="658368"/>
+          </a:xfrm>
+          <a:prstGeom prst="rect">
+            <a:avLst/>
+          </a:prstGeom>
+          <a:solidFill>
+            <a:srgbClr val="1E40AF"/>
+          </a:solidFill>
+          <a:ln>
+            <a:noFill/>
+          </a:ln>
+          <a:effectLst/>
+        </p:spPr>
+        <p:style>
+          <a:lnRef idx="1">
+            <a:schemeClr val="accent1"/>
+          </a:lnRef>
+          <a:fillRef idx="3">
+            <a:schemeClr val="accent1"/>
+          </a:fillRef>
+          <a:effectRef idx="2">
+            <a:schemeClr val="accent1"/>
+          </a:effectRef>
+          <a:fontRef idx="minor">
+            <a:schemeClr val="lt1"/>
+          </a:fontRef>
+        </p:style>
+        <p:txBody>
+          <a:bodyPr rtlCol="0" anchor="ctr"/>
+          <a:lstStyle/>
+          <a:p>
+            <a:pPr algn="ctr"/>
+          </a:p>
+        </p:txBody>
+      </p:sp>
+      <p:sp>
+        <p:nvSpPr>
+          <p:cNvPr id="3" name="Rounded Rectangle 2"/>
+          <p:cNvSpPr/>
+          <p:nvPr/>
+        </p:nvSpPr>
+        <p:spPr>
+          <a:xfrm>
+            <a:off x="10097719" y="457200"/>
+            <a:ext cx="1545336" cy="457200"/>
+          </a:xfrm>
+          <a:prstGeom prst="roundRect">
+            <a:avLst/>
+          </a:prstGeom>
+          <a:solidFill>
+            <a:srgbClr val="991B1B"/>
+          </a:solidFill>
+          <a:ln>
+            <a:noFill/>
+          </a:ln>
+          <a:effectLst/>
+        </p:spPr>
+        <p:style>
+          <a:lnRef idx="1">
+            <a:schemeClr val="accent1"/>
+          </a:lnRef>
+          <a:fillRef idx="3">
+            <a:schemeClr val="accent1"/>
+          </a:fillRef>
+          <a:effectRef idx="2">
+            <a:schemeClr val="accent1"/>
+          </a:effectRef>
+          <a:fontRef idx="minor">
+            <a:schemeClr val="lt1"/>
+          </a:fontRef>
+        </p:style>
+        <p:txBody>
+          <a:bodyPr rtlCol="0" anchor="ctr" wrap="none" tIns="0" bIns="0"/>
+          <a:lstStyle/>
+          <a:p>
+            <a:pPr algn="ctr"/>
+            <a:r>
+              <a:rPr sz="1400" b="1">
+                <a:solidFill>
+                  <a:srgbClr val="FFFFFF"/>
+                </a:solidFill>
+                <a:latin typeface="Arial"/>
+              </a:rPr>
+              <a:t>CỦNG CỐ</a:t>
+            </a:r>
+          </a:p>
+        </p:txBody>
+      </p:sp>
+      <p:sp>
+        <p:nvSpPr>
+          <p:cNvPr id="4" name="TextBox 3"/>
+          <p:cNvSpPr txBox="1"/>
+          <p:nvPr/>
+        </p:nvSpPr>
+        <p:spPr>
+          <a:xfrm>
+            <a:off x="731520" y="274320"/>
+            <a:ext cx="9427464" cy="868680"/>
+          </a:xfrm>
+          <a:prstGeom prst="rect">
+            <a:avLst/>
+          </a:prstGeom>
+          <a:noFill/>
+        </p:spPr>
+        <p:txBody>
+          <a:bodyPr wrap="square" anchor="ctr">
+            <a:spAutoFit/>
+          </a:bodyPr>
+          <a:lstStyle/>
+          <a:p>
+            <a:r>
+              <a:rPr sz="3600" b="1">
+                <a:solidFill>
+                  <a:srgbClr val="1E40AF"/>
+                </a:solidFill>
+                <a:latin typeface="Arial"/>
+              </a:rPr>
+              <a:t>BÀI TẬP CỦA BẠN</a:t>
+            </a:r>
+          </a:p>
+        </p:txBody>
+      </p:sp>
+      <p:sp>
+        <p:nvSpPr>
+          <p:cNvPr id="5" name="Rectangle 4"/>
+          <p:cNvSpPr/>
+          <p:nvPr/>
+        </p:nvSpPr>
+        <p:spPr>
+          <a:xfrm>
+            <a:off x="457200" y="1207008"/>
+            <a:ext cx="11274552" cy="22000"/>
+          </a:xfrm>
+          <a:prstGeom prst="rect">
+            <a:avLst/>
+          </a:prstGeom>
+          <a:solidFill>
+            <a:srgbClr val="E2E8F0"/>
+          </a:solidFill>
+          <a:ln>
+            <a:noFill/>
+          </a:ln>
+          <a:effectLst/>
+        </p:spPr>
+        <p:style>
+          <a:lnRef idx="1">
+            <a:schemeClr val="accent1"/>
+          </a:lnRef>
+          <a:fillRef idx="3">
+            <a:schemeClr val="accent1"/>
+          </a:fillRef>
+          <a:effectRef idx="2">
+            <a:schemeClr val="accent1"/>
+          </a:effectRef>
+          <a:fontRef idx="minor">
+            <a:schemeClr val="lt1"/>
+          </a:fontRef>
+        </p:style>
+        <p:txBody>
+          <a:bodyPr rtlCol="0" anchor="ctr"/>
+          <a:lstStyle/>
+          <a:p>
+            <a:pPr algn="ctr"/>
+          </a:p>
+        </p:txBody>
+      </p:sp>
+      <p:sp>
+        <p:nvSpPr>
+          <p:cNvPr id="6" name="TextBox 5"/>
+          <p:cNvSpPr txBox="1"/>
+          <p:nvPr/>
+        </p:nvSpPr>
+        <p:spPr>
+          <a:xfrm>
+            <a:off x="457200" y="6355080"/>
+            <a:ext cx="11274552" cy="365760"/>
+          </a:xfrm>
+          <a:prstGeom prst="rect">
+            <a:avLst/>
+          </a:prstGeom>
+          <a:noFill/>
+        </p:spPr>
+        <p:txBody>
+          <a:bodyPr wrap="none">
+            <a:spAutoFit/>
+          </a:bodyPr>
+          <a:lstStyle/>
+          <a:p>
+            <a:pPr algn="r"/>
+            <a:r>
+              <a:rPr sz="1200">
+                <a:solidFill>
+                  <a:srgbClr val="64748B"/>
+                </a:solidFill>
+                <a:latin typeface="Calibri"/>
+              </a:rPr>
+              <a:t>Ngữ văn 11 · Bài 1: Câu Chuyện Và Điểm Nhìn Trong Truyện Kể          44</a:t>
             </a:r>
           </a:p>
         </p:txBody>
@@ -17925,14 +19262,14 @@
         </p:nvSpPr>
         <p:spPr>
           <a:xfrm>
-            <a:off x="10097719" y="457200"/>
-            <a:ext cx="1545336" cy="457200"/>
+            <a:off x="10408615" y="457200"/>
+            <a:ext cx="1234440" cy="457200"/>
           </a:xfrm>
           <a:prstGeom prst="roundRect">
             <a:avLst/>
           </a:prstGeom>
           <a:solidFill>
-            <a:srgbClr val="166534"/>
+            <a:srgbClr val="991B1B"/>
           </a:solidFill>
           <a:ln>
             <a:noFill/>
@@ -17965,7 +19302,7 @@
                 </a:solidFill>
                 <a:latin typeface="Arial"/>
               </a:rPr>
-              <a:t>GHI NHỚ</a:t>
+              <a:t>VIDEO</a:t>
             </a:r>
           </a:p>
         </p:txBody>
@@ -17979,7 +19316,7 @@
         <p:spPr>
           <a:xfrm>
             <a:off x="731520" y="274320"/>
-            <a:ext cx="9427464" cy="868680"/>
+            <a:ext cx="9738360" cy="868680"/>
           </a:xfrm>
           <a:prstGeom prst="rect">
             <a:avLst/>
@@ -17999,7 +19336,7 @@
                 </a:solidFill>
                 <a:latin typeface="Arial"/>
               </a:rPr>
-              <a:t>TRI THỨC NGỮ VĂN</a:t>
+              <a:t>VIDEO THAM KHẢO</a:t>
             </a:r>
           </a:p>
         </p:txBody>
@@ -18083,16 +19420,40 @@
           </a:p>
         </p:txBody>
       </p:sp>
-      <p:sp>
-        <p:nvSpPr>
-          <p:cNvPr id="7" name="TextBox 6"/>
+      <p:pic>
+        <p:nvPicPr>
+          <p:cNvPr id="7" name="Picture 6" descr="QR_video_l00C8vSGTso.png"/>
+          <p:cNvPicPr>
+            <a:picLocks noChangeAspect="1"/>
+          </p:cNvPicPr>
+          <p:nvPr/>
+        </p:nvPicPr>
+        <p:blipFill>
+          <a:blip r:embed="rId2"/>
+          <a:stretch>
+            <a:fillRect/>
+          </a:stretch>
+        </p:blipFill>
+        <p:spPr>
+          <a:xfrm>
+            <a:off x="8412480" y="1554480"/>
+            <a:ext cx="3108960" cy="3108960"/>
+          </a:xfrm>
+          <a:prstGeom prst="rect">
+            <a:avLst/>
+          </a:prstGeom>
+        </p:spPr>
+      </p:pic>
+      <p:sp>
+        <p:nvSpPr>
+          <p:cNvPr id="8" name="TextBox 7"/>
           <p:cNvSpPr txBox="1"/>
           <p:nvPr/>
         </p:nvSpPr>
         <p:spPr>
           <a:xfrm>
-            <a:off x="731520" y="1463040"/>
-            <a:ext cx="10789920" cy="4754880"/>
+            <a:off x="731520" y="1554480"/>
+            <a:ext cx="7498079" cy="4206240"/>
           </a:xfrm>
           <a:prstGeom prst="rect">
             <a:avLst/>
@@ -18104,6 +19465,38 @@
             <a:spAutoFit/>
           </a:bodyPr>
           <a:lstStyle/>
+          <a:p>
+            <a:pPr algn="l">
+              <a:spcAft>
+                <a:spcPts val="800"/>
+              </a:spcAft>
+            </a:pPr>
+            <a:r>
+              <a:rPr sz="2600" b="1">
+                <a:solidFill>
+                  <a:srgbClr val="1E293B"/>
+                </a:solidFill>
+                <a:latin typeface="Calibri"/>
+              </a:rPr>
+              <a:t>🎬 Phim tài liệu đặc biệt: Nạn đói khủng khiếp năm 1945</a:t>
+            </a:r>
+          </a:p>
+          <a:p>
+            <a:pPr algn="l">
+              <a:spcAft>
+                <a:spcPts val="800"/>
+              </a:spcAft>
+            </a:pPr>
+            <a:r>
+              <a:rPr sz="2000">
+                <a:solidFill>
+                  <a:srgbClr val="64748B"/>
+                </a:solidFill>
+                <a:latin typeface="Calibri"/>
+              </a:rPr>
+              <a:t>Kênh: Trực tiếp TV</a:t>
+            </a:r>
+          </a:p>
           <a:p>
             <a:pPr algn="l" marL="365760" indent="-365760">
               <a:spcAft>
@@ -18116,103 +19509,30 @@
               <a:buChar char="•"/>
             </a:pPr>
             <a:r>
-              <a:rPr sz="2400" b="1">
+              <a:rPr sz="2000">
                 <a:solidFill>
                   <a:srgbClr val="1E293B"/>
                 </a:solidFill>
                 <a:latin typeface="Calibri"/>
               </a:rPr>
-              <a:t>Câu chuyện</a:t>
-            </a:r>
-            <a:r>
-              <a:rPr sz="2400">
-                <a:solidFill>
-                  <a:srgbClr val="1E293B"/>
-                </a:solidFill>
-                <a:latin typeface="Calibri"/>
-              </a:rPr>
-              <a:t>: nhân vật, bối cảnh, sự kiện theo trật tự thời gian.</a:t>
-            </a:r>
-          </a:p>
-          <a:p>
-            <a:pPr algn="l" marL="365760" indent="-365760">
+              <a:t>Hoạt động Mở đầu – Vợ nhặt (chiếu trích đoạn 2–3 phút)</a:t>
+            </a:r>
+          </a:p>
+          <a:p>
+            <a:pPr algn="l">
               <a:spcAft>
                 <a:spcPts val="800"/>
               </a:spcAft>
-              <a:buClr>
-                <a:srgbClr val="1E40AF"/>
-              </a:buClr>
-              <a:buFont typeface="Arial"/>
-              <a:buChar char="•"/>
             </a:pPr>
             <a:r>
-              <a:rPr sz="2400" b="1">
-                <a:solidFill>
-                  <a:srgbClr val="1E293B"/>
+              <a:rPr sz="1600">
+                <a:solidFill>
+                  <a:srgbClr val="64748B"/>
                 </a:solidFill>
                 <a:latin typeface="Calibri"/>
-              </a:rPr>
-              <a:t>Truyện kể</a:t>
-            </a:r>
-            <a:r>
-              <a:rPr sz="2400">
-                <a:solidFill>
-                  <a:srgbClr val="1E293B"/>
-                </a:solidFill>
-                <a:latin typeface="Calibri"/>
-              </a:rPr>
-              <a:t>: sự kiện tổ chức theo mạch kể, gắn người kể chuyện, điểm nhìn, lời văn.</a:t>
-            </a:r>
-          </a:p>
-          <a:p>
-            <a:pPr algn="l" marL="365760" indent="-365760">
-              <a:spcAft>
-                <a:spcPts val="800"/>
-              </a:spcAft>
-              <a:buClr>
-                <a:srgbClr val="1E40AF"/>
-              </a:buClr>
-              <a:buFont typeface="Arial"/>
-              <a:buChar char="•"/>
-            </a:pPr>
-            <a:r>
-              <a:rPr sz="2400" b="1">
-                <a:solidFill>
-                  <a:srgbClr val="1E293B"/>
-                </a:solidFill>
-                <a:latin typeface="Calibri"/>
-              </a:rPr>
-              <a:t>Điểm nhìn</a:t>
-            </a:r>
-            <a:r>
-              <a:rPr sz="2400">
-                <a:solidFill>
-                  <a:srgbClr val="1E293B"/>
-                </a:solidFill>
-                <a:latin typeface="Calibri"/>
-              </a:rPr>
-              <a:t>: vị trí để quan sát, trần thuật, đánh giá.</a:t>
-            </a:r>
-          </a:p>
-          <a:p>
-            <a:pPr algn="l" marL="365760" indent="-365760">
-              <a:spcAft>
-                <a:spcPts val="800"/>
-              </a:spcAft>
-              <a:buClr>
-                <a:srgbClr val="1E40AF"/>
-              </a:buClr>
-              <a:buFont typeface="Arial"/>
-              <a:buChar char="•"/>
-            </a:pPr>
-            <a:r>
-              <a:rPr sz="2400">
-                <a:solidFill>
-                  <a:srgbClr val="1E293B"/>
-                </a:solidFill>
-                <a:latin typeface="Calibri"/>
-              </a:rPr>
-              <a:t>Bên ngoài (ngoại hiện) – bên trong (qua cảm nhận, ý thức nhân vật).</a:t>
+                <a:hlinkClick r:id="rId3"/>
+              </a:rPr>
+              <a:t>https://www.youtube.com/watch?v=l00C8vSGTso</a:t>
             </a:r>
           </a:p>
         </p:txBody>
@@ -18295,14 +19615,14 @@
         </p:nvSpPr>
         <p:spPr>
           <a:xfrm>
-            <a:off x="10253167" y="457200"/>
-            <a:ext cx="1389888" cy="457200"/>
+            <a:off x="10097719" y="457200"/>
+            <a:ext cx="1545336" cy="457200"/>
           </a:xfrm>
           <a:prstGeom prst="roundRect">
             <a:avLst/>
           </a:prstGeom>
           <a:solidFill>
-            <a:srgbClr val="1E40AF"/>
+            <a:srgbClr val="166534"/>
           </a:solidFill>
           <a:ln>
             <a:noFill/>
@@ -18335,7 +19655,7 @@
                 </a:solidFill>
                 <a:latin typeface="Arial"/>
               </a:rPr>
-              <a:t>ĐỀ BÀI</a:t>
+              <a:t>GHI NHỚ</a:t>
             </a:r>
           </a:p>
         </p:txBody>
@@ -18349,7 +19669,7 @@
         <p:spPr>
           <a:xfrm>
             <a:off x="731520" y="274320"/>
-            <a:ext cx="9582912" cy="868680"/>
+            <a:ext cx="9427464" cy="868680"/>
           </a:xfrm>
           <a:prstGeom prst="rect">
             <a:avLst/>
@@ -18369,7 +19689,7 @@
                 </a:solidFill>
                 <a:latin typeface="Arial"/>
               </a:rPr>
-              <a:t>NHAN ĐỀ VỢ NHẶT</a:t>
+              <a:t>TRI THỨC NGỮ VĂN</a:t>
             </a:r>
           </a:p>
         </p:txBody>
@@ -18462,7 +19782,7 @@
         <p:spPr>
           <a:xfrm>
             <a:off x="731520" y="1463040"/>
-            <a:ext cx="10789920" cy="3566160"/>
+            <a:ext cx="10789920" cy="4754880"/>
           </a:xfrm>
           <a:prstGeom prst="rect">
             <a:avLst/>
@@ -18475,124 +19795,114 @@
           </a:bodyPr>
           <a:lstStyle/>
           <a:p>
-            <a:pPr algn="l">
+            <a:pPr algn="l" marL="365760" indent="-365760">
               <a:spcAft>
                 <a:spcPts val="800"/>
               </a:spcAft>
+              <a:buClr>
+                <a:srgbClr val="1E40AF"/>
+              </a:buClr>
+              <a:buFont typeface="Arial"/>
+              <a:buChar char="•"/>
             </a:pPr>
             <a:r>
-              <a:rPr sz="2600" b="1">
+              <a:rPr sz="2400" b="1">
                 <a:solidFill>
                   <a:srgbClr val="1E293B"/>
                 </a:solidFill>
                 <a:latin typeface="Calibri"/>
               </a:rPr>
-              <a:t>Giữa nhan đề </a:t>
-            </a:r>
-            <a:r>
-              <a:rPr sz="2600" b="1">
+              <a:t>Câu chuyện</a:t>
+            </a:r>
+            <a:r>
+              <a:rPr sz="2400">
                 <a:solidFill>
                   <a:srgbClr val="1E293B"/>
                 </a:solidFill>
                 <a:latin typeface="Calibri"/>
               </a:rPr>
-              <a:t>Vợ nhặt</a:t>
-            </a:r>
-            <a:r>
-              <a:rPr sz="2600" b="1">
+              <a:t>: nhân vật, bối cảnh, sự kiện theo trật tự thời gian.</a:t>
+            </a:r>
+          </a:p>
+          <a:p>
+            <a:pPr algn="l" marL="365760" indent="-365760">
+              <a:spcAft>
+                <a:spcPts val="800"/>
+              </a:spcAft>
+              <a:buClr>
+                <a:srgbClr val="1E40AF"/>
+              </a:buClr>
+              <a:buFont typeface="Arial"/>
+              <a:buChar char="•"/>
+            </a:pPr>
+            <a:r>
+              <a:rPr sz="2400" b="1">
                 <a:solidFill>
                   <a:srgbClr val="1E293B"/>
                 </a:solidFill>
                 <a:latin typeface="Calibri"/>
               </a:rPr>
-              <a:t> và nội dung câu chuyện có mối quan hệ với nhau như thế nào?</a:t>
-            </a:r>
-          </a:p>
-        </p:txBody>
-      </p:sp>
-      <p:sp>
-        <p:nvSpPr>
-          <p:cNvPr id="8" name="Rounded Rectangle 7"/>
-          <p:cNvSpPr/>
-          <p:nvPr/>
-        </p:nvSpPr>
-        <p:spPr>
-          <a:xfrm>
-            <a:off x="731520" y="5120640"/>
-            <a:ext cx="10789920" cy="693420"/>
-          </a:xfrm>
-          <a:prstGeom prst="roundRect">
-            <a:avLst>
-              <a:gd name="adj" fmla="val 8000"/>
-            </a:avLst>
-          </a:prstGeom>
-          <a:solidFill>
-            <a:srgbClr val="EFF4FF"/>
-          </a:solidFill>
-          <a:ln w="19050">
-            <a:solidFill>
-              <a:srgbClr val="1E40AF"/>
-            </a:solidFill>
-          </a:ln>
-          <a:effectLst/>
-        </p:spPr>
-        <p:style>
-          <a:lnRef idx="1">
-            <a:schemeClr val="accent1"/>
-          </a:lnRef>
-          <a:fillRef idx="3">
-            <a:schemeClr val="accent1"/>
-          </a:fillRef>
-          <a:effectRef idx="2">
-            <a:schemeClr val="accent1"/>
-          </a:effectRef>
-          <a:fontRef idx="minor">
-            <a:schemeClr val="lt1"/>
-          </a:fontRef>
-        </p:style>
-        <p:txBody>
-          <a:bodyPr rtlCol="0" anchor="ctr"/>
-          <a:lstStyle/>
-          <a:p>
-            <a:pPr algn="ctr"/>
-          </a:p>
-        </p:txBody>
-      </p:sp>
-      <p:sp>
-        <p:nvSpPr>
-          <p:cNvPr id="9" name="TextBox 8"/>
-          <p:cNvSpPr txBox="1"/>
-          <p:nvPr/>
-        </p:nvSpPr>
-        <p:spPr>
-          <a:xfrm>
-            <a:off x="914400" y="5120640"/>
-            <a:ext cx="10424160" cy="693420"/>
-          </a:xfrm>
-          <a:prstGeom prst="rect">
-            <a:avLst/>
-          </a:prstGeom>
-          <a:noFill/>
-        </p:spPr>
-        <p:txBody>
-          <a:bodyPr wrap="square" anchor="ctr" lIns="45720" rIns="45720">
-            <a:spAutoFit/>
-          </a:bodyPr>
-          <a:lstStyle/>
-          <a:p>
-            <a:pPr algn="l">
+              <a:t>Truyện kể</a:t>
+            </a:r>
+            <a:r>
+              <a:rPr sz="2400">
+                <a:solidFill>
+                  <a:srgbClr val="1E293B"/>
+                </a:solidFill>
+                <a:latin typeface="Calibri"/>
+              </a:rPr>
+              <a:t>: sự kiện tổ chức theo mạch kể, gắn người kể chuyện, điểm nhìn, lời văn.</a:t>
+            </a:r>
+          </a:p>
+          <a:p>
+            <a:pPr algn="l" marL="365760" indent="-365760">
               <a:spcAft>
-                <a:spcPts val="400"/>
+                <a:spcPts val="800"/>
               </a:spcAft>
+              <a:buClr>
+                <a:srgbClr val="1E40AF"/>
+              </a:buClr>
+              <a:buFont typeface="Arial"/>
+              <a:buChar char="•"/>
             </a:pPr>
             <a:r>
-              <a:rPr sz="2200" b="1">
-                <a:solidFill>
-                  <a:srgbClr val="1E40AF"/>
+              <a:rPr sz="2400" b="1">
+                <a:solidFill>
+                  <a:srgbClr val="1E293B"/>
                 </a:solidFill>
                 <a:latin typeface="Calibri"/>
               </a:rPr>
-              <a:t>💡 Gợi ý: “vợ” là việc hệ trọng; “nhặt” gợi điều gì?</a:t>
+              <a:t>Điểm nhìn</a:t>
+            </a:r>
+            <a:r>
+              <a:rPr sz="2400">
+                <a:solidFill>
+                  <a:srgbClr val="1E293B"/>
+                </a:solidFill>
+                <a:latin typeface="Calibri"/>
+              </a:rPr>
+              <a:t>: vị trí để quan sát, trần thuật, đánh giá.</a:t>
+            </a:r>
+          </a:p>
+          <a:p>
+            <a:pPr algn="l" marL="365760" indent="-365760">
+              <a:spcAft>
+                <a:spcPts val="800"/>
+              </a:spcAft>
+              <a:buClr>
+                <a:srgbClr val="1E40AF"/>
+              </a:buClr>
+              <a:buFont typeface="Arial"/>
+              <a:buChar char="•"/>
+            </a:pPr>
+            <a:r>
+              <a:rPr sz="2400">
+                <a:solidFill>
+                  <a:srgbClr val="1E293B"/>
+                </a:solidFill>
+                <a:latin typeface="Calibri"/>
+              </a:rPr>
+              <a:t>Bên ngoài (ngoại hiện) – bên trong (qua cảm nhận, ý thức nhân vật).</a:t>
             </a:r>
           </a:p>
         </p:txBody>
@@ -18675,8 +19985,8 @@
         </p:nvSpPr>
         <p:spPr>
           <a:xfrm>
-            <a:off x="9942271" y="457200"/>
-            <a:ext cx="1700784" cy="457200"/>
+            <a:off x="10408615" y="457200"/>
+            <a:ext cx="1234440" cy="457200"/>
           </a:xfrm>
           <a:prstGeom prst="roundRect">
             <a:avLst/>
@@ -18715,7 +20025,7 @@
                 </a:solidFill>
                 <a:latin typeface="Arial"/>
               </a:rPr>
-              <a:t>LỜI GIẢI</a:t>
+              <a:t>VIDEO</a:t>
             </a:r>
           </a:p>
         </p:txBody>
@@ -18729,7 +20039,7 @@
         <p:spPr>
           <a:xfrm>
             <a:off x="731520" y="274320"/>
-            <a:ext cx="9272016" cy="868680"/>
+            <a:ext cx="9738360" cy="868680"/>
           </a:xfrm>
           <a:prstGeom prst="rect">
             <a:avLst/>
@@ -18749,7 +20059,7 @@
                 </a:solidFill>
                 <a:latin typeface="Arial"/>
               </a:rPr>
-              <a:t>NHAN ĐỀ VỢ NHẶT</a:t>
+              <a:t>VIDEO THAM KHẢO</a:t>
             </a:r>
           </a:p>
         </p:txBody>
@@ -18833,16 +20143,40 @@
           </a:p>
         </p:txBody>
       </p:sp>
-      <p:sp>
-        <p:nvSpPr>
-          <p:cNvPr id="7" name="TextBox 6"/>
+      <p:pic>
+        <p:nvPicPr>
+          <p:cNvPr id="7" name="Picture 6" descr="QR_video_6PGr8iYB83I.png"/>
+          <p:cNvPicPr>
+            <a:picLocks noChangeAspect="1"/>
+          </p:cNvPicPr>
+          <p:nvPr/>
+        </p:nvPicPr>
+        <p:blipFill>
+          <a:blip r:embed="rId2"/>
+          <a:stretch>
+            <a:fillRect/>
+          </a:stretch>
+        </p:blipFill>
+        <p:spPr>
+          <a:xfrm>
+            <a:off x="8412480" y="1554480"/>
+            <a:ext cx="3108960" cy="3108960"/>
+          </a:xfrm>
+          <a:prstGeom prst="rect">
+            <a:avLst/>
+          </a:prstGeom>
+        </p:spPr>
+      </p:pic>
+      <p:sp>
+        <p:nvSpPr>
+          <p:cNvPr id="8" name="TextBox 7"/>
           <p:cNvSpPr txBox="1"/>
           <p:nvPr/>
         </p:nvSpPr>
         <p:spPr>
           <a:xfrm>
-            <a:off x="731520" y="1463040"/>
-            <a:ext cx="10789920" cy="3474720"/>
+            <a:off x="731520" y="1554480"/>
+            <a:ext cx="7498079" cy="4206240"/>
           </a:xfrm>
           <a:prstGeom prst="rect">
             <a:avLst/>
@@ -18854,6 +20188,38 @@
             <a:spAutoFit/>
           </a:bodyPr>
           <a:lstStyle/>
+          <a:p>
+            <a:pPr algn="l">
+              <a:spcAft>
+                <a:spcPts val="800"/>
+              </a:spcAft>
+            </a:pPr>
+            <a:r>
+              <a:rPr sz="2600" b="1">
+                <a:solidFill>
+                  <a:srgbClr val="1E293B"/>
+                </a:solidFill>
+                <a:latin typeface="Calibri"/>
+              </a:rPr>
+              <a:t>🎬 Tác phẩm: Truyện ngắn Vợ nhặt – Nhà văn Kim Lân</a:t>
+            </a:r>
+          </a:p>
+          <a:p>
+            <a:pPr algn="l">
+              <a:spcAft>
+                <a:spcPts val="800"/>
+              </a:spcAft>
+            </a:pPr>
+            <a:r>
+              <a:rPr sz="2000">
+                <a:solidFill>
+                  <a:srgbClr val="64748B"/>
+                </a:solidFill>
+                <a:latin typeface="Calibri"/>
+              </a:rPr>
+              <a:t>Kênh: Văn học Việt Nam và Thế giới</a:t>
+            </a:r>
+          </a:p>
           <a:p>
             <a:pPr algn="l" marL="365760" indent="-365760">
               <a:spcAft>
@@ -18866,142 +20232,30 @@
               <a:buChar char="•"/>
             </a:pPr>
             <a:r>
-              <a:rPr sz="2300">
+              <a:rPr sz="2000">
                 <a:solidFill>
                   <a:srgbClr val="1E293B"/>
                 </a:solidFill>
                 <a:latin typeface="Calibri"/>
               </a:rPr>
-              <a:t>“Vợ” – việc trọng đại của đời người; “nhặt” – nhặt nhạnh, rẻ rúng.</a:t>
-            </a:r>
-          </a:p>
-          <a:p>
-            <a:pPr algn="l" marL="365760" indent="-365760">
+              <a:t>Đọc văn bản ở nhà (nghe toàn văn truyện)</a:t>
+            </a:r>
+          </a:p>
+          <a:p>
+            <a:pPr algn="l">
               <a:spcAft>
                 <a:spcPts val="800"/>
               </a:spcAft>
-              <a:buClr>
-                <a:srgbClr val="1E40AF"/>
-              </a:buClr>
-              <a:buFont typeface="Arial"/>
-              <a:buChar char="•"/>
             </a:pPr>
             <a:r>
-              <a:rPr sz="2300">
-                <a:solidFill>
-                  <a:srgbClr val="1E293B"/>
+              <a:rPr sz="1600">
+                <a:solidFill>
+                  <a:srgbClr val="64748B"/>
                 </a:solidFill>
                 <a:latin typeface="Calibri"/>
-              </a:rPr>
-              <a:t>Giá trị con người bị rẻ rúng trong nạn đói.</a:t>
-            </a:r>
-          </a:p>
-          <a:p>
-            <a:pPr algn="l" marL="365760" indent="-365760">
-              <a:spcAft>
-                <a:spcPts val="800"/>
-              </a:spcAft>
-              <a:buClr>
-                <a:srgbClr val="1E40AF"/>
-              </a:buClr>
-              <a:buFont typeface="Arial"/>
-              <a:buChar char="•"/>
-            </a:pPr>
-            <a:r>
-              <a:rPr sz="2300">
-                <a:solidFill>
-                  <a:srgbClr val="1E293B"/>
-                </a:solidFill>
-                <a:latin typeface="Calibri"/>
-              </a:rPr>
-              <a:t>Nhưng “nhặt” cũng là cưu mang, mở ra khát vọng sống.</a:t>
-            </a:r>
-          </a:p>
-        </p:txBody>
-      </p:sp>
-      <p:sp>
-        <p:nvSpPr>
-          <p:cNvPr id="8" name="Rounded Rectangle 7"/>
-          <p:cNvSpPr/>
-          <p:nvPr/>
-        </p:nvSpPr>
-        <p:spPr>
-          <a:xfrm>
-            <a:off x="731520" y="5074920"/>
-            <a:ext cx="10789920" cy="731520"/>
-          </a:xfrm>
-          <a:prstGeom prst="roundRect">
-            <a:avLst>
-              <a:gd name="adj" fmla="val 8000"/>
-            </a:avLst>
-          </a:prstGeom>
-          <a:solidFill>
-            <a:srgbClr val="FEF2F2"/>
-          </a:solidFill>
-          <a:ln w="19050">
-            <a:solidFill>
-              <a:srgbClr val="991B1B"/>
-            </a:solidFill>
-          </a:ln>
-          <a:effectLst/>
-        </p:spPr>
-        <p:style>
-          <a:lnRef idx="1">
-            <a:schemeClr val="accent1"/>
-          </a:lnRef>
-          <a:fillRef idx="3">
-            <a:schemeClr val="accent1"/>
-          </a:fillRef>
-          <a:effectRef idx="2">
-            <a:schemeClr val="accent1"/>
-          </a:effectRef>
-          <a:fontRef idx="minor">
-            <a:schemeClr val="lt1"/>
-          </a:fontRef>
-        </p:style>
-        <p:txBody>
-          <a:bodyPr rtlCol="0" anchor="ctr"/>
-          <a:lstStyle/>
-          <a:p>
-            <a:pPr algn="ctr"/>
-          </a:p>
-        </p:txBody>
-      </p:sp>
-      <p:sp>
-        <p:nvSpPr>
-          <p:cNvPr id="9" name="TextBox 8"/>
-          <p:cNvSpPr txBox="1"/>
-          <p:nvPr/>
-        </p:nvSpPr>
-        <p:spPr>
-          <a:xfrm>
-            <a:off x="914400" y="5074920"/>
-            <a:ext cx="10424160" cy="731520"/>
-          </a:xfrm>
-          <a:prstGeom prst="rect">
-            <a:avLst/>
-          </a:prstGeom>
-          <a:noFill/>
-        </p:spPr>
-        <p:txBody>
-          <a:bodyPr wrap="square" anchor="ctr" lIns="45720" rIns="45720">
-            <a:spAutoFit/>
-          </a:bodyPr>
-          <a:lstStyle/>
-          <a:p>
-            <a:pPr algn="l">
-              <a:spcAft>
-                <a:spcPts val="400"/>
-              </a:spcAft>
-            </a:pPr>
-            <a:r>
-              <a:rPr sz="2400" b="1">
-                <a:solidFill>
-                  <a:srgbClr val="991B1B"/>
-                </a:solidFill>
-                <a:latin typeface="Calibri"/>
-              </a:rPr>
-              <a:t>Nhan đề vừa tố cáo nạn đói, vừa ngợi ca tình người.</a:t>
+                <a:hlinkClick r:id="rId3"/>
+              </a:rPr>
+              <a:t>https://www.youtube.com/watch?v=6PGr8iYB83I</a:t>
             </a:r>
           </a:p>
         </p:txBody>
@@ -19158,7 +20412,7 @@
                 </a:solidFill>
                 <a:latin typeface="Arial"/>
               </a:rPr>
-              <a:t>TÌNH HUỐNG TRUYỆN</a:t>
+              <a:t>NHAN ĐỀ VỢ NHẶT</a:t>
             </a:r>
           </a:p>
         </p:txBody>
@@ -19276,7 +20530,25 @@
                 </a:solidFill>
                 <a:latin typeface="Calibri"/>
               </a:rPr>
-              <a:t>Xác định tình huống truyện và nêu ý nghĩa của nó.</a:t>
+              <a:t>Giữa nhan đề </a:t>
+            </a:r>
+            <a:r>
+              <a:rPr sz="2600" b="1">
+                <a:solidFill>
+                  <a:srgbClr val="1E293B"/>
+                </a:solidFill>
+                <a:latin typeface="Calibri"/>
+              </a:rPr>
+              <a:t>Vợ nhặt</a:t>
+            </a:r>
+            <a:r>
+              <a:rPr sz="2600" b="1">
+                <a:solidFill>
+                  <a:srgbClr val="1E293B"/>
+                </a:solidFill>
+                <a:latin typeface="Calibri"/>
+              </a:rPr>
+              <a:t> và nội dung câu chuyện có mối quan hệ với nhau như thế nào?</a:t>
             </a:r>
           </a:p>
         </p:txBody>
@@ -19363,7 +20635,7 @@
                 </a:solidFill>
                 <a:latin typeface="Calibri"/>
               </a:rPr>
-              <a:t>💡 Chú ý phản ứng của dân xóm, bà cụ Tứ và chính Tràng.</a:t>
+              <a:t>💡 Gợi ý: “vợ” là việc hệ trọng; “nhặt” gợi điều gì?</a:t>
             </a:r>
           </a:p>
         </p:txBody>
@@ -19520,7 +20792,7 @@
                 </a:solidFill>
                 <a:latin typeface="Arial"/>
               </a:rPr>
-              <a:t>TÌNH HUỐNG TRUYỆN</a:t>
+              <a:t>NHAN ĐỀ VỢ NHẶT</a:t>
             </a:r>
           </a:p>
         </p:txBody>
@@ -19643,7 +20915,7 @@
                 </a:solidFill>
                 <a:latin typeface="Calibri"/>
               </a:rPr>
-              <a:t>Tràng – nghèo, xấu, dân ngụ cư – “nhặt” được vợ giữa nạn đói.</a:t>
+              <a:t>“Vợ” – việc trọng đại của đời người; “nhặt” – nhặt nhạnh, rẻ rúng.</a:t>
             </a:r>
           </a:p>
           <a:p>
@@ -19664,7 +20936,7 @@
                 </a:solidFill>
                 <a:latin typeface="Calibri"/>
               </a:rPr>
-              <a:t>Cả xóm ngạc nhiên; bà cụ Tứ ngạc nhiên, ai oán; Tràng “ngờ ngợ”.</a:t>
+              <a:t>Giá trị con người bị rẻ rúng trong nạn đói.</a:t>
             </a:r>
           </a:p>
           <a:p>
@@ -19685,7 +20957,7 @@
                 </a:solidFill>
                 <a:latin typeface="Calibri"/>
               </a:rPr>
-              <a:t>Tình huống vừa lạ, vừa éo le: hạnh phúc nảy sinh bên bờ cái chết.</a:t>
+              <a:t>Nhưng “nhặt” cũng là cưu mang, mở ra khát vọng sống.</a:t>
             </a:r>
           </a:p>
         </p:txBody>
@@ -19699,7 +20971,7 @@
         <p:spPr>
           <a:xfrm>
             <a:off x="731520" y="5074920"/>
-            <a:ext cx="10789920" cy="1188720"/>
+            <a:ext cx="10789920" cy="731520"/>
           </a:xfrm>
           <a:prstGeom prst="roundRect">
             <a:avLst>
@@ -19747,7 +21019,7 @@
         <p:spPr>
           <a:xfrm>
             <a:off x="914400" y="5074920"/>
-            <a:ext cx="10424160" cy="1188720"/>
+            <a:ext cx="10424160" cy="731520"/>
           </a:xfrm>
           <a:prstGeom prst="rect">
             <a:avLst/>
@@ -19772,7 +21044,7 @@
                 </a:solidFill>
                 <a:latin typeface="Calibri"/>
               </a:rPr>
-              <a:t>Bộc lộ thảm cảnh nạn đói và khát vọng sống, tình thương của con người.</a:t>
+              <a:t>Nhan đề vừa tố cáo nạn đói, vừa ngợi ca tình người.</a:t>
             </a:r>
           </a:p>
         </p:txBody>

--- a/mon/ngu_van/slide/lop11/Slide_NGUVAN11_Bai1_CauChuyenVaDiemNhin_T1-11.pptx
+++ b/mon/ngu_van/slide/lop11/Slide_NGUVAN11_Bai1_CauChuyenVaDiemNhin_T1-11.pptx
@@ -1175,7 +1175,7 @@
           <a:lstStyle/>
           <a:p>
             <a:r>
-              <a:t>Bấm vào đường link hoặc quét mã QR để mở video (cần Internet). Phim truyện dài; GV chọn trích đoạn bát cháo hành, không chiếu toàn bộ.</a:t>
+              <a:t>Bấm vào đường link hoặc quét mã QR để mở video (cần Internet). </a:t>
             </a:r>
           </a:p>
         </p:txBody>
@@ -2085,7 +2085,7 @@
           <a:lstStyle/>
           <a:p>
             <a:r>
-              <a:t>Bấm vào đường link hoặc quét mã QR để mở video (cần Internet). Phim tư liệu có hình ảnh nặng nề – chỉ chiếu trích đoạn ngắn.</a:t>
+              <a:t>Bấm vào đường link hoặc quét mã QR để mở video (cần Internet). Phim tư liệu có hình ảnh nặng nề – GV xem trước.</a:t>
             </a:r>
           </a:p>
         </p:txBody>
@@ -10864,7 +10864,7 @@
       </p:sp>
       <p:pic>
         <p:nvPicPr>
-          <p:cNvPr id="7" name="Picture 6" descr="QR_video_FShtDV29lXQ.png"/>
+          <p:cNvPr id="7" name="Picture 6" descr="QR_video_EDUX_REhg-0.png"/>
           <p:cNvPicPr>
             <a:picLocks noChangeAspect="1"/>
           </p:cNvPicPr>
@@ -10920,7 +10920,7 @@
                 </a:solidFill>
                 <a:latin typeface="Calibri"/>
               </a:rPr>
-              <a:t>🎬 Làng Vũ Đại ngày ấy (1982)</a:t>
+              <a:t>🎬 Trước giờ xem phim “Làng Vũ Đại ngày ấy”</a:t>
             </a:r>
           </a:p>
           <a:p>
@@ -10936,7 +10936,7 @@
                 </a:solidFill>
                 <a:latin typeface="Calibri"/>
               </a:rPr>
-              <a:t>Kênh: Sao Vàng</a:t>
+              <a:t>Kênh: VTV24</a:t>
             </a:r>
           </a:p>
           <a:p>
@@ -10957,7 +10957,7 @@
                 </a:solidFill>
                 <a:latin typeface="Calibri"/>
               </a:rPr>
-              <a:t>Mở đầu Chí Phèo – chiếu trích đoạn phim chuyển thể (Chí Phèo – Thị Nở)</a:t>
+              <a:t>Mở đầu Chí Phèo – giới thiệu phim chuyển thể từ tác phẩm Nam Cao</a:t>
             </a:r>
           </a:p>
           <a:p>
@@ -10974,7 +10974,7 @@
                 <a:latin typeface="Calibri"/>
                 <a:hlinkClick r:id="rId3"/>
               </a:rPr>
-              <a:t>https://www.youtube.com/watch?v=FShtDV29lXQ</a:t>
+              <a:t>https://www.youtube.com/watch?v=EDUX_REhg-0</a:t>
             </a:r>
           </a:p>
         </p:txBody>
@@ -19422,7 +19422,7 @@
       </p:sp>
       <p:pic>
         <p:nvPicPr>
-          <p:cNvPr id="7" name="Picture 6" descr="QR_video_l00C8vSGTso.png"/>
+          <p:cNvPr id="7" name="Picture 6" descr="QR_video_QTEXDAI5g2A.png"/>
           <p:cNvPicPr>
             <a:picLocks noChangeAspect="1"/>
           </p:cNvPicPr>
@@ -19478,7 +19478,7 @@
                 </a:solidFill>
                 <a:latin typeface="Calibri"/>
               </a:rPr>
-              <a:t>🎬 Phim tài liệu đặc biệt: Nạn đói khủng khiếp năm 1945</a:t>
+              <a:t>🎬 Nạn đói 1945: Thảm cảnh đầy nước mắt</a:t>
             </a:r>
           </a:p>
           <a:p>
@@ -19494,7 +19494,7 @@
                 </a:solidFill>
                 <a:latin typeface="Calibri"/>
               </a:rPr>
-              <a:t>Kênh: Trực tiếp TV</a:t>
+              <a:t>Kênh: Kênh VTC16 (Đài THVN)</a:t>
             </a:r>
           </a:p>
           <a:p>
@@ -19515,7 +19515,7 @@
                 </a:solidFill>
                 <a:latin typeface="Calibri"/>
               </a:rPr>
-              <a:t>Hoạt động Mở đầu – Vợ nhặt (chiếu trích đoạn 2–3 phút)</a:t>
+              <a:t>Hoạt động Mở đầu – Vợ nhặt (3 phút)</a:t>
             </a:r>
           </a:p>
           <a:p>
@@ -19532,7 +19532,7 @@
                 <a:latin typeface="Calibri"/>
                 <a:hlinkClick r:id="rId3"/>
               </a:rPr>
-              <a:t>https://www.youtube.com/watch?v=l00C8vSGTso</a:t>
+              <a:t>https://www.youtube.com/watch?v=QTEXDAI5g2A</a:t>
             </a:r>
           </a:p>
         </p:txBody>
@@ -20145,7 +20145,7 @@
       </p:sp>
       <p:pic>
         <p:nvPicPr>
-          <p:cNvPr id="7" name="Picture 6" descr="QR_video_6PGr8iYB83I.png"/>
+          <p:cNvPr id="7" name="Picture 6" descr="QR_video_g79uSESWGdA.png"/>
           <p:cNvPicPr>
             <a:picLocks noChangeAspect="1"/>
           </p:cNvPicPr>
@@ -20201,7 +20201,7 @@
                 </a:solidFill>
                 <a:latin typeface="Calibri"/>
               </a:rPr>
-              <a:t>🎬 Tác phẩm: Truyện ngắn Vợ nhặt – Nhà văn Kim Lân</a:t>
+              <a:t>🎬 Truyện ngắn Vợ nhặt – Kim Lân (Chương trình Thư viện sách nói)</a:t>
             </a:r>
           </a:p>
           <a:p>
@@ -20217,7 +20217,7 @@
                 </a:solidFill>
                 <a:latin typeface="Calibri"/>
               </a:rPr>
-              <a:t>Kênh: Văn học Việt Nam và Thế giới</a:t>
+              <a:t>Kênh: Thư viện Thành phố Bắc Giang</a:t>
             </a:r>
           </a:p>
           <a:p>
@@ -20238,7 +20238,7 @@
                 </a:solidFill>
                 <a:latin typeface="Calibri"/>
               </a:rPr>
-              <a:t>Đọc văn bản ở nhà (nghe toàn văn truyện)</a:t>
+              <a:t>Giao HS nghe toàn văn ở nhà</a:t>
             </a:r>
           </a:p>
           <a:p>
@@ -20255,7 +20255,7 @@
                 <a:latin typeface="Calibri"/>
                 <a:hlinkClick r:id="rId3"/>
               </a:rPr>
-              <a:t>https://www.youtube.com/watch?v=6PGr8iYB83I</a:t>
+              <a:t>https://www.youtube.com/watch?v=g79uSESWGdA</a:t>
             </a:r>
           </a:p>
         </p:txBody>

--- a/mon/ngu_van/slide/lop11/Slide_NGUVAN11_Bai1_CauChuyenVaDiemNhin_T1-11.pptx
+++ b/mon/ngu_van/slide/lop11/Slide_NGUVAN11_Bai1_CauChuyenVaDiemNhin_T1-11.pptx
@@ -6002,7 +6002,7 @@
                 </a:solidFill>
                 <a:latin typeface="Calibri"/>
               </a:rPr>
-              <a:t>Trường THPT Vĩnh Thạnh – Tổ Ngữ văn – Tiếng Anh</a:t>
+              <a:t>Trường THPT – Tổ Ngữ văn – Tiếng Anh</a:t>
             </a:r>
           </a:p>
         </p:txBody>
@@ -18479,103 +18479,6 @@
       <p:grpSpPr/>
       <p:sp>
         <p:nvSpPr>
-          <p:cNvPr id="2" name="Rectangle 1"/>
-          <p:cNvSpPr/>
-          <p:nvPr/>
-        </p:nvSpPr>
-        <p:spPr>
-          <a:xfrm>
-            <a:off x="457200" y="384048"/>
-            <a:ext cx="109728" cy="658368"/>
-          </a:xfrm>
-          <a:prstGeom prst="rect">
-            <a:avLst/>
-          </a:prstGeom>
-          <a:solidFill>
-            <a:srgbClr val="1E40AF"/>
-          </a:solidFill>
-          <a:ln>
-            <a:noFill/>
-          </a:ln>
-          <a:effectLst/>
-        </p:spPr>
-        <p:style>
-          <a:lnRef idx="1">
-            <a:schemeClr val="accent1"/>
-          </a:lnRef>
-          <a:fillRef idx="3">
-            <a:schemeClr val="accent1"/>
-          </a:fillRef>
-          <a:effectRef idx="2">
-            <a:schemeClr val="accent1"/>
-          </a:effectRef>
-          <a:fontRef idx="minor">
-            <a:schemeClr val="lt1"/>
-          </a:fontRef>
-        </p:style>
-        <p:txBody>
-          <a:bodyPr rtlCol="0" anchor="ctr"/>
-          <a:lstStyle/>
-          <a:p>
-            <a:pPr algn="ctr"/>
-          </a:p>
-        </p:txBody>
-      </p:sp>
-      <p:sp>
-        <p:nvSpPr>
-          <p:cNvPr id="3" name="Rounded Rectangle 2"/>
-          <p:cNvSpPr/>
-          <p:nvPr/>
-        </p:nvSpPr>
-        <p:spPr>
-          <a:xfrm>
-            <a:off x="10097719" y="457200"/>
-            <a:ext cx="1545336" cy="457200"/>
-          </a:xfrm>
-          <a:prstGeom prst="roundRect">
-            <a:avLst/>
-          </a:prstGeom>
-          <a:solidFill>
-            <a:srgbClr val="166534"/>
-          </a:solidFill>
-          <a:ln>
-            <a:noFill/>
-          </a:ln>
-          <a:effectLst/>
-        </p:spPr>
-        <p:style>
-          <a:lnRef idx="1">
-            <a:schemeClr val="accent1"/>
-          </a:lnRef>
-          <a:fillRef idx="3">
-            <a:schemeClr val="accent1"/>
-          </a:fillRef>
-          <a:effectRef idx="2">
-            <a:schemeClr val="accent1"/>
-          </a:effectRef>
-          <a:fontRef idx="minor">
-            <a:schemeClr val="lt1"/>
-          </a:fontRef>
-        </p:style>
-        <p:txBody>
-          <a:bodyPr rtlCol="0" anchor="ctr" wrap="none" tIns="0" bIns="0"/>
-          <a:lstStyle/>
-          <a:p>
-            <a:pPr algn="ctr"/>
-            <a:r>
-              <a:rPr sz="1400" b="1">
-                <a:solidFill>
-                  <a:srgbClr val="FFFFFF"/>
-                </a:solidFill>
-                <a:latin typeface="Arial"/>
-              </a:rPr>
-              <a:t>CỦNG CỐ</a:t>
-            </a:r>
-          </a:p>
-        </p:txBody>
-      </p:sp>
-      <p:sp>
-        <p:nvSpPr>
           <p:cNvPr id="4" name="TextBox 3"/>
           <p:cNvSpPr txBox="1"/>
           <p:nvPr/>
@@ -18687,30 +18590,2121 @@
           </a:p>
         </p:txBody>
       </p:sp>
-      <p:pic>
-        <p:nvPicPr>
-          <p:cNvPr id="7" name="Picture 6" descr="SoDoTuDuy_NGUVAN11_Bai1_CauChuyenVaDiemNhin_T1-11.png"/>
-          <p:cNvPicPr>
-            <a:picLocks noChangeAspect="1"/>
-          </p:cNvPicPr>
-          <p:nvPr/>
-        </p:nvPicPr>
-        <p:blipFill>
-          <a:blip r:embed="rId2"/>
-          <a:stretch>
-            <a:fillRect/>
-          </a:stretch>
-        </p:blipFill>
-        <p:spPr>
-          <a:xfrm>
-            <a:off x="1788855" y="1371600"/>
-            <a:ext cx="8675250" cy="4846320"/>
-          </a:xfrm>
-          <a:prstGeom prst="rect">
-            <a:avLst/>
-          </a:prstGeom>
-        </p:spPr>
-      </p:pic>
+      <p:cxnSp>
+        <p:nvCxnSpPr>
+          <p:cNvPr id="7" name="Connector 6"/>
+          <p:cNvCxnSpPr/>
+          <p:nvPr/>
+        </p:nvCxnSpPr>
+        <p:spPr>
+          <a:xfrm flipH="1" flipV="1">
+            <a:off x="4338888" y="2670962"/>
+            <a:ext cx="1688379" cy="1283818"/>
+          </a:xfrm>
+          <a:prstGeom prst="line">
+            <a:avLst/>
+          </a:prstGeom>
+          <a:ln w="44450">
+            <a:solidFill>
+              <a:srgbClr val="548235"/>
+            </a:solidFill>
+          </a:ln>
+        </p:spPr>
+        <p:style>
+          <a:lnRef idx="2">
+            <a:schemeClr val="accent1"/>
+          </a:lnRef>
+          <a:fillRef idx="0">
+            <a:schemeClr val="accent1"/>
+          </a:fillRef>
+          <a:effectRef idx="1">
+            <a:schemeClr val="accent1"/>
+          </a:effectRef>
+          <a:fontRef idx="minor">
+            <a:schemeClr val="tx1"/>
+          </a:fontRef>
+        </p:style>
+      </p:cxnSp>
+      <p:cxnSp>
+        <p:nvCxnSpPr>
+          <p:cNvPr id="8" name="Connector 7"/>
+          <p:cNvCxnSpPr/>
+          <p:nvPr/>
+        </p:nvCxnSpPr>
+        <p:spPr>
+          <a:xfrm flipH="1" flipV="1">
+            <a:off x="2827515" y="1830405"/>
+            <a:ext cx="1511373" cy="840557"/>
+          </a:xfrm>
+          <a:prstGeom prst="line">
+            <a:avLst/>
+          </a:prstGeom>
+          <a:ln w="15875">
+            <a:solidFill>
+              <a:srgbClr val="548235"/>
+            </a:solidFill>
+          </a:ln>
+        </p:spPr>
+        <p:style>
+          <a:lnRef idx="2">
+            <a:schemeClr val="accent1"/>
+          </a:lnRef>
+          <a:fillRef idx="0">
+            <a:schemeClr val="accent1"/>
+          </a:fillRef>
+          <a:effectRef idx="1">
+            <a:schemeClr val="accent1"/>
+          </a:effectRef>
+          <a:fontRef idx="minor">
+            <a:schemeClr val="tx1"/>
+          </a:fontRef>
+        </p:style>
+      </p:cxnSp>
+      <p:sp>
+        <p:nvSpPr>
+          <p:cNvPr id="9" name="Rounded Rectangle 8"/>
+          <p:cNvSpPr/>
+          <p:nvPr/>
+        </p:nvSpPr>
+        <p:spPr>
+          <a:xfrm>
+            <a:off x="785126" y="1554093"/>
+            <a:ext cx="2042389" cy="552622"/>
+          </a:xfrm>
+          <a:prstGeom prst="roundRect">
+            <a:avLst>
+              <a:gd name="adj" fmla="val 50000"/>
+            </a:avLst>
+          </a:prstGeom>
+          <a:solidFill>
+            <a:srgbClr val="EDF5E8"/>
+          </a:solidFill>
+          <a:ln w="15875">
+            <a:solidFill>
+              <a:srgbClr val="548235"/>
+            </a:solidFill>
+          </a:ln>
+          <a:effectLst/>
+        </p:spPr>
+        <p:style>
+          <a:lnRef idx="1">
+            <a:schemeClr val="accent1"/>
+          </a:lnRef>
+          <a:fillRef idx="3">
+            <a:schemeClr val="accent1"/>
+          </a:fillRef>
+          <a:effectRef idx="2">
+            <a:schemeClr val="accent1"/>
+          </a:effectRef>
+          <a:fontRef idx="minor">
+            <a:schemeClr val="lt1"/>
+          </a:fontRef>
+        </p:style>
+        <p:txBody>
+          <a:bodyPr rtlCol="0" anchor="ctr" wrap="none" lIns="64000" rIns="64000" tIns="25400" bIns="25400"/>
+          <a:lstStyle/>
+          <a:p>
+            <a:pPr algn="ctr"/>
+            <a:r>
+              <a:rPr sz="1300" b="1">
+                <a:solidFill>
+                  <a:srgbClr val="8B0000"/>
+                </a:solidFill>
+                <a:latin typeface="Calibri"/>
+              </a:rPr>
+              <a:t>Câu chuyện ≠ truyện</a:t>
+            </a:r>
+          </a:p>
+          <a:p>
+            <a:pPr algn="ctr"/>
+            <a:r>
+              <a:rPr sz="1300" b="1">
+                <a:solidFill>
+                  <a:srgbClr val="8B0000"/>
+                </a:solidFill>
+                <a:latin typeface="Calibri"/>
+              </a:rPr>
+              <a:t>kể</a:t>
+            </a:r>
+          </a:p>
+        </p:txBody>
+      </p:sp>
+      <p:cxnSp>
+        <p:nvCxnSpPr>
+          <p:cNvPr id="10" name="Connector 9"/>
+          <p:cNvCxnSpPr/>
+          <p:nvPr/>
+        </p:nvCxnSpPr>
+        <p:spPr>
+          <a:xfrm flipH="1" flipV="1">
+            <a:off x="2721851" y="2457917"/>
+            <a:ext cx="1617037" cy="213045"/>
+          </a:xfrm>
+          <a:prstGeom prst="line">
+            <a:avLst/>
+          </a:prstGeom>
+          <a:ln w="15875">
+            <a:solidFill>
+              <a:srgbClr val="548235"/>
+            </a:solidFill>
+          </a:ln>
+        </p:spPr>
+        <p:style>
+          <a:lnRef idx="2">
+            <a:schemeClr val="accent1"/>
+          </a:lnRef>
+          <a:fillRef idx="0">
+            <a:schemeClr val="accent1"/>
+          </a:fillRef>
+          <a:effectRef idx="1">
+            <a:schemeClr val="accent1"/>
+          </a:effectRef>
+          <a:fontRef idx="minor">
+            <a:schemeClr val="tx1"/>
+          </a:fontRef>
+        </p:style>
+      </p:cxnSp>
+      <p:sp>
+        <p:nvSpPr>
+          <p:cNvPr id="11" name="Rounded Rectangle 10"/>
+          <p:cNvSpPr/>
+          <p:nvPr/>
+        </p:nvSpPr>
+        <p:spPr>
+          <a:xfrm>
+            <a:off x="890790" y="2181606"/>
+            <a:ext cx="1831061" cy="552622"/>
+          </a:xfrm>
+          <a:prstGeom prst="roundRect">
+            <a:avLst>
+              <a:gd name="adj" fmla="val 50000"/>
+            </a:avLst>
+          </a:prstGeom>
+          <a:solidFill>
+            <a:srgbClr val="EDF5E8"/>
+          </a:solidFill>
+          <a:ln w="15875">
+            <a:solidFill>
+              <a:srgbClr val="548235"/>
+            </a:solidFill>
+          </a:ln>
+          <a:effectLst/>
+        </p:spPr>
+        <p:style>
+          <a:lnRef idx="1">
+            <a:schemeClr val="accent1"/>
+          </a:lnRef>
+          <a:fillRef idx="3">
+            <a:schemeClr val="accent1"/>
+          </a:fillRef>
+          <a:effectRef idx="2">
+            <a:schemeClr val="accent1"/>
+          </a:effectRef>
+          <a:fontRef idx="minor">
+            <a:schemeClr val="lt1"/>
+          </a:fontRef>
+        </p:style>
+        <p:txBody>
+          <a:bodyPr rtlCol="0" anchor="ctr" wrap="none" lIns="64000" rIns="64000" tIns="25400" bIns="25400"/>
+          <a:lstStyle/>
+          <a:p>
+            <a:pPr algn="ctr"/>
+            <a:r>
+              <a:rPr sz="1300" b="0">
+                <a:solidFill>
+                  <a:srgbClr val="000000"/>
+                </a:solidFill>
+                <a:latin typeface="Calibri"/>
+              </a:rPr>
+              <a:t>Điểm nhìn: ngoài /</a:t>
+            </a:r>
+          </a:p>
+          <a:p>
+            <a:pPr algn="ctr"/>
+            <a:r>
+              <a:rPr sz="1300" b="0">
+                <a:solidFill>
+                  <a:srgbClr val="000000"/>
+                </a:solidFill>
+                <a:latin typeface="Calibri"/>
+              </a:rPr>
+              <a:t>trong</a:t>
+            </a:r>
+          </a:p>
+        </p:txBody>
+      </p:sp>
+      <p:cxnSp>
+        <p:nvCxnSpPr>
+          <p:cNvPr id="12" name="Connector 11"/>
+          <p:cNvCxnSpPr/>
+          <p:nvPr/>
+        </p:nvCxnSpPr>
+        <p:spPr>
+          <a:xfrm flipH="1">
+            <a:off x="2464295" y="2670962"/>
+            <a:ext cx="1874593" cy="414467"/>
+          </a:xfrm>
+          <a:prstGeom prst="line">
+            <a:avLst/>
+          </a:prstGeom>
+          <a:ln w="15875">
+            <a:solidFill>
+              <a:srgbClr val="548235"/>
+            </a:solidFill>
+          </a:ln>
+        </p:spPr>
+        <p:style>
+          <a:lnRef idx="2">
+            <a:schemeClr val="accent1"/>
+          </a:lnRef>
+          <a:fillRef idx="0">
+            <a:schemeClr val="accent1"/>
+          </a:fillRef>
+          <a:effectRef idx="1">
+            <a:schemeClr val="accent1"/>
+          </a:effectRef>
+          <a:fontRef idx="minor">
+            <a:schemeClr val="tx1"/>
+          </a:fontRef>
+        </p:style>
+      </p:cxnSp>
+      <p:sp>
+        <p:nvSpPr>
+          <p:cNvPr id="13" name="Rounded Rectangle 12"/>
+          <p:cNvSpPr/>
+          <p:nvPr/>
+        </p:nvSpPr>
+        <p:spPr>
+          <a:xfrm>
+            <a:off x="1148346" y="2809118"/>
+            <a:ext cx="1315949" cy="552622"/>
+          </a:xfrm>
+          <a:prstGeom prst="roundRect">
+            <a:avLst>
+              <a:gd name="adj" fmla="val 50000"/>
+            </a:avLst>
+          </a:prstGeom>
+          <a:solidFill>
+            <a:srgbClr val="EDF5E8"/>
+          </a:solidFill>
+          <a:ln w="15875">
+            <a:solidFill>
+              <a:srgbClr val="548235"/>
+            </a:solidFill>
+          </a:ln>
+          <a:effectLst/>
+        </p:spPr>
+        <p:style>
+          <a:lnRef idx="1">
+            <a:schemeClr val="accent1"/>
+          </a:lnRef>
+          <a:fillRef idx="3">
+            <a:schemeClr val="accent1"/>
+          </a:fillRef>
+          <a:effectRef idx="2">
+            <a:schemeClr val="accent1"/>
+          </a:effectRef>
+          <a:fontRef idx="minor">
+            <a:schemeClr val="lt1"/>
+          </a:fontRef>
+        </p:style>
+        <p:txBody>
+          <a:bodyPr rtlCol="0" anchor="ctr" wrap="none" lIns="64000" rIns="64000" tIns="25400" bIns="25400"/>
+          <a:lstStyle/>
+          <a:p>
+            <a:pPr algn="ctr"/>
+            <a:r>
+              <a:rPr sz="1300" b="0">
+                <a:solidFill>
+                  <a:srgbClr val="000000"/>
+                </a:solidFill>
+                <a:latin typeface="Calibri"/>
+              </a:rPr>
+              <a:t>Lời kể – lời</a:t>
+            </a:r>
+          </a:p>
+          <a:p>
+            <a:pPr algn="ctr"/>
+            <a:r>
+              <a:rPr sz="1300" b="0">
+                <a:solidFill>
+                  <a:srgbClr val="000000"/>
+                </a:solidFill>
+                <a:latin typeface="Calibri"/>
+              </a:rPr>
+              <a:t>nhân vật</a:t>
+            </a:r>
+          </a:p>
+        </p:txBody>
+      </p:sp>
+      <p:cxnSp>
+        <p:nvCxnSpPr>
+          <p:cNvPr id="14" name="Connector 13"/>
+          <p:cNvCxnSpPr/>
+          <p:nvPr/>
+        </p:nvCxnSpPr>
+        <p:spPr>
+          <a:xfrm flipH="1">
+            <a:off x="2807703" y="2670962"/>
+            <a:ext cx="1531185" cy="941268"/>
+          </a:xfrm>
+          <a:prstGeom prst="line">
+            <a:avLst/>
+          </a:prstGeom>
+          <a:ln w="15875">
+            <a:solidFill>
+              <a:srgbClr val="548235"/>
+            </a:solidFill>
+          </a:ln>
+        </p:spPr>
+        <p:style>
+          <a:lnRef idx="2">
+            <a:schemeClr val="accent1"/>
+          </a:lnRef>
+          <a:fillRef idx="0">
+            <a:schemeClr val="accent1"/>
+          </a:fillRef>
+          <a:effectRef idx="1">
+            <a:schemeClr val="accent1"/>
+          </a:effectRef>
+          <a:fontRef idx="minor">
+            <a:schemeClr val="tx1"/>
+          </a:fontRef>
+        </p:style>
+      </p:cxnSp>
+      <p:sp>
+        <p:nvSpPr>
+          <p:cNvPr id="15" name="Rounded Rectangle 14"/>
+          <p:cNvSpPr/>
+          <p:nvPr/>
+        </p:nvSpPr>
+        <p:spPr>
+          <a:xfrm>
+            <a:off x="804938" y="3436630"/>
+            <a:ext cx="2002765" cy="351200"/>
+          </a:xfrm>
+          <a:prstGeom prst="roundRect">
+            <a:avLst>
+              <a:gd name="adj" fmla="val 50000"/>
+            </a:avLst>
+          </a:prstGeom>
+          <a:solidFill>
+            <a:srgbClr val="EDF5E8"/>
+          </a:solidFill>
+          <a:ln w="15875">
+            <a:solidFill>
+              <a:srgbClr val="548235"/>
+            </a:solidFill>
+          </a:ln>
+          <a:effectLst/>
+        </p:spPr>
+        <p:style>
+          <a:lnRef idx="1">
+            <a:schemeClr val="accent1"/>
+          </a:lnRef>
+          <a:fillRef idx="3">
+            <a:schemeClr val="accent1"/>
+          </a:fillRef>
+          <a:effectRef idx="2">
+            <a:schemeClr val="accent1"/>
+          </a:effectRef>
+          <a:fontRef idx="minor">
+            <a:schemeClr val="lt1"/>
+          </a:fontRef>
+        </p:style>
+        <p:txBody>
+          <a:bodyPr rtlCol="0" anchor="ctr" wrap="none" lIns="64000" rIns="64000" tIns="25400" bIns="25400"/>
+          <a:lstStyle/>
+          <a:p>
+            <a:pPr algn="ctr"/>
+            <a:r>
+              <a:rPr sz="1300" b="0">
+                <a:solidFill>
+                  <a:srgbClr val="000000"/>
+                </a:solidFill>
+                <a:latin typeface="Calibri"/>
+              </a:rPr>
+              <a:t>Truyện ngắn hiện đại</a:t>
+            </a:r>
+          </a:p>
+        </p:txBody>
+      </p:sp>
+      <p:sp>
+        <p:nvSpPr>
+          <p:cNvPr id="16" name="Oval 15"/>
+          <p:cNvSpPr/>
+          <p:nvPr/>
+        </p:nvSpPr>
+        <p:spPr>
+          <a:xfrm>
+            <a:off x="3502606" y="2259078"/>
+            <a:ext cx="1672565" cy="823767"/>
+          </a:xfrm>
+          <a:prstGeom prst="ellipse">
+            <a:avLst/>
+          </a:prstGeom>
+          <a:solidFill>
+            <a:srgbClr val="E2EFDA"/>
+          </a:solidFill>
+          <a:ln w="31750">
+            <a:solidFill>
+              <a:srgbClr val="375623"/>
+            </a:solidFill>
+          </a:ln>
+          <a:effectLst/>
+        </p:spPr>
+        <p:style>
+          <a:lnRef idx="1">
+            <a:schemeClr val="accent1"/>
+          </a:lnRef>
+          <a:fillRef idx="3">
+            <a:schemeClr val="accent1"/>
+          </a:fillRef>
+          <a:effectRef idx="2">
+            <a:schemeClr val="accent1"/>
+          </a:effectRef>
+          <a:fontRef idx="minor">
+            <a:schemeClr val="lt1"/>
+          </a:fontRef>
+        </p:style>
+        <p:txBody>
+          <a:bodyPr rtlCol="0" anchor="ctr" wrap="none" lIns="64000" rIns="64000" tIns="25400" bIns="25400"/>
+          <a:lstStyle/>
+          <a:p>
+            <a:pPr algn="ctr"/>
+            <a:r>
+              <a:rPr sz="1500" b="1">
+                <a:solidFill>
+                  <a:srgbClr val="000000"/>
+                </a:solidFill>
+                <a:latin typeface="Calibri"/>
+              </a:rPr>
+              <a:t>① Tri thức</a:t>
+            </a:r>
+          </a:p>
+          <a:p>
+            <a:pPr algn="ctr"/>
+            <a:r>
+              <a:rPr sz="1500" b="1">
+                <a:solidFill>
+                  <a:srgbClr val="000000"/>
+                </a:solidFill>
+                <a:latin typeface="Calibri"/>
+              </a:rPr>
+              <a:t>ngữ văn</a:t>
+            </a:r>
+          </a:p>
+        </p:txBody>
+      </p:sp>
+      <p:cxnSp>
+        <p:nvCxnSpPr>
+          <p:cNvPr id="17" name="Connector 16"/>
+          <p:cNvCxnSpPr/>
+          <p:nvPr/>
+        </p:nvCxnSpPr>
+        <p:spPr>
+          <a:xfrm flipV="1">
+            <a:off x="6027267" y="2670962"/>
+            <a:ext cx="1688379" cy="1283818"/>
+          </a:xfrm>
+          <a:prstGeom prst="line">
+            <a:avLst/>
+          </a:prstGeom>
+          <a:ln w="44450">
+            <a:solidFill>
+              <a:srgbClr val="BF8F00"/>
+            </a:solidFill>
+          </a:ln>
+        </p:spPr>
+        <p:style>
+          <a:lnRef idx="2">
+            <a:schemeClr val="accent1"/>
+          </a:lnRef>
+          <a:fillRef idx="0">
+            <a:schemeClr val="accent1"/>
+          </a:fillRef>
+          <a:effectRef idx="1">
+            <a:schemeClr val="accent1"/>
+          </a:effectRef>
+          <a:fontRef idx="minor">
+            <a:schemeClr val="tx1"/>
+          </a:fontRef>
+        </p:style>
+      </p:cxnSp>
+      <p:cxnSp>
+        <p:nvCxnSpPr>
+          <p:cNvPr id="18" name="Connector 17"/>
+          <p:cNvCxnSpPr/>
+          <p:nvPr/>
+        </p:nvCxnSpPr>
+        <p:spPr>
+          <a:xfrm flipV="1">
+            <a:off x="7715646" y="1830405"/>
+            <a:ext cx="1418917" cy="840557"/>
+          </a:xfrm>
+          <a:prstGeom prst="line">
+            <a:avLst/>
+          </a:prstGeom>
+          <a:ln w="15875">
+            <a:solidFill>
+              <a:srgbClr val="BF8F00"/>
+            </a:solidFill>
+          </a:ln>
+        </p:spPr>
+        <p:style>
+          <a:lnRef idx="2">
+            <a:schemeClr val="accent1"/>
+          </a:lnRef>
+          <a:fillRef idx="0">
+            <a:schemeClr val="accent1"/>
+          </a:fillRef>
+          <a:effectRef idx="1">
+            <a:schemeClr val="accent1"/>
+          </a:effectRef>
+          <a:fontRef idx="minor">
+            <a:schemeClr val="tx1"/>
+          </a:fontRef>
+        </p:style>
+      </p:cxnSp>
+      <p:sp>
+        <p:nvSpPr>
+          <p:cNvPr id="19" name="Rounded Rectangle 18"/>
+          <p:cNvSpPr/>
+          <p:nvPr/>
+        </p:nvSpPr>
+        <p:spPr>
+          <a:xfrm>
+            <a:off x="9134563" y="1654804"/>
+            <a:ext cx="2227301" cy="351200"/>
+          </a:xfrm>
+          <a:prstGeom prst="roundRect">
+            <a:avLst>
+              <a:gd name="adj" fmla="val 50000"/>
+            </a:avLst>
+          </a:prstGeom>
+          <a:solidFill>
+            <a:srgbClr val="FFF8E1"/>
+          </a:solidFill>
+          <a:ln w="15875">
+            <a:solidFill>
+              <a:srgbClr val="BF8F00"/>
+            </a:solidFill>
+          </a:ln>
+          <a:effectLst/>
+        </p:spPr>
+        <p:style>
+          <a:lnRef idx="1">
+            <a:schemeClr val="accent1"/>
+          </a:lnRef>
+          <a:fillRef idx="3">
+            <a:schemeClr val="accent1"/>
+          </a:fillRef>
+          <a:effectRef idx="2">
+            <a:schemeClr val="accent1"/>
+          </a:effectRef>
+          <a:fontRef idx="minor">
+            <a:schemeClr val="lt1"/>
+          </a:fontRef>
+        </p:style>
+        <p:txBody>
+          <a:bodyPr rtlCol="0" anchor="ctr" wrap="none" lIns="64000" rIns="64000" tIns="25400" bIns="25400"/>
+          <a:lstStyle/>
+          <a:p>
+            <a:pPr algn="ctr"/>
+            <a:r>
+              <a:rPr sz="1300" b="1">
+                <a:solidFill>
+                  <a:srgbClr val="8B0000"/>
+                </a:solidFill>
+                <a:latin typeface="Calibri"/>
+              </a:rPr>
+              <a:t>Tình huống: “nhặt” vợ</a:t>
+            </a:r>
+          </a:p>
+        </p:txBody>
+      </p:sp>
+      <p:cxnSp>
+        <p:nvCxnSpPr>
+          <p:cNvPr id="20" name="Connector 19"/>
+          <p:cNvCxnSpPr/>
+          <p:nvPr/>
+        </p:nvCxnSpPr>
+        <p:spPr>
+          <a:xfrm flipV="1">
+            <a:off x="7715646" y="2256495"/>
+            <a:ext cx="1574111" cy="414467"/>
+          </a:xfrm>
+          <a:prstGeom prst="line">
+            <a:avLst/>
+          </a:prstGeom>
+          <a:ln w="15875">
+            <a:solidFill>
+              <a:srgbClr val="BF8F00"/>
+            </a:solidFill>
+          </a:ln>
+        </p:spPr>
+        <p:style>
+          <a:lnRef idx="2">
+            <a:schemeClr val="accent1"/>
+          </a:lnRef>
+          <a:fillRef idx="0">
+            <a:schemeClr val="accent1"/>
+          </a:fillRef>
+          <a:effectRef idx="1">
+            <a:schemeClr val="accent1"/>
+          </a:effectRef>
+          <a:fontRef idx="minor">
+            <a:schemeClr val="tx1"/>
+          </a:fontRef>
+        </p:style>
+      </p:cxnSp>
+      <p:sp>
+        <p:nvSpPr>
+          <p:cNvPr id="21" name="Rounded Rectangle 20"/>
+          <p:cNvSpPr/>
+          <p:nvPr/>
+        </p:nvSpPr>
+        <p:spPr>
+          <a:xfrm>
+            <a:off x="9289757" y="2080894"/>
+            <a:ext cx="1916913" cy="351200"/>
+          </a:xfrm>
+          <a:prstGeom prst="roundRect">
+            <a:avLst>
+              <a:gd name="adj" fmla="val 50000"/>
+            </a:avLst>
+          </a:prstGeom>
+          <a:solidFill>
+            <a:srgbClr val="FFF8E1"/>
+          </a:solidFill>
+          <a:ln w="15875">
+            <a:solidFill>
+              <a:srgbClr val="BF8F00"/>
+            </a:solidFill>
+          </a:ln>
+          <a:effectLst/>
+        </p:spPr>
+        <p:style>
+          <a:lnRef idx="1">
+            <a:schemeClr val="accent1"/>
+          </a:lnRef>
+          <a:fillRef idx="3">
+            <a:schemeClr val="accent1"/>
+          </a:fillRef>
+          <a:effectRef idx="2">
+            <a:schemeClr val="accent1"/>
+          </a:effectRef>
+          <a:fontRef idx="minor">
+            <a:schemeClr val="lt1"/>
+          </a:fontRef>
+        </p:style>
+        <p:txBody>
+          <a:bodyPr rtlCol="0" anchor="ctr" wrap="none" lIns="64000" rIns="64000" tIns="25400" bIns="25400"/>
+          <a:lstStyle/>
+          <a:p>
+            <a:pPr algn="ctr"/>
+            <a:r>
+              <a:rPr sz="1300" b="0">
+                <a:solidFill>
+                  <a:srgbClr val="000000"/>
+                </a:solidFill>
+                <a:latin typeface="Calibri"/>
+              </a:rPr>
+              <a:t>Điểm nhìn linh hoạt</a:t>
+            </a:r>
+          </a:p>
+        </p:txBody>
+      </p:sp>
+      <p:cxnSp>
+        <p:nvCxnSpPr>
+          <p:cNvPr id="22" name="Connector 21"/>
+          <p:cNvCxnSpPr/>
+          <p:nvPr/>
+        </p:nvCxnSpPr>
+        <p:spPr>
+          <a:xfrm>
+            <a:off x="7715646" y="2670962"/>
+            <a:ext cx="1445333" cy="112334"/>
+          </a:xfrm>
+          <a:prstGeom prst="line">
+            <a:avLst/>
+          </a:prstGeom>
+          <a:ln w="15875">
+            <a:solidFill>
+              <a:srgbClr val="BF8F00"/>
+            </a:solidFill>
+          </a:ln>
+        </p:spPr>
+        <p:style>
+          <a:lnRef idx="2">
+            <a:schemeClr val="accent1"/>
+          </a:lnRef>
+          <a:fillRef idx="0">
+            <a:schemeClr val="accent1"/>
+          </a:fillRef>
+          <a:effectRef idx="1">
+            <a:schemeClr val="accent1"/>
+          </a:effectRef>
+          <a:fontRef idx="minor">
+            <a:schemeClr val="tx1"/>
+          </a:fontRef>
+        </p:style>
+      </p:cxnSp>
+      <p:sp>
+        <p:nvSpPr>
+          <p:cNvPr id="23" name="Rounded Rectangle 22"/>
+          <p:cNvSpPr/>
+          <p:nvPr/>
+        </p:nvSpPr>
+        <p:spPr>
+          <a:xfrm>
+            <a:off x="9160979" y="2506985"/>
+            <a:ext cx="2174469" cy="552622"/>
+          </a:xfrm>
+          <a:prstGeom prst="roundRect">
+            <a:avLst>
+              <a:gd name="adj" fmla="val 50000"/>
+            </a:avLst>
+          </a:prstGeom>
+          <a:solidFill>
+            <a:srgbClr val="FFF8E1"/>
+          </a:solidFill>
+          <a:ln w="15875">
+            <a:solidFill>
+              <a:srgbClr val="BF8F00"/>
+            </a:solidFill>
+          </a:ln>
+          <a:effectLst/>
+        </p:spPr>
+        <p:style>
+          <a:lnRef idx="1">
+            <a:schemeClr val="accent1"/>
+          </a:lnRef>
+          <a:fillRef idx="3">
+            <a:schemeClr val="accent1"/>
+          </a:fillRef>
+          <a:effectRef idx="2">
+            <a:schemeClr val="accent1"/>
+          </a:effectRef>
+          <a:fontRef idx="minor">
+            <a:schemeClr val="lt1"/>
+          </a:fontRef>
+        </p:style>
+        <p:txBody>
+          <a:bodyPr rtlCol="0" anchor="ctr" wrap="none" lIns="64000" rIns="64000" tIns="25400" bIns="25400"/>
+          <a:lstStyle/>
+          <a:p>
+            <a:pPr algn="ctr"/>
+            <a:r>
+              <a:rPr sz="1300" b="0">
+                <a:solidFill>
+                  <a:srgbClr val="000000"/>
+                </a:solidFill>
+                <a:latin typeface="Calibri"/>
+              </a:rPr>
+              <a:t>Tình thương, khát vọng</a:t>
+            </a:r>
+          </a:p>
+          <a:p>
+            <a:pPr algn="ctr"/>
+            <a:r>
+              <a:rPr sz="1300" b="0">
+                <a:solidFill>
+                  <a:srgbClr val="000000"/>
+                </a:solidFill>
+                <a:latin typeface="Calibri"/>
+              </a:rPr>
+              <a:t>sống</a:t>
+            </a:r>
+          </a:p>
+        </p:txBody>
+      </p:sp>
+      <p:cxnSp>
+        <p:nvCxnSpPr>
+          <p:cNvPr id="24" name="Connector 23"/>
+          <p:cNvCxnSpPr/>
+          <p:nvPr/>
+        </p:nvCxnSpPr>
+        <p:spPr>
+          <a:xfrm>
+            <a:off x="7715646" y="2670962"/>
+            <a:ext cx="1831667" cy="739846"/>
+          </a:xfrm>
+          <a:prstGeom prst="line">
+            <a:avLst/>
+          </a:prstGeom>
+          <a:ln w="15875">
+            <a:solidFill>
+              <a:srgbClr val="BF8F00"/>
+            </a:solidFill>
+          </a:ln>
+        </p:spPr>
+        <p:style>
+          <a:lnRef idx="2">
+            <a:schemeClr val="accent1"/>
+          </a:lnRef>
+          <a:fillRef idx="0">
+            <a:schemeClr val="accent1"/>
+          </a:fillRef>
+          <a:effectRef idx="1">
+            <a:schemeClr val="accent1"/>
+          </a:effectRef>
+          <a:fontRef idx="minor">
+            <a:schemeClr val="tx1"/>
+          </a:fontRef>
+        </p:style>
+      </p:cxnSp>
+      <p:sp>
+        <p:nvSpPr>
+          <p:cNvPr id="25" name="Rounded Rectangle 24"/>
+          <p:cNvSpPr/>
+          <p:nvPr/>
+        </p:nvSpPr>
+        <p:spPr>
+          <a:xfrm>
+            <a:off x="9547313" y="3134497"/>
+            <a:ext cx="1401801" cy="552622"/>
+          </a:xfrm>
+          <a:prstGeom prst="roundRect">
+            <a:avLst>
+              <a:gd name="adj" fmla="val 50000"/>
+            </a:avLst>
+          </a:prstGeom>
+          <a:solidFill>
+            <a:srgbClr val="FFF8E1"/>
+          </a:solidFill>
+          <a:ln w="15875">
+            <a:solidFill>
+              <a:srgbClr val="BF8F00"/>
+            </a:solidFill>
+          </a:ln>
+          <a:effectLst/>
+        </p:spPr>
+        <p:style>
+          <a:lnRef idx="1">
+            <a:schemeClr val="accent1"/>
+          </a:lnRef>
+          <a:fillRef idx="3">
+            <a:schemeClr val="accent1"/>
+          </a:fillRef>
+          <a:effectRef idx="2">
+            <a:schemeClr val="accent1"/>
+          </a:effectRef>
+          <a:fontRef idx="minor">
+            <a:schemeClr val="lt1"/>
+          </a:fontRef>
+        </p:style>
+        <p:txBody>
+          <a:bodyPr rtlCol="0" anchor="ctr" wrap="none" lIns="64000" rIns="64000" tIns="25400" bIns="25400"/>
+          <a:lstStyle/>
+          <a:p>
+            <a:pPr algn="ctr"/>
+            <a:r>
+              <a:rPr sz="1300" b="0">
+                <a:solidFill>
+                  <a:srgbClr val="000000"/>
+                </a:solidFill>
+                <a:latin typeface="Calibri"/>
+              </a:rPr>
+              <a:t>Kết: lá cờ đỏ</a:t>
+            </a:r>
+          </a:p>
+          <a:p>
+            <a:pPr algn="ctr"/>
+            <a:r>
+              <a:rPr sz="1300" b="0">
+                <a:solidFill>
+                  <a:srgbClr val="000000"/>
+                </a:solidFill>
+                <a:latin typeface="Calibri"/>
+              </a:rPr>
+              <a:t>– niềm tin</a:t>
+            </a:r>
+          </a:p>
+        </p:txBody>
+      </p:sp>
+      <p:sp>
+        <p:nvSpPr>
+          <p:cNvPr id="26" name="Oval 25"/>
+          <p:cNvSpPr/>
+          <p:nvPr/>
+        </p:nvSpPr>
+        <p:spPr>
+          <a:xfrm>
+            <a:off x="6948705" y="2259078"/>
+            <a:ext cx="1533881" cy="823767"/>
+          </a:xfrm>
+          <a:prstGeom prst="ellipse">
+            <a:avLst/>
+          </a:prstGeom>
+          <a:solidFill>
+            <a:srgbClr val="FFF2CC"/>
+          </a:solidFill>
+          <a:ln w="31750">
+            <a:solidFill>
+              <a:srgbClr val="BF8F00"/>
+            </a:solidFill>
+          </a:ln>
+          <a:effectLst/>
+        </p:spPr>
+        <p:style>
+          <a:lnRef idx="1">
+            <a:schemeClr val="accent1"/>
+          </a:lnRef>
+          <a:fillRef idx="3">
+            <a:schemeClr val="accent1"/>
+          </a:fillRef>
+          <a:effectRef idx="2">
+            <a:schemeClr val="accent1"/>
+          </a:effectRef>
+          <a:fontRef idx="minor">
+            <a:schemeClr val="lt1"/>
+          </a:fontRef>
+        </p:style>
+        <p:txBody>
+          <a:bodyPr rtlCol="0" anchor="ctr" wrap="none" lIns="64000" rIns="64000" tIns="25400" bIns="25400"/>
+          <a:lstStyle/>
+          <a:p>
+            <a:pPr algn="ctr"/>
+            <a:r>
+              <a:rPr sz="1500" b="1">
+                <a:solidFill>
+                  <a:srgbClr val="000000"/>
+                </a:solidFill>
+                <a:latin typeface="Calibri"/>
+              </a:rPr>
+              <a:t>② Vợ nhặt</a:t>
+            </a:r>
+          </a:p>
+          <a:p>
+            <a:pPr algn="ctr"/>
+            <a:r>
+              <a:rPr sz="1500" b="1">
+                <a:solidFill>
+                  <a:srgbClr val="000000"/>
+                </a:solidFill>
+                <a:latin typeface="Calibri"/>
+              </a:rPr>
+              <a:t>– Kim Lân</a:t>
+            </a:r>
+          </a:p>
+        </p:txBody>
+      </p:sp>
+      <p:cxnSp>
+        <p:nvCxnSpPr>
+          <p:cNvPr id="27" name="Connector 26"/>
+          <p:cNvCxnSpPr/>
+          <p:nvPr/>
+        </p:nvCxnSpPr>
+        <p:spPr>
+          <a:xfrm flipH="1">
+            <a:off x="4338888" y="3954780"/>
+            <a:ext cx="1688379" cy="1283817"/>
+          </a:xfrm>
+          <a:prstGeom prst="line">
+            <a:avLst/>
+          </a:prstGeom>
+          <a:ln w="44450">
+            <a:solidFill>
+              <a:srgbClr val="2F5597"/>
+            </a:solidFill>
+          </a:ln>
+        </p:spPr>
+        <p:style>
+          <a:lnRef idx="2">
+            <a:schemeClr val="accent1"/>
+          </a:lnRef>
+          <a:fillRef idx="0">
+            <a:schemeClr val="accent1"/>
+          </a:fillRef>
+          <a:effectRef idx="1">
+            <a:schemeClr val="accent1"/>
+          </a:effectRef>
+          <a:fontRef idx="minor">
+            <a:schemeClr val="tx1"/>
+          </a:fontRef>
+        </p:style>
+      </p:cxnSp>
+      <p:cxnSp>
+        <p:nvCxnSpPr>
+          <p:cNvPr id="28" name="Connector 27"/>
+          <p:cNvCxnSpPr/>
+          <p:nvPr/>
+        </p:nvCxnSpPr>
+        <p:spPr>
+          <a:xfrm flipH="1" flipV="1">
+            <a:off x="2642603" y="4297329"/>
+            <a:ext cx="1696285" cy="941268"/>
+          </a:xfrm>
+          <a:prstGeom prst="line">
+            <a:avLst/>
+          </a:prstGeom>
+          <a:ln w="15875">
+            <a:solidFill>
+              <a:srgbClr val="2F5597"/>
+            </a:solidFill>
+          </a:ln>
+        </p:spPr>
+        <p:style>
+          <a:lnRef idx="2">
+            <a:schemeClr val="accent1"/>
+          </a:lnRef>
+          <a:fillRef idx="0">
+            <a:schemeClr val="accent1"/>
+          </a:fillRef>
+          <a:effectRef idx="1">
+            <a:schemeClr val="accent1"/>
+          </a:effectRef>
+          <a:fontRef idx="minor">
+            <a:schemeClr val="tx1"/>
+          </a:fontRef>
+        </p:style>
+      </p:cxnSp>
+      <p:sp>
+        <p:nvSpPr>
+          <p:cNvPr id="29" name="Rounded Rectangle 28"/>
+          <p:cNvSpPr/>
+          <p:nvPr/>
+        </p:nvSpPr>
+        <p:spPr>
+          <a:xfrm>
+            <a:off x="970038" y="4021018"/>
+            <a:ext cx="1672565" cy="552622"/>
+          </a:xfrm>
+          <a:prstGeom prst="roundRect">
+            <a:avLst>
+              <a:gd name="adj" fmla="val 50000"/>
+            </a:avLst>
+          </a:prstGeom>
+          <a:solidFill>
+            <a:srgbClr val="E3EEF9"/>
+          </a:solidFill>
+          <a:ln w="15875">
+            <a:solidFill>
+              <a:srgbClr val="2F5597"/>
+            </a:solidFill>
+          </a:ln>
+          <a:effectLst/>
+        </p:spPr>
+        <p:style>
+          <a:lnRef idx="1">
+            <a:schemeClr val="accent1"/>
+          </a:lnRef>
+          <a:fillRef idx="3">
+            <a:schemeClr val="accent1"/>
+          </a:fillRef>
+          <a:effectRef idx="2">
+            <a:schemeClr val="accent1"/>
+          </a:effectRef>
+          <a:fontRef idx="minor">
+            <a:schemeClr val="lt1"/>
+          </a:fontRef>
+        </p:style>
+        <p:txBody>
+          <a:bodyPr rtlCol="0" anchor="ctr" wrap="none" lIns="64000" rIns="64000" tIns="25400" bIns="25400"/>
+          <a:lstStyle/>
+          <a:p>
+            <a:pPr algn="ctr"/>
+            <a:r>
+              <a:rPr sz="1300" b="1">
+                <a:solidFill>
+                  <a:srgbClr val="8B0000"/>
+                </a:solidFill>
+                <a:latin typeface="Calibri"/>
+              </a:rPr>
+              <a:t>Phá vỡ trình tự</a:t>
+            </a:r>
+          </a:p>
+          <a:p>
+            <a:pPr algn="ctr"/>
+            <a:r>
+              <a:rPr sz="1300" b="1">
+                <a:solidFill>
+                  <a:srgbClr val="8B0000"/>
+                </a:solidFill>
+                <a:latin typeface="Calibri"/>
+              </a:rPr>
+              <a:t>thời gian</a:t>
+            </a:r>
+          </a:p>
+        </p:txBody>
+      </p:sp>
+      <p:cxnSp>
+        <p:nvCxnSpPr>
+          <p:cNvPr id="30" name="Connector 29"/>
+          <p:cNvCxnSpPr/>
+          <p:nvPr/>
+        </p:nvCxnSpPr>
+        <p:spPr>
+          <a:xfrm flipH="1" flipV="1">
+            <a:off x="2593073" y="4924841"/>
+            <a:ext cx="1745815" cy="313756"/>
+          </a:xfrm>
+          <a:prstGeom prst="line">
+            <a:avLst/>
+          </a:prstGeom>
+          <a:ln w="15875">
+            <a:solidFill>
+              <a:srgbClr val="2F5597"/>
+            </a:solidFill>
+          </a:ln>
+        </p:spPr>
+        <p:style>
+          <a:lnRef idx="2">
+            <a:schemeClr val="accent1"/>
+          </a:lnRef>
+          <a:fillRef idx="0">
+            <a:schemeClr val="accent1"/>
+          </a:fillRef>
+          <a:effectRef idx="1">
+            <a:schemeClr val="accent1"/>
+          </a:effectRef>
+          <a:fontRef idx="minor">
+            <a:schemeClr val="tx1"/>
+          </a:fontRef>
+        </p:style>
+      </p:cxnSp>
+      <p:sp>
+        <p:nvSpPr>
+          <p:cNvPr id="31" name="Rounded Rectangle 30"/>
+          <p:cNvSpPr/>
+          <p:nvPr/>
+        </p:nvSpPr>
+        <p:spPr>
+          <a:xfrm>
+            <a:off x="1019568" y="4648530"/>
+            <a:ext cx="1573505" cy="552622"/>
+          </a:xfrm>
+          <a:prstGeom prst="roundRect">
+            <a:avLst>
+              <a:gd name="adj" fmla="val 50000"/>
+            </a:avLst>
+          </a:prstGeom>
+          <a:solidFill>
+            <a:srgbClr val="E3EEF9"/>
+          </a:solidFill>
+          <a:ln w="15875">
+            <a:solidFill>
+              <a:srgbClr val="2F5597"/>
+            </a:solidFill>
+          </a:ln>
+          <a:effectLst/>
+        </p:spPr>
+        <p:style>
+          <a:lnRef idx="1">
+            <a:schemeClr val="accent1"/>
+          </a:lnRef>
+          <a:fillRef idx="3">
+            <a:schemeClr val="accent1"/>
+          </a:fillRef>
+          <a:effectRef idx="2">
+            <a:schemeClr val="accent1"/>
+          </a:effectRef>
+          <a:fontRef idx="minor">
+            <a:schemeClr val="lt1"/>
+          </a:fontRef>
+        </p:style>
+        <p:txBody>
+          <a:bodyPr rtlCol="0" anchor="ctr" wrap="none" lIns="64000" rIns="64000" tIns="25400" bIns="25400"/>
+          <a:lstStyle/>
+          <a:p>
+            <a:pPr algn="ctr"/>
+            <a:r>
+              <a:rPr sz="1300" b="0">
+                <a:solidFill>
+                  <a:srgbClr val="000000"/>
+                </a:solidFill>
+                <a:latin typeface="Calibri"/>
+              </a:rPr>
+              <a:t>Bát cháo hành –</a:t>
+            </a:r>
+          </a:p>
+          <a:p>
+            <a:pPr algn="ctr"/>
+            <a:r>
+              <a:rPr sz="1300" b="0">
+                <a:solidFill>
+                  <a:srgbClr val="000000"/>
+                </a:solidFill>
+                <a:latin typeface="Calibri"/>
+              </a:rPr>
+              <a:t>thức tỉnh</a:t>
+            </a:r>
+          </a:p>
+        </p:txBody>
+      </p:sp>
+      <p:cxnSp>
+        <p:nvCxnSpPr>
+          <p:cNvPr id="32" name="Connector 31"/>
+          <p:cNvCxnSpPr/>
+          <p:nvPr/>
+        </p:nvCxnSpPr>
+        <p:spPr>
+          <a:xfrm flipH="1">
+            <a:off x="2678925" y="5238597"/>
+            <a:ext cx="1659963" cy="313756"/>
+          </a:xfrm>
+          <a:prstGeom prst="line">
+            <a:avLst/>
+          </a:prstGeom>
+          <a:ln w="15875">
+            <a:solidFill>
+              <a:srgbClr val="2F5597"/>
+            </a:solidFill>
+          </a:ln>
+        </p:spPr>
+        <p:style>
+          <a:lnRef idx="2">
+            <a:schemeClr val="accent1"/>
+          </a:lnRef>
+          <a:fillRef idx="0">
+            <a:schemeClr val="accent1"/>
+          </a:fillRef>
+          <a:effectRef idx="1">
+            <a:schemeClr val="accent1"/>
+          </a:effectRef>
+          <a:fontRef idx="minor">
+            <a:schemeClr val="tx1"/>
+          </a:fontRef>
+        </p:style>
+      </p:cxnSp>
+      <p:sp>
+        <p:nvSpPr>
+          <p:cNvPr id="33" name="Rounded Rectangle 32"/>
+          <p:cNvSpPr/>
+          <p:nvPr/>
+        </p:nvSpPr>
+        <p:spPr>
+          <a:xfrm>
+            <a:off x="933716" y="5276042"/>
+            <a:ext cx="1745209" cy="552622"/>
+          </a:xfrm>
+          <a:prstGeom prst="roundRect">
+            <a:avLst>
+              <a:gd name="adj" fmla="val 50000"/>
+            </a:avLst>
+          </a:prstGeom>
+          <a:solidFill>
+            <a:srgbClr val="E3EEF9"/>
+          </a:solidFill>
+          <a:ln w="15875">
+            <a:solidFill>
+              <a:srgbClr val="2F5597"/>
+            </a:solidFill>
+          </a:ln>
+          <a:effectLst/>
+        </p:spPr>
+        <p:style>
+          <a:lnRef idx="1">
+            <a:schemeClr val="accent1"/>
+          </a:lnRef>
+          <a:fillRef idx="3">
+            <a:schemeClr val="accent1"/>
+          </a:fillRef>
+          <a:effectRef idx="2">
+            <a:schemeClr val="accent1"/>
+          </a:effectRef>
+          <a:fontRef idx="minor">
+            <a:schemeClr val="lt1"/>
+          </a:fontRef>
+        </p:style>
+        <p:txBody>
+          <a:bodyPr rtlCol="0" anchor="ctr" wrap="none" lIns="64000" rIns="64000" tIns="25400" bIns="25400"/>
+          <a:lstStyle/>
+          <a:p>
+            <a:pPr algn="ctr"/>
+            <a:r>
+              <a:rPr sz="1300" b="0">
+                <a:solidFill>
+                  <a:srgbClr val="000000"/>
+                </a:solidFill>
+                <a:latin typeface="Calibri"/>
+              </a:rPr>
+              <a:t>“Ai cho tao lương</a:t>
+            </a:r>
+          </a:p>
+          <a:p>
+            <a:pPr algn="ctr"/>
+            <a:r>
+              <a:rPr sz="1300" b="0">
+                <a:solidFill>
+                  <a:srgbClr val="000000"/>
+                </a:solidFill>
+                <a:latin typeface="Calibri"/>
+              </a:rPr>
+              <a:t>thiện?”</a:t>
+            </a:r>
+          </a:p>
+        </p:txBody>
+      </p:sp>
+      <p:cxnSp>
+        <p:nvCxnSpPr>
+          <p:cNvPr id="34" name="Connector 33"/>
+          <p:cNvCxnSpPr/>
+          <p:nvPr/>
+        </p:nvCxnSpPr>
+        <p:spPr>
+          <a:xfrm flipH="1">
+            <a:off x="2635999" y="5238597"/>
+            <a:ext cx="1702889" cy="941268"/>
+          </a:xfrm>
+          <a:prstGeom prst="line">
+            <a:avLst/>
+          </a:prstGeom>
+          <a:ln w="15875">
+            <a:solidFill>
+              <a:srgbClr val="2F5597"/>
+            </a:solidFill>
+          </a:ln>
+        </p:spPr>
+        <p:style>
+          <a:lnRef idx="2">
+            <a:schemeClr val="accent1"/>
+          </a:lnRef>
+          <a:fillRef idx="0">
+            <a:schemeClr val="accent1"/>
+          </a:fillRef>
+          <a:effectRef idx="1">
+            <a:schemeClr val="accent1"/>
+          </a:effectRef>
+          <a:fontRef idx="minor">
+            <a:schemeClr val="tx1"/>
+          </a:fontRef>
+        </p:style>
+      </p:cxnSp>
+      <p:sp>
+        <p:nvSpPr>
+          <p:cNvPr id="35" name="Rounded Rectangle 34"/>
+          <p:cNvSpPr/>
+          <p:nvPr/>
+        </p:nvSpPr>
+        <p:spPr>
+          <a:xfrm>
+            <a:off x="976642" y="5903554"/>
+            <a:ext cx="1659357" cy="552622"/>
+          </a:xfrm>
+          <a:prstGeom prst="roundRect">
+            <a:avLst>
+              <a:gd name="adj" fmla="val 50000"/>
+            </a:avLst>
+          </a:prstGeom>
+          <a:solidFill>
+            <a:srgbClr val="E3EEF9"/>
+          </a:solidFill>
+          <a:ln w="15875">
+            <a:solidFill>
+              <a:srgbClr val="2F5597"/>
+            </a:solidFill>
+          </a:ln>
+          <a:effectLst/>
+        </p:spPr>
+        <p:style>
+          <a:lnRef idx="1">
+            <a:schemeClr val="accent1"/>
+          </a:lnRef>
+          <a:fillRef idx="3">
+            <a:schemeClr val="accent1"/>
+          </a:fillRef>
+          <a:effectRef idx="2">
+            <a:schemeClr val="accent1"/>
+          </a:effectRef>
+          <a:fontRef idx="minor">
+            <a:schemeClr val="lt1"/>
+          </a:fontRef>
+        </p:style>
+        <p:txBody>
+          <a:bodyPr rtlCol="0" anchor="ctr" wrap="none" lIns="64000" rIns="64000" tIns="25400" bIns="25400"/>
+          <a:lstStyle/>
+          <a:p>
+            <a:pPr algn="ctr"/>
+            <a:r>
+              <a:rPr sz="1300" b="0">
+                <a:solidFill>
+                  <a:srgbClr val="000000"/>
+                </a:solidFill>
+                <a:latin typeface="Calibri"/>
+              </a:rPr>
+              <a:t>Kết: cái lò gạch</a:t>
+            </a:r>
+          </a:p>
+          <a:p>
+            <a:pPr algn="ctr"/>
+            <a:r>
+              <a:rPr sz="1300" b="0">
+                <a:solidFill>
+                  <a:srgbClr val="000000"/>
+                </a:solidFill>
+                <a:latin typeface="Calibri"/>
+              </a:rPr>
+              <a:t>cũ</a:t>
+            </a:r>
+          </a:p>
+        </p:txBody>
+      </p:sp>
+      <p:sp>
+        <p:nvSpPr>
+          <p:cNvPr id="36" name="Oval 35"/>
+          <p:cNvSpPr/>
+          <p:nvPr/>
+        </p:nvSpPr>
+        <p:spPr>
+          <a:xfrm>
+            <a:off x="3502606" y="4826713"/>
+            <a:ext cx="1672565" cy="823767"/>
+          </a:xfrm>
+          <a:prstGeom prst="ellipse">
+            <a:avLst/>
+          </a:prstGeom>
+          <a:solidFill>
+            <a:srgbClr val="E2EFDA"/>
+          </a:solidFill>
+          <a:ln w="31750">
+            <a:solidFill>
+              <a:srgbClr val="375623"/>
+            </a:solidFill>
+          </a:ln>
+          <a:effectLst/>
+        </p:spPr>
+        <p:style>
+          <a:lnRef idx="1">
+            <a:schemeClr val="accent1"/>
+          </a:lnRef>
+          <a:fillRef idx="3">
+            <a:schemeClr val="accent1"/>
+          </a:fillRef>
+          <a:effectRef idx="2">
+            <a:schemeClr val="accent1"/>
+          </a:effectRef>
+          <a:fontRef idx="minor">
+            <a:schemeClr val="lt1"/>
+          </a:fontRef>
+        </p:style>
+        <p:txBody>
+          <a:bodyPr rtlCol="0" anchor="ctr" wrap="none" lIns="64000" rIns="64000" tIns="25400" bIns="25400"/>
+          <a:lstStyle/>
+          <a:p>
+            <a:pPr algn="ctr"/>
+            <a:r>
+              <a:rPr sz="1500" b="1">
+                <a:solidFill>
+                  <a:srgbClr val="000000"/>
+                </a:solidFill>
+                <a:latin typeface="Calibri"/>
+              </a:rPr>
+              <a:t>③ Chí Phèo</a:t>
+            </a:r>
+          </a:p>
+          <a:p>
+            <a:pPr algn="ctr"/>
+            <a:r>
+              <a:rPr sz="1500" b="1">
+                <a:solidFill>
+                  <a:srgbClr val="000000"/>
+                </a:solidFill>
+                <a:latin typeface="Calibri"/>
+              </a:rPr>
+              <a:t>– Nam Cao</a:t>
+            </a:r>
+          </a:p>
+        </p:txBody>
+      </p:sp>
+      <p:cxnSp>
+        <p:nvCxnSpPr>
+          <p:cNvPr id="37" name="Connector 36"/>
+          <p:cNvCxnSpPr/>
+          <p:nvPr/>
+        </p:nvCxnSpPr>
+        <p:spPr>
+          <a:xfrm>
+            <a:off x="6027267" y="3954780"/>
+            <a:ext cx="1688379" cy="1283817"/>
+          </a:xfrm>
+          <a:prstGeom prst="line">
+            <a:avLst/>
+          </a:prstGeom>
+          <a:ln w="44450">
+            <a:solidFill>
+              <a:srgbClr val="7030A0"/>
+            </a:solidFill>
+          </a:ln>
+        </p:spPr>
+        <p:style>
+          <a:lnRef idx="2">
+            <a:schemeClr val="accent1"/>
+          </a:lnRef>
+          <a:fillRef idx="0">
+            <a:schemeClr val="accent1"/>
+          </a:fillRef>
+          <a:effectRef idx="1">
+            <a:schemeClr val="accent1"/>
+          </a:effectRef>
+          <a:fontRef idx="minor">
+            <a:schemeClr val="tx1"/>
+          </a:fontRef>
+        </p:style>
+      </p:cxnSp>
+      <p:cxnSp>
+        <p:nvCxnSpPr>
+          <p:cNvPr id="38" name="Connector 37"/>
+          <p:cNvCxnSpPr/>
+          <p:nvPr/>
+        </p:nvCxnSpPr>
+        <p:spPr>
+          <a:xfrm flipV="1">
+            <a:off x="7715646" y="4297329"/>
+            <a:ext cx="1788741" cy="941268"/>
+          </a:xfrm>
+          <a:prstGeom prst="line">
+            <a:avLst/>
+          </a:prstGeom>
+          <a:ln w="15875">
+            <a:solidFill>
+              <a:srgbClr val="7030A0"/>
+            </a:solidFill>
+          </a:ln>
+        </p:spPr>
+        <p:style>
+          <a:lnRef idx="2">
+            <a:schemeClr val="accent1"/>
+          </a:lnRef>
+          <a:fillRef idx="0">
+            <a:schemeClr val="accent1"/>
+          </a:fillRef>
+          <a:effectRef idx="1">
+            <a:schemeClr val="accent1"/>
+          </a:effectRef>
+          <a:fontRef idx="minor">
+            <a:schemeClr val="tx1"/>
+          </a:fontRef>
+        </p:style>
+      </p:cxnSp>
+      <p:sp>
+        <p:nvSpPr>
+          <p:cNvPr id="39" name="Rounded Rectangle 38"/>
+          <p:cNvSpPr/>
+          <p:nvPr/>
+        </p:nvSpPr>
+        <p:spPr>
+          <a:xfrm>
+            <a:off x="9504387" y="4021018"/>
+            <a:ext cx="1487653" cy="552622"/>
+          </a:xfrm>
+          <a:prstGeom prst="roundRect">
+            <a:avLst>
+              <a:gd name="adj" fmla="val 50000"/>
+            </a:avLst>
+          </a:prstGeom>
+          <a:solidFill>
+            <a:srgbClr val="F3E8F7"/>
+          </a:solidFill>
+          <a:ln w="15875">
+            <a:solidFill>
+              <a:srgbClr val="7030A0"/>
+            </a:solidFill>
+          </a:ln>
+          <a:effectLst/>
+        </p:spPr>
+        <p:style>
+          <a:lnRef idx="1">
+            <a:schemeClr val="accent1"/>
+          </a:lnRef>
+          <a:fillRef idx="3">
+            <a:schemeClr val="accent1"/>
+          </a:fillRef>
+          <a:effectRef idx="2">
+            <a:schemeClr val="accent1"/>
+          </a:effectRef>
+          <a:fontRef idx="minor">
+            <a:schemeClr val="lt1"/>
+          </a:fontRef>
+        </p:style>
+        <p:txBody>
+          <a:bodyPr rtlCol="0" anchor="ctr" wrap="none" lIns="64000" rIns="64000" tIns="25400" bIns="25400"/>
+          <a:lstStyle/>
+          <a:p>
+            <a:pPr algn="ctr"/>
+            <a:r>
+              <a:rPr sz="1300" b="0">
+                <a:solidFill>
+                  <a:srgbClr val="000000"/>
+                </a:solidFill>
+                <a:latin typeface="Calibri"/>
+              </a:rPr>
+              <a:t>Ngôn ngữ nói ↔</a:t>
+            </a:r>
+          </a:p>
+          <a:p>
+            <a:pPr algn="ctr"/>
+            <a:r>
+              <a:rPr sz="1300" b="0">
+                <a:solidFill>
+                  <a:srgbClr val="000000"/>
+                </a:solidFill>
+                <a:latin typeface="Calibri"/>
+              </a:rPr>
+              <a:t>ngôn ngữ viết</a:t>
+            </a:r>
+          </a:p>
+        </p:txBody>
+      </p:sp>
+      <p:cxnSp>
+        <p:nvCxnSpPr>
+          <p:cNvPr id="40" name="Connector 39"/>
+          <p:cNvCxnSpPr/>
+          <p:nvPr/>
+        </p:nvCxnSpPr>
+        <p:spPr>
+          <a:xfrm flipV="1">
+            <a:off x="7715646" y="4924841"/>
+            <a:ext cx="1788741" cy="313756"/>
+          </a:xfrm>
+          <a:prstGeom prst="line">
+            <a:avLst/>
+          </a:prstGeom>
+          <a:ln w="15875">
+            <a:solidFill>
+              <a:srgbClr val="7030A0"/>
+            </a:solidFill>
+          </a:ln>
+        </p:spPr>
+        <p:style>
+          <a:lnRef idx="2">
+            <a:schemeClr val="accent1"/>
+          </a:lnRef>
+          <a:fillRef idx="0">
+            <a:schemeClr val="accent1"/>
+          </a:fillRef>
+          <a:effectRef idx="1">
+            <a:schemeClr val="accent1"/>
+          </a:effectRef>
+          <a:fontRef idx="minor">
+            <a:schemeClr val="tx1"/>
+          </a:fontRef>
+        </p:style>
+      </p:cxnSp>
+      <p:sp>
+        <p:nvSpPr>
+          <p:cNvPr id="41" name="Rounded Rectangle 40"/>
+          <p:cNvSpPr/>
+          <p:nvPr/>
+        </p:nvSpPr>
+        <p:spPr>
+          <a:xfrm>
+            <a:off x="9504387" y="4648530"/>
+            <a:ext cx="1487653" cy="552622"/>
+          </a:xfrm>
+          <a:prstGeom prst="roundRect">
+            <a:avLst>
+              <a:gd name="adj" fmla="val 50000"/>
+            </a:avLst>
+          </a:prstGeom>
+          <a:solidFill>
+            <a:srgbClr val="F3E8F7"/>
+          </a:solidFill>
+          <a:ln w="15875">
+            <a:solidFill>
+              <a:srgbClr val="7030A0"/>
+            </a:solidFill>
+          </a:ln>
+          <a:effectLst/>
+        </p:spPr>
+        <p:style>
+          <a:lnRef idx="1">
+            <a:schemeClr val="accent1"/>
+          </a:lnRef>
+          <a:fillRef idx="3">
+            <a:schemeClr val="accent1"/>
+          </a:fillRef>
+          <a:effectRef idx="2">
+            <a:schemeClr val="accent1"/>
+          </a:effectRef>
+          <a:fontRef idx="minor">
+            <a:schemeClr val="lt1"/>
+          </a:fontRef>
+        </p:style>
+        <p:txBody>
+          <a:bodyPr rtlCol="0" anchor="ctr" wrap="none" lIns="64000" rIns="64000" tIns="25400" bIns="25400"/>
+          <a:lstStyle/>
+          <a:p>
+            <a:pPr algn="ctr"/>
+            <a:r>
+              <a:rPr sz="1300" b="1">
+                <a:solidFill>
+                  <a:srgbClr val="8B0000"/>
+                </a:solidFill>
+                <a:latin typeface="Calibri"/>
+              </a:rPr>
+              <a:t>NL về cách kể</a:t>
+            </a:r>
+          </a:p>
+          <a:p>
+            <a:pPr algn="ctr"/>
+            <a:r>
+              <a:rPr sz="1300" b="1">
+                <a:solidFill>
+                  <a:srgbClr val="8B0000"/>
+                </a:solidFill>
+                <a:latin typeface="Calibri"/>
+              </a:rPr>
+              <a:t>của tác giả</a:t>
+            </a:r>
+          </a:p>
+        </p:txBody>
+      </p:sp>
+      <p:cxnSp>
+        <p:nvCxnSpPr>
+          <p:cNvPr id="42" name="Connector 41"/>
+          <p:cNvCxnSpPr/>
+          <p:nvPr/>
+        </p:nvCxnSpPr>
+        <p:spPr>
+          <a:xfrm>
+            <a:off x="7715646" y="5238597"/>
+            <a:ext cx="1402407" cy="313756"/>
+          </a:xfrm>
+          <a:prstGeom prst="line">
+            <a:avLst/>
+          </a:prstGeom>
+          <a:ln w="15875">
+            <a:solidFill>
+              <a:srgbClr val="7030A0"/>
+            </a:solidFill>
+          </a:ln>
+        </p:spPr>
+        <p:style>
+          <a:lnRef idx="2">
+            <a:schemeClr val="accent1"/>
+          </a:lnRef>
+          <a:fillRef idx="0">
+            <a:schemeClr val="accent1"/>
+          </a:fillRef>
+          <a:effectRef idx="1">
+            <a:schemeClr val="accent1"/>
+          </a:effectRef>
+          <a:fontRef idx="minor">
+            <a:schemeClr val="tx1"/>
+          </a:fontRef>
+        </p:style>
+      </p:cxnSp>
+      <p:sp>
+        <p:nvSpPr>
+          <p:cNvPr id="43" name="Rounded Rectangle 42"/>
+          <p:cNvSpPr/>
+          <p:nvPr/>
+        </p:nvSpPr>
+        <p:spPr>
+          <a:xfrm>
+            <a:off x="9118053" y="5276042"/>
+            <a:ext cx="2260321" cy="552622"/>
+          </a:xfrm>
+          <a:prstGeom prst="roundRect">
+            <a:avLst>
+              <a:gd name="adj" fmla="val 50000"/>
+            </a:avLst>
+          </a:prstGeom>
+          <a:solidFill>
+            <a:srgbClr val="F3E8F7"/>
+          </a:solidFill>
+          <a:ln w="15875">
+            <a:solidFill>
+              <a:srgbClr val="7030A0"/>
+            </a:solidFill>
+          </a:ln>
+          <a:effectLst/>
+        </p:spPr>
+        <p:style>
+          <a:lnRef idx="1">
+            <a:schemeClr val="accent1"/>
+          </a:lnRef>
+          <a:fillRef idx="3">
+            <a:schemeClr val="accent1"/>
+          </a:fillRef>
+          <a:effectRef idx="2">
+            <a:schemeClr val="accent1"/>
+          </a:effectRef>
+          <a:fontRef idx="minor">
+            <a:schemeClr val="lt1"/>
+          </a:fontRef>
+        </p:style>
+        <p:txBody>
+          <a:bodyPr rtlCol="0" anchor="ctr" wrap="none" lIns="64000" rIns="64000" tIns="25400" bIns="25400"/>
+          <a:lstStyle/>
+          <a:p>
+            <a:pPr algn="ctr"/>
+            <a:r>
+              <a:rPr sz="1300" b="0">
+                <a:solidFill>
+                  <a:srgbClr val="000000"/>
+                </a:solidFill>
+                <a:latin typeface="Calibri"/>
+              </a:rPr>
+              <a:t>Thuyết trình nghệ thuật</a:t>
+            </a:r>
+          </a:p>
+          <a:p>
+            <a:pPr algn="ctr"/>
+            <a:r>
+              <a:rPr sz="1300" b="0">
+                <a:solidFill>
+                  <a:srgbClr val="000000"/>
+                </a:solidFill>
+                <a:latin typeface="Calibri"/>
+              </a:rPr>
+              <a:t>kể</a:t>
+            </a:r>
+          </a:p>
+        </p:txBody>
+      </p:sp>
+      <p:cxnSp>
+        <p:nvCxnSpPr>
+          <p:cNvPr id="44" name="Connector 43"/>
+          <p:cNvCxnSpPr/>
+          <p:nvPr/>
+        </p:nvCxnSpPr>
+        <p:spPr>
+          <a:xfrm>
+            <a:off x="7715646" y="5238597"/>
+            <a:ext cx="1617037" cy="941268"/>
+          </a:xfrm>
+          <a:prstGeom prst="line">
+            <a:avLst/>
+          </a:prstGeom>
+          <a:ln w="15875">
+            <a:solidFill>
+              <a:srgbClr val="7030A0"/>
+            </a:solidFill>
+          </a:ln>
+        </p:spPr>
+        <p:style>
+          <a:lnRef idx="2">
+            <a:schemeClr val="accent1"/>
+          </a:lnRef>
+          <a:fillRef idx="0">
+            <a:schemeClr val="accent1"/>
+          </a:fillRef>
+          <a:effectRef idx="1">
+            <a:schemeClr val="accent1"/>
+          </a:effectRef>
+          <a:fontRef idx="minor">
+            <a:schemeClr val="tx1"/>
+          </a:fontRef>
+        </p:style>
+      </p:cxnSp>
+      <p:sp>
+        <p:nvSpPr>
+          <p:cNvPr id="45" name="Rounded Rectangle 44"/>
+          <p:cNvSpPr/>
+          <p:nvPr/>
+        </p:nvSpPr>
+        <p:spPr>
+          <a:xfrm>
+            <a:off x="9332683" y="5903554"/>
+            <a:ext cx="1831061" cy="552622"/>
+          </a:xfrm>
+          <a:prstGeom prst="roundRect">
+            <a:avLst>
+              <a:gd name="adj" fmla="val 50000"/>
+            </a:avLst>
+          </a:prstGeom>
+          <a:solidFill>
+            <a:srgbClr val="F3E8F7"/>
+          </a:solidFill>
+          <a:ln w="15875">
+            <a:solidFill>
+              <a:srgbClr val="7030A0"/>
+            </a:solidFill>
+          </a:ln>
+          <a:effectLst/>
+        </p:spPr>
+        <p:style>
+          <a:lnRef idx="1">
+            <a:schemeClr val="accent1"/>
+          </a:lnRef>
+          <a:fillRef idx="3">
+            <a:schemeClr val="accent1"/>
+          </a:fillRef>
+          <a:effectRef idx="2">
+            <a:schemeClr val="accent1"/>
+          </a:effectRef>
+          <a:fontRef idx="minor">
+            <a:schemeClr val="lt1"/>
+          </a:fontRef>
+        </p:style>
+        <p:txBody>
+          <a:bodyPr rtlCol="0" anchor="ctr" wrap="none" lIns="64000" rIns="64000" tIns="25400" bIns="25400"/>
+          <a:lstStyle/>
+          <a:p>
+            <a:pPr algn="ctr"/>
+            <a:r>
+              <a:rPr sz="1300" b="0">
+                <a:solidFill>
+                  <a:srgbClr val="000000"/>
+                </a:solidFill>
+                <a:latin typeface="Calibri"/>
+              </a:rPr>
+              <a:t>Củng cố trực tuyến</a:t>
+            </a:r>
+          </a:p>
+          <a:p>
+            <a:pPr algn="ctr"/>
+            <a:r>
+              <a:rPr sz="1300" b="0">
+                <a:solidFill>
+                  <a:srgbClr val="000000"/>
+                </a:solidFill>
+                <a:latin typeface="Calibri"/>
+              </a:rPr>
+              <a:t>(QR)</a:t>
+            </a:r>
+          </a:p>
+        </p:txBody>
+      </p:sp>
+      <p:sp>
+        <p:nvSpPr>
+          <p:cNvPr id="46" name="Oval 45"/>
+          <p:cNvSpPr/>
+          <p:nvPr/>
+        </p:nvSpPr>
+        <p:spPr>
+          <a:xfrm>
+            <a:off x="6740679" y="4658216"/>
+            <a:ext cx="1949933" cy="1160762"/>
+          </a:xfrm>
+          <a:prstGeom prst="ellipse">
+            <a:avLst/>
+          </a:prstGeom>
+          <a:solidFill>
+            <a:srgbClr val="FFF2CC"/>
+          </a:solidFill>
+          <a:ln w="31750">
+            <a:solidFill>
+              <a:srgbClr val="BF8F00"/>
+            </a:solidFill>
+          </a:ln>
+          <a:effectLst/>
+        </p:spPr>
+        <p:style>
+          <a:lnRef idx="1">
+            <a:schemeClr val="accent1"/>
+          </a:lnRef>
+          <a:fillRef idx="3">
+            <a:schemeClr val="accent1"/>
+          </a:fillRef>
+          <a:effectRef idx="2">
+            <a:schemeClr val="accent1"/>
+          </a:effectRef>
+          <a:fontRef idx="minor">
+            <a:schemeClr val="lt1"/>
+          </a:fontRef>
+        </p:style>
+        <p:txBody>
+          <a:bodyPr rtlCol="0" anchor="ctr" wrap="none" lIns="64000" rIns="64000" tIns="25400" bIns="25400"/>
+          <a:lstStyle/>
+          <a:p>
+            <a:pPr algn="ctr"/>
+            <a:r>
+              <a:rPr sz="1500" b="1">
+                <a:solidFill>
+                  <a:srgbClr val="000000"/>
+                </a:solidFill>
+                <a:latin typeface="Calibri"/>
+              </a:rPr>
+              <a:t>④ Tiếng Việt</a:t>
+            </a:r>
+          </a:p>
+          <a:p>
+            <a:pPr algn="ctr"/>
+            <a:r>
+              <a:rPr sz="1500" b="1">
+                <a:solidFill>
+                  <a:srgbClr val="000000"/>
+                </a:solidFill>
+                <a:latin typeface="Calibri"/>
+              </a:rPr>
+              <a:t>– Viết –</a:t>
+            </a:r>
+          </a:p>
+          <a:p>
+            <a:pPr algn="ctr"/>
+            <a:r>
+              <a:rPr sz="1500" b="1">
+                <a:solidFill>
+                  <a:srgbClr val="000000"/>
+                </a:solidFill>
+                <a:latin typeface="Calibri"/>
+              </a:rPr>
+              <a:t>Nói</a:t>
+            </a:r>
+          </a:p>
+        </p:txBody>
+      </p:sp>
+      <p:sp>
+        <p:nvSpPr>
+          <p:cNvPr id="47" name="Oval 46"/>
+          <p:cNvSpPr/>
+          <p:nvPr/>
+        </p:nvSpPr>
+        <p:spPr>
+          <a:xfrm>
+            <a:off x="4862765" y="3484793"/>
+            <a:ext cx="2329003" cy="939972"/>
+          </a:xfrm>
+          <a:prstGeom prst="ellipse">
+            <a:avLst/>
+          </a:prstGeom>
+          <a:solidFill>
+            <a:srgbClr val="002060"/>
+          </a:solidFill>
+          <a:ln w="25400">
+            <a:solidFill>
+              <a:srgbClr val="000B1E"/>
+            </a:solidFill>
+          </a:ln>
+          <a:effectLst/>
+        </p:spPr>
+        <p:style>
+          <a:lnRef idx="1">
+            <a:schemeClr val="accent1"/>
+          </a:lnRef>
+          <a:fillRef idx="3">
+            <a:schemeClr val="accent1"/>
+          </a:fillRef>
+          <a:effectRef idx="2">
+            <a:schemeClr val="accent1"/>
+          </a:effectRef>
+          <a:fontRef idx="minor">
+            <a:schemeClr val="lt1"/>
+          </a:fontRef>
+        </p:style>
+        <p:txBody>
+          <a:bodyPr rtlCol="0" anchor="ctr" wrap="none" lIns="64000" rIns="64000" tIns="25400" bIns="25400"/>
+          <a:lstStyle/>
+          <a:p>
+            <a:pPr algn="ctr"/>
+            <a:r>
+              <a:rPr sz="1700" b="1">
+                <a:solidFill>
+                  <a:srgbClr val="FFFFFF"/>
+                </a:solidFill>
+                <a:latin typeface="Calibri"/>
+              </a:rPr>
+              <a:t>CÂU CHUYỆN VÀ</a:t>
+            </a:r>
+          </a:p>
+          <a:p>
+            <a:pPr algn="ctr"/>
+            <a:r>
+              <a:rPr sz="1700" b="1">
+                <a:solidFill>
+                  <a:srgbClr val="FFFFFF"/>
+                </a:solidFill>
+                <a:latin typeface="Calibri"/>
+              </a:rPr>
+              <a:t>ĐIỂM NHÌN</a:t>
+            </a:r>
+          </a:p>
+        </p:txBody>
+      </p:sp>
     </p:spTree>
   </p:cSld>
   <p:clrMapOvr>
